--- a/presentation/slides.pptx
+++ b/presentation/slides.pptx
@@ -16,16 +16,21 @@
     <p:sldId id="261" r:id="rId11"/>
     <p:sldId id="262" r:id="rId12"/>
     <p:sldId id="263" r:id="rId13"/>
+    <p:sldId id="264" r:id="rId14"/>
+    <p:sldId id="265" r:id="rId15"/>
+    <p:sldId id="266" r:id="rId16"/>
+    <p:sldId id="267" r:id="rId17"/>
+    <p:sldId id="268" r:id="rId18"/>
   </p:sldIdLst>
   <p:sldSz cy="5143500" cx="9144000"/>
   <p:notesSz cx="6858000" cy="9144000"/>
   <p:embeddedFontLst>
     <p:embeddedFont>
       <p:font typeface="Roboto Mono"/>
-      <p:regular r:id="rId14"/>
-      <p:bold r:id="rId15"/>
-      <p:italic r:id="rId16"/>
-      <p:boldItalic r:id="rId17"/>
+      <p:regular r:id="rId19"/>
+      <p:bold r:id="rId20"/>
+      <p:italic r:id="rId21"/>
+      <p:boldItalic r:id="rId22"/>
     </p:embeddedFont>
   </p:embeddedFontLst>
   <p:defaultTextStyle>
@@ -721,7 +726,106 @@
       </p:grpSpPr>
       <p:sp>
         <p:nvSpPr>
-          <p:cNvPr id="51" name="Google Shape;51;h78f48f5fb0be11bd_0_1440:notes"/>
+          <p:cNvPr id="51" name="Google Shape;51;p:notes"/>
+          <p:cNvSpPr/>
+          <p:nvPr>
+            <p:ph idx="2" type="sldImg"/>
+          </p:nvPr>
+        </p:nvSpPr>
+        <p:spPr>
+          <a:xfrm>
+            <a:off x="381300" y="685800"/>
+            <a:ext cx="6096075" cy="3429000"/>
+          </a:xfrm>
+          <a:custGeom>
+            <a:rect b="b" l="l" r="r" t="t"/>
+            <a:pathLst>
+              <a:path extrusionOk="0" h="120000" w="120000">
+                <a:moveTo>
+                  <a:pt x="0" y="0"/>
+                </a:moveTo>
+                <a:lnTo>
+                  <a:pt x="120000" y="0"/>
+                </a:lnTo>
+                <a:lnTo>
+                  <a:pt x="120000" y="120000"/>
+                </a:lnTo>
+                <a:lnTo>
+                  <a:pt x="0" y="120000"/>
+                </a:lnTo>
+                <a:close/>
+              </a:path>
+            </a:pathLst>
+          </a:custGeom>
+        </p:spPr>
+      </p:sp>
+      <p:sp>
+        <p:nvSpPr>
+          <p:cNvPr id="52" name="Google Shape;52;p:notes"/>
+          <p:cNvSpPr txBox="1"/>
+          <p:nvPr>
+            <p:ph idx="1" type="body"/>
+          </p:nvPr>
+        </p:nvSpPr>
+        <p:spPr>
+          <a:xfrm>
+            <a:off x="685800" y="4343400"/>
+            <a:ext cx="5486400" cy="4114800"/>
+          </a:xfrm>
+          <a:prstGeom prst="rect">
+            <a:avLst/>
+          </a:prstGeom>
+        </p:spPr>
+        <p:txBody>
+          <a:bodyPr anchorCtr="0" anchor="t" bIns="91425" lIns="91425" spcFirstLastPara="1" rIns="91425" wrap="square" tIns="91425">
+            <a:noAutofit/>
+          </a:bodyPr>
+          <a:lstStyle/>
+          <a:p>
+            <a:pPr indent="0" lvl="0" marL="0" rtl="0" algn="l">
+              <a:spcBef>
+                <a:spcPts val="0"/>
+              </a:spcBef>
+              <a:spcAft>
+                <a:spcPts val="0"/>
+              </a:spcAft>
+              <a:buNone/>
+            </a:pPr>
+            <a:r>
+              <a:t/>
+            </a:r>
+            <a:endParaRPr/>
+          </a:p>
+        </p:txBody>
+      </p:sp>
+    </p:spTree>
+  </p:cSld>
+  <p:clrMapOvr>
+    <a:masterClrMapping/>
+  </p:clrMapOvr>
+</p:notes>
+</file>
+
+<file path=ppt/notesSlides/notesSlide10.xml><?xml version="1.0" encoding="utf-8"?>
+<p:notes xmlns:a="http://schemas.openxmlformats.org/drawingml/2006/main" xmlns:r="http://schemas.openxmlformats.org/officeDocument/2006/relationships" xmlns:mc="http://schemas.openxmlformats.org/markup-compatibility/2006" xmlns:mv="urn:schemas-microsoft-com:mac:vml" xmlns:p="http://schemas.openxmlformats.org/presentationml/2006/main" xmlns:c="http://schemas.openxmlformats.org/drawingml/2006/chart" xmlns:dgm="http://schemas.openxmlformats.org/drawingml/2006/diagram" xmlns:o="urn:schemas-microsoft-com:office:office" xmlns:v="urn:schemas-microsoft-com:vml" xmlns:pvml="urn:schemas-microsoft-com:office:powerpoint" xmlns:com="http://schemas.openxmlformats.org/drawingml/2006/compatibility" xmlns:p14="http://schemas.microsoft.com/office/powerpoint/2010/main" xmlns:p15="http://schemas.microsoft.com/office/powerpoint/2012/main" xmlns:ahyp="http://schemas.microsoft.com/office/drawing/2018/hyperlinkcolor" showMasterPhAnim="0" showMasterSp="0">
+  <p:cSld>
+    <p:spTree>
+      <p:nvGrpSpPr>
+        <p:cNvPr id="104" name="Shape 104"/>
+        <p:cNvGrpSpPr/>
+        <p:nvPr/>
+      </p:nvGrpSpPr>
+      <p:grpSpPr>
+        <a:xfrm>
+          <a:off x="0" y="0"/>
+          <a:ext cx="0" cy="0"/>
+          <a:chOff x="0" y="0"/>
+          <a:chExt cx="0" cy="0"/>
+        </a:xfrm>
+      </p:grpSpPr>
+      <p:sp>
+        <p:nvSpPr>
+          <p:cNvPr id="105" name="Google Shape;105;h24fcefba4e257cc3_0_1105:notes"/>
           <p:cNvSpPr/>
           <p:nvPr>
             <p:ph idx="2" type="sldImg"/>
@@ -756,7 +860,7 @@
       </p:sp>
       <p:sp>
         <p:nvSpPr>
-          <p:cNvPr id="52" name="Google Shape;52;h78f48f5fb0be11bd_0_1440:notes"/>
+          <p:cNvPr id="106" name="Google Shape;106;h24fcefba4e257cc3_0_1105:notes"/>
           <p:cNvSpPr txBox="1"/>
           <p:nvPr>
             <p:ph idx="1" type="body"/>
@@ -801,12 +905,12 @@
 </p:notes>
 </file>
 
-<file path=ppt/notesSlides/notesSlide2.xml><?xml version="1.0" encoding="utf-8"?>
+<file path=ppt/notesSlides/notesSlide11.xml><?xml version="1.0" encoding="utf-8"?>
 <p:notes xmlns:a="http://schemas.openxmlformats.org/drawingml/2006/main" xmlns:r="http://schemas.openxmlformats.org/officeDocument/2006/relationships" xmlns:mc="http://schemas.openxmlformats.org/markup-compatibility/2006" xmlns:mv="urn:schemas-microsoft-com:mac:vml" xmlns:p="http://schemas.openxmlformats.org/presentationml/2006/main" xmlns:c="http://schemas.openxmlformats.org/drawingml/2006/chart" xmlns:dgm="http://schemas.openxmlformats.org/drawingml/2006/diagram" xmlns:o="urn:schemas-microsoft-com:office:office" xmlns:v="urn:schemas-microsoft-com:vml" xmlns:pvml="urn:schemas-microsoft-com:office:powerpoint" xmlns:com="http://schemas.openxmlformats.org/drawingml/2006/compatibility" xmlns:p14="http://schemas.microsoft.com/office/powerpoint/2010/main" xmlns:p15="http://schemas.microsoft.com/office/powerpoint/2012/main" xmlns:ahyp="http://schemas.microsoft.com/office/drawing/2018/hyperlinkcolor" showMasterPhAnim="0" showMasterSp="0">
   <p:cSld>
     <p:spTree>
       <p:nvGrpSpPr>
-        <p:cNvPr id="56" name="Shape 56"/>
+        <p:cNvPr id="110" name="Shape 110"/>
         <p:cNvGrpSpPr/>
         <p:nvPr/>
       </p:nvGrpSpPr>
@@ -820,106 +924,7 @@
       </p:grpSpPr>
       <p:sp>
         <p:nvSpPr>
-          <p:cNvPr id="57" name="Google Shape;57;p:notes"/>
-          <p:cNvSpPr/>
-          <p:nvPr>
-            <p:ph idx="2" type="sldImg"/>
-          </p:nvPr>
-        </p:nvSpPr>
-        <p:spPr>
-          <a:xfrm>
-            <a:off x="381300" y="685800"/>
-            <a:ext cx="6096075" cy="3429000"/>
-          </a:xfrm>
-          <a:custGeom>
-            <a:rect b="b" l="l" r="r" t="t"/>
-            <a:pathLst>
-              <a:path extrusionOk="0" h="120000" w="120000">
-                <a:moveTo>
-                  <a:pt x="0" y="0"/>
-                </a:moveTo>
-                <a:lnTo>
-                  <a:pt x="120000" y="0"/>
-                </a:lnTo>
-                <a:lnTo>
-                  <a:pt x="120000" y="120000"/>
-                </a:lnTo>
-                <a:lnTo>
-                  <a:pt x="0" y="120000"/>
-                </a:lnTo>
-                <a:close/>
-              </a:path>
-            </a:pathLst>
-          </a:custGeom>
-        </p:spPr>
-      </p:sp>
-      <p:sp>
-        <p:nvSpPr>
-          <p:cNvPr id="58" name="Google Shape;58;p:notes"/>
-          <p:cNvSpPr txBox="1"/>
-          <p:nvPr>
-            <p:ph idx="1" type="body"/>
-          </p:nvPr>
-        </p:nvSpPr>
-        <p:spPr>
-          <a:xfrm>
-            <a:off x="685800" y="4343400"/>
-            <a:ext cx="5486400" cy="4114800"/>
-          </a:xfrm>
-          <a:prstGeom prst="rect">
-            <a:avLst/>
-          </a:prstGeom>
-        </p:spPr>
-        <p:txBody>
-          <a:bodyPr anchorCtr="0" anchor="t" bIns="91425" lIns="91425" spcFirstLastPara="1" rIns="91425" wrap="square" tIns="91425">
-            <a:noAutofit/>
-          </a:bodyPr>
-          <a:lstStyle/>
-          <a:p>
-            <a:pPr indent="0" lvl="0" marL="0" rtl="0" algn="l">
-              <a:spcBef>
-                <a:spcPts val="0"/>
-              </a:spcBef>
-              <a:spcAft>
-                <a:spcPts val="0"/>
-              </a:spcAft>
-              <a:buNone/>
-            </a:pPr>
-            <a:r>
-              <a:t/>
-            </a:r>
-            <a:endParaRPr/>
-          </a:p>
-        </p:txBody>
-      </p:sp>
-    </p:spTree>
-  </p:cSld>
-  <p:clrMapOvr>
-    <a:masterClrMapping/>
-  </p:clrMapOvr>
-</p:notes>
-</file>
-
-<file path=ppt/notesSlides/notesSlide3.xml><?xml version="1.0" encoding="utf-8"?>
-<p:notes xmlns:a="http://schemas.openxmlformats.org/drawingml/2006/main" xmlns:r="http://schemas.openxmlformats.org/officeDocument/2006/relationships" xmlns:mc="http://schemas.openxmlformats.org/markup-compatibility/2006" xmlns:mv="urn:schemas-microsoft-com:mac:vml" xmlns:p="http://schemas.openxmlformats.org/presentationml/2006/main" xmlns:c="http://schemas.openxmlformats.org/drawingml/2006/chart" xmlns:dgm="http://schemas.openxmlformats.org/drawingml/2006/diagram" xmlns:o="urn:schemas-microsoft-com:office:office" xmlns:v="urn:schemas-microsoft-com:vml" xmlns:pvml="urn:schemas-microsoft-com:office:powerpoint" xmlns:com="http://schemas.openxmlformats.org/drawingml/2006/compatibility" xmlns:p14="http://schemas.microsoft.com/office/powerpoint/2010/main" xmlns:p15="http://schemas.microsoft.com/office/powerpoint/2012/main" xmlns:ahyp="http://schemas.microsoft.com/office/drawing/2018/hyperlinkcolor" showMasterPhAnim="0" showMasterSp="0">
-  <p:cSld>
-    <p:spTree>
-      <p:nvGrpSpPr>
-        <p:cNvPr id="62" name="Shape 62"/>
-        <p:cNvGrpSpPr/>
-        <p:nvPr/>
-      </p:nvGrpSpPr>
-      <p:grpSpPr>
-        <a:xfrm>
-          <a:off x="0" y="0"/>
-          <a:ext cx="0" cy="0"/>
-          <a:chOff x="0" y="0"/>
-          <a:chExt cx="0" cy="0"/>
-        </a:xfrm>
-      </p:grpSpPr>
-      <p:sp>
-        <p:nvSpPr>
-          <p:cNvPr id="63" name="Google Shape;63;h78f48f5fb0be11bd_0_1447:notes"/>
+          <p:cNvPr id="111" name="Google Shape;111;h24fcefba4e257cc3_0_1111:notes"/>
           <p:cNvSpPr/>
           <p:nvPr>
             <p:ph idx="2" type="sldImg"/>
@@ -954,7 +959,7 @@
       </p:sp>
       <p:sp>
         <p:nvSpPr>
-          <p:cNvPr id="64" name="Google Shape;64;h78f48f5fb0be11bd_0_1447:notes"/>
+          <p:cNvPr id="112" name="Google Shape;112;h24fcefba4e257cc3_0_1111:notes"/>
           <p:cNvSpPr txBox="1"/>
           <p:nvPr>
             <p:ph idx="1" type="body"/>
@@ -999,12 +1004,12 @@
 </p:notes>
 </file>
 
-<file path=ppt/notesSlides/notesSlide4.xml><?xml version="1.0" encoding="utf-8"?>
+<file path=ppt/notesSlides/notesSlide12.xml><?xml version="1.0" encoding="utf-8"?>
 <p:notes xmlns:a="http://schemas.openxmlformats.org/drawingml/2006/main" xmlns:r="http://schemas.openxmlformats.org/officeDocument/2006/relationships" xmlns:mc="http://schemas.openxmlformats.org/markup-compatibility/2006" xmlns:mv="urn:schemas-microsoft-com:mac:vml" xmlns:p="http://schemas.openxmlformats.org/presentationml/2006/main" xmlns:c="http://schemas.openxmlformats.org/drawingml/2006/chart" xmlns:dgm="http://schemas.openxmlformats.org/drawingml/2006/diagram" xmlns:o="urn:schemas-microsoft-com:office:office" xmlns:v="urn:schemas-microsoft-com:vml" xmlns:pvml="urn:schemas-microsoft-com:office:powerpoint" xmlns:com="http://schemas.openxmlformats.org/drawingml/2006/compatibility" xmlns:p14="http://schemas.microsoft.com/office/powerpoint/2010/main" xmlns:p15="http://schemas.microsoft.com/office/powerpoint/2012/main" xmlns:ahyp="http://schemas.microsoft.com/office/drawing/2018/hyperlinkcolor" showMasterPhAnim="0" showMasterSp="0">
   <p:cSld>
     <p:spTree>
       <p:nvGrpSpPr>
-        <p:cNvPr id="68" name="Shape 68"/>
+        <p:cNvPr id="116" name="Shape 116"/>
         <p:cNvGrpSpPr/>
         <p:nvPr/>
       </p:nvGrpSpPr>
@@ -1018,7 +1023,7 @@
       </p:grpSpPr>
       <p:sp>
         <p:nvSpPr>
-          <p:cNvPr id="69" name="Google Shape;69;h78f48f5fb0be11bd_0_1460:notes"/>
+          <p:cNvPr id="117" name="Google Shape;117;h24fcefba4e257cc3_0_1117:notes"/>
           <p:cNvSpPr/>
           <p:nvPr>
             <p:ph idx="2" type="sldImg"/>
@@ -1053,7 +1058,7 @@
       </p:sp>
       <p:sp>
         <p:nvSpPr>
-          <p:cNvPr id="70" name="Google Shape;70;h78f48f5fb0be11bd_0_1460:notes"/>
+          <p:cNvPr id="118" name="Google Shape;118;h24fcefba4e257cc3_0_1117:notes"/>
           <p:cNvSpPr txBox="1"/>
           <p:nvPr>
             <p:ph idx="1" type="body"/>
@@ -1098,12 +1103,12 @@
 </p:notes>
 </file>
 
-<file path=ppt/notesSlides/notesSlide5.xml><?xml version="1.0" encoding="utf-8"?>
+<file path=ppt/notesSlides/notesSlide13.xml><?xml version="1.0" encoding="utf-8"?>
 <p:notes xmlns:a="http://schemas.openxmlformats.org/drawingml/2006/main" xmlns:r="http://schemas.openxmlformats.org/officeDocument/2006/relationships" xmlns:mc="http://schemas.openxmlformats.org/markup-compatibility/2006" xmlns:mv="urn:schemas-microsoft-com:mac:vml" xmlns:p="http://schemas.openxmlformats.org/presentationml/2006/main" xmlns:c="http://schemas.openxmlformats.org/drawingml/2006/chart" xmlns:dgm="http://schemas.openxmlformats.org/drawingml/2006/diagram" xmlns:o="urn:schemas-microsoft-com:office:office" xmlns:v="urn:schemas-microsoft-com:vml" xmlns:pvml="urn:schemas-microsoft-com:office:powerpoint" xmlns:com="http://schemas.openxmlformats.org/drawingml/2006/compatibility" xmlns:p14="http://schemas.microsoft.com/office/powerpoint/2010/main" xmlns:p15="http://schemas.microsoft.com/office/powerpoint/2012/main" xmlns:ahyp="http://schemas.microsoft.com/office/drawing/2018/hyperlinkcolor" showMasterPhAnim="0" showMasterSp="0">
   <p:cSld>
     <p:spTree>
       <p:nvGrpSpPr>
-        <p:cNvPr id="75" name="Shape 75"/>
+        <p:cNvPr id="122" name="Shape 122"/>
         <p:cNvGrpSpPr/>
         <p:nvPr/>
       </p:nvGrpSpPr>
@@ -1117,7 +1122,7 @@
       </p:grpSpPr>
       <p:sp>
         <p:nvSpPr>
-          <p:cNvPr id="76" name="Google Shape;76;h78f48f5fb0be11bd_0_1466:notes"/>
+          <p:cNvPr id="123" name="Google Shape;123;h24fcefba4e257cc3_0_1122:notes"/>
           <p:cNvSpPr/>
           <p:nvPr>
             <p:ph idx="2" type="sldImg"/>
@@ -1152,7 +1157,7 @@
       </p:sp>
       <p:sp>
         <p:nvSpPr>
-          <p:cNvPr id="77" name="Google Shape;77;h78f48f5fb0be11bd_0_1466:notes"/>
+          <p:cNvPr id="124" name="Google Shape;124;h24fcefba4e257cc3_0_1122:notes"/>
           <p:cNvSpPr txBox="1"/>
           <p:nvPr>
             <p:ph idx="1" type="body"/>
@@ -1197,12 +1202,12 @@
 </p:notes>
 </file>
 
-<file path=ppt/notesSlides/notesSlide6.xml><?xml version="1.0" encoding="utf-8"?>
+<file path=ppt/notesSlides/notesSlide2.xml><?xml version="1.0" encoding="utf-8"?>
 <p:notes xmlns:a="http://schemas.openxmlformats.org/drawingml/2006/main" xmlns:r="http://schemas.openxmlformats.org/officeDocument/2006/relationships" xmlns:mc="http://schemas.openxmlformats.org/markup-compatibility/2006" xmlns:mv="urn:schemas-microsoft-com:mac:vml" xmlns:p="http://schemas.openxmlformats.org/presentationml/2006/main" xmlns:c="http://schemas.openxmlformats.org/drawingml/2006/chart" xmlns:dgm="http://schemas.openxmlformats.org/drawingml/2006/diagram" xmlns:o="urn:schemas-microsoft-com:office:office" xmlns:v="urn:schemas-microsoft-com:vml" xmlns:pvml="urn:schemas-microsoft-com:office:powerpoint" xmlns:com="http://schemas.openxmlformats.org/drawingml/2006/compatibility" xmlns:p14="http://schemas.microsoft.com/office/powerpoint/2010/main" xmlns:p15="http://schemas.microsoft.com/office/powerpoint/2012/main" xmlns:ahyp="http://schemas.microsoft.com/office/drawing/2018/hyperlinkcolor" showMasterPhAnim="0" showMasterSp="0">
   <p:cSld>
     <p:spTree>
       <p:nvGrpSpPr>
-        <p:cNvPr id="81" name="Shape 81"/>
+        <p:cNvPr id="56" name="Shape 56"/>
         <p:cNvGrpSpPr/>
         <p:nvPr/>
       </p:nvGrpSpPr>
@@ -1216,7 +1221,7 @@
       </p:grpSpPr>
       <p:sp>
         <p:nvSpPr>
-          <p:cNvPr id="82" name="Google Shape;82;h78f48f5fb0be11bd_0_1474:notes"/>
+          <p:cNvPr id="57" name="Google Shape;57;h24fcefba4e257cc3_0_1049:notes"/>
           <p:cNvSpPr/>
           <p:nvPr>
             <p:ph idx="2" type="sldImg"/>
@@ -1251,7 +1256,7 @@
       </p:sp>
       <p:sp>
         <p:nvSpPr>
-          <p:cNvPr id="83" name="Google Shape;83;h78f48f5fb0be11bd_0_1474:notes"/>
+          <p:cNvPr id="58" name="Google Shape;58;h24fcefba4e257cc3_0_1049:notes"/>
           <p:cNvSpPr txBox="1"/>
           <p:nvPr>
             <p:ph idx="1" type="body"/>
@@ -1296,12 +1301,12 @@
 </p:notes>
 </file>
 
-<file path=ppt/notesSlides/notesSlide7.xml><?xml version="1.0" encoding="utf-8"?>
+<file path=ppt/notesSlides/notesSlide3.xml><?xml version="1.0" encoding="utf-8"?>
 <p:notes xmlns:a="http://schemas.openxmlformats.org/drawingml/2006/main" xmlns:r="http://schemas.openxmlformats.org/officeDocument/2006/relationships" xmlns:mc="http://schemas.openxmlformats.org/markup-compatibility/2006" xmlns:mv="urn:schemas-microsoft-com:mac:vml" xmlns:p="http://schemas.openxmlformats.org/presentationml/2006/main" xmlns:c="http://schemas.openxmlformats.org/drawingml/2006/chart" xmlns:dgm="http://schemas.openxmlformats.org/drawingml/2006/diagram" xmlns:o="urn:schemas-microsoft-com:office:office" xmlns:v="urn:schemas-microsoft-com:vml" xmlns:pvml="urn:schemas-microsoft-com:office:powerpoint" xmlns:com="http://schemas.openxmlformats.org/drawingml/2006/compatibility" xmlns:p14="http://schemas.microsoft.com/office/powerpoint/2010/main" xmlns:p15="http://schemas.microsoft.com/office/powerpoint/2012/main" xmlns:ahyp="http://schemas.microsoft.com/office/drawing/2018/hyperlinkcolor" showMasterPhAnim="0" showMasterSp="0">
   <p:cSld>
     <p:spTree>
       <p:nvGrpSpPr>
-        <p:cNvPr id="87" name="Shape 87"/>
+        <p:cNvPr id="62" name="Shape 62"/>
         <p:cNvGrpSpPr/>
         <p:nvPr/>
       </p:nvGrpSpPr>
@@ -1315,7 +1320,7 @@
       </p:grpSpPr>
       <p:sp>
         <p:nvSpPr>
-          <p:cNvPr id="88" name="Google Shape;88;h78f48f5fb0be11bd_0_1480:notes"/>
+          <p:cNvPr id="63" name="Google Shape;63;h24fcefba4e257cc3_0_1054:notes"/>
           <p:cNvSpPr/>
           <p:nvPr>
             <p:ph idx="2" type="sldImg"/>
@@ -1350,7 +1355,7 @@
       </p:sp>
       <p:sp>
         <p:nvSpPr>
-          <p:cNvPr id="89" name="Google Shape;89;h78f48f5fb0be11bd_0_1480:notes"/>
+          <p:cNvPr id="64" name="Google Shape;64;h24fcefba4e257cc3_0_1054:notes"/>
           <p:cNvSpPr txBox="1"/>
           <p:nvPr>
             <p:ph idx="1" type="body"/>
@@ -1395,12 +1400,12 @@
 </p:notes>
 </file>
 
-<file path=ppt/notesSlides/notesSlide8.xml><?xml version="1.0" encoding="utf-8"?>
+<file path=ppt/notesSlides/notesSlide4.xml><?xml version="1.0" encoding="utf-8"?>
 <p:notes xmlns:a="http://schemas.openxmlformats.org/drawingml/2006/main" xmlns:r="http://schemas.openxmlformats.org/officeDocument/2006/relationships" xmlns:mc="http://schemas.openxmlformats.org/markup-compatibility/2006" xmlns:mv="urn:schemas-microsoft-com:mac:vml" xmlns:p="http://schemas.openxmlformats.org/presentationml/2006/main" xmlns:c="http://schemas.openxmlformats.org/drawingml/2006/chart" xmlns:dgm="http://schemas.openxmlformats.org/drawingml/2006/diagram" xmlns:o="urn:schemas-microsoft-com:office:office" xmlns:v="urn:schemas-microsoft-com:vml" xmlns:pvml="urn:schemas-microsoft-com:office:powerpoint" xmlns:com="http://schemas.openxmlformats.org/drawingml/2006/compatibility" xmlns:p14="http://schemas.microsoft.com/office/powerpoint/2010/main" xmlns:p15="http://schemas.microsoft.com/office/powerpoint/2012/main" xmlns:ahyp="http://schemas.microsoft.com/office/drawing/2018/hyperlinkcolor" showMasterPhAnim="0" showMasterSp="0">
   <p:cSld>
     <p:spTree>
       <p:nvGrpSpPr>
-        <p:cNvPr id="91" name="Shape 91"/>
+        <p:cNvPr id="68" name="Shape 68"/>
         <p:cNvGrpSpPr/>
         <p:nvPr/>
       </p:nvGrpSpPr>
@@ -1414,7 +1419,7 @@
       </p:grpSpPr>
       <p:sp>
         <p:nvSpPr>
-          <p:cNvPr id="92" name="Google Shape;92;h78f48f5fb0be11bd_0_1486:notes"/>
+          <p:cNvPr id="69" name="Google Shape;69;h24fcefba4e257cc3_0_1061:notes"/>
           <p:cNvSpPr/>
           <p:nvPr>
             <p:ph idx="2" type="sldImg"/>
@@ -1449,7 +1454,502 @@
       </p:sp>
       <p:sp>
         <p:nvSpPr>
-          <p:cNvPr id="93" name="Google Shape;93;h78f48f5fb0be11bd_0_1486:notes"/>
+          <p:cNvPr id="70" name="Google Shape;70;h24fcefba4e257cc3_0_1061:notes"/>
+          <p:cNvSpPr txBox="1"/>
+          <p:nvPr>
+            <p:ph idx="1" type="body"/>
+          </p:nvPr>
+        </p:nvSpPr>
+        <p:spPr>
+          <a:xfrm>
+            <a:off x="685800" y="4343400"/>
+            <a:ext cx="5486400" cy="4114800"/>
+          </a:xfrm>
+          <a:prstGeom prst="rect">
+            <a:avLst/>
+          </a:prstGeom>
+        </p:spPr>
+        <p:txBody>
+          <a:bodyPr anchorCtr="0" anchor="t" bIns="91425" lIns="91425" spcFirstLastPara="1" rIns="91425" wrap="square" tIns="91425">
+            <a:noAutofit/>
+          </a:bodyPr>
+          <a:lstStyle/>
+          <a:p>
+            <a:pPr indent="0" lvl="0" marL="0" rtl="0" algn="l">
+              <a:spcBef>
+                <a:spcPts val="0"/>
+              </a:spcBef>
+              <a:spcAft>
+                <a:spcPts val="0"/>
+              </a:spcAft>
+              <a:buNone/>
+            </a:pPr>
+            <a:r>
+              <a:t/>
+            </a:r>
+            <a:endParaRPr/>
+          </a:p>
+        </p:txBody>
+      </p:sp>
+    </p:spTree>
+  </p:cSld>
+  <p:clrMapOvr>
+    <a:masterClrMapping/>
+  </p:clrMapOvr>
+</p:notes>
+</file>
+
+<file path=ppt/notesSlides/notesSlide5.xml><?xml version="1.0" encoding="utf-8"?>
+<p:notes xmlns:a="http://schemas.openxmlformats.org/drawingml/2006/main" xmlns:r="http://schemas.openxmlformats.org/officeDocument/2006/relationships" xmlns:mc="http://schemas.openxmlformats.org/markup-compatibility/2006" xmlns:mv="urn:schemas-microsoft-com:mac:vml" xmlns:p="http://schemas.openxmlformats.org/presentationml/2006/main" xmlns:c="http://schemas.openxmlformats.org/drawingml/2006/chart" xmlns:dgm="http://schemas.openxmlformats.org/drawingml/2006/diagram" xmlns:o="urn:schemas-microsoft-com:office:office" xmlns:v="urn:schemas-microsoft-com:vml" xmlns:pvml="urn:schemas-microsoft-com:office:powerpoint" xmlns:com="http://schemas.openxmlformats.org/drawingml/2006/compatibility" xmlns:p14="http://schemas.microsoft.com/office/powerpoint/2010/main" xmlns:p15="http://schemas.microsoft.com/office/powerpoint/2012/main" xmlns:ahyp="http://schemas.microsoft.com/office/drawing/2018/hyperlinkcolor" showMasterPhAnim="0" showMasterSp="0">
+  <p:cSld>
+    <p:spTree>
+      <p:nvGrpSpPr>
+        <p:cNvPr id="74" name="Shape 74"/>
+        <p:cNvGrpSpPr/>
+        <p:nvPr/>
+      </p:nvGrpSpPr>
+      <p:grpSpPr>
+        <a:xfrm>
+          <a:off x="0" y="0"/>
+          <a:ext cx="0" cy="0"/>
+          <a:chOff x="0" y="0"/>
+          <a:chExt cx="0" cy="0"/>
+        </a:xfrm>
+      </p:grpSpPr>
+      <p:sp>
+        <p:nvSpPr>
+          <p:cNvPr id="75" name="Google Shape;75;h24fcefba4e257cc3_0_1067:notes"/>
+          <p:cNvSpPr/>
+          <p:nvPr>
+            <p:ph idx="2" type="sldImg"/>
+          </p:nvPr>
+        </p:nvSpPr>
+        <p:spPr>
+          <a:xfrm>
+            <a:off x="381300" y="685800"/>
+            <a:ext cx="6096000" cy="3429000"/>
+          </a:xfrm>
+          <a:custGeom>
+            <a:rect b="b" l="l" r="r" t="t"/>
+            <a:pathLst>
+              <a:path extrusionOk="0" h="120000" w="120000">
+                <a:moveTo>
+                  <a:pt x="0" y="0"/>
+                </a:moveTo>
+                <a:lnTo>
+                  <a:pt x="120000" y="0"/>
+                </a:lnTo>
+                <a:lnTo>
+                  <a:pt x="120000" y="120000"/>
+                </a:lnTo>
+                <a:lnTo>
+                  <a:pt x="0" y="120000"/>
+                </a:lnTo>
+                <a:close/>
+              </a:path>
+            </a:pathLst>
+          </a:custGeom>
+        </p:spPr>
+      </p:sp>
+      <p:sp>
+        <p:nvSpPr>
+          <p:cNvPr id="76" name="Google Shape;76;h24fcefba4e257cc3_0_1067:notes"/>
+          <p:cNvSpPr txBox="1"/>
+          <p:nvPr>
+            <p:ph idx="1" type="body"/>
+          </p:nvPr>
+        </p:nvSpPr>
+        <p:spPr>
+          <a:xfrm>
+            <a:off x="685800" y="4343400"/>
+            <a:ext cx="5486400" cy="4114800"/>
+          </a:xfrm>
+          <a:prstGeom prst="rect">
+            <a:avLst/>
+          </a:prstGeom>
+        </p:spPr>
+        <p:txBody>
+          <a:bodyPr anchorCtr="0" anchor="t" bIns="91425" lIns="91425" spcFirstLastPara="1" rIns="91425" wrap="square" tIns="91425">
+            <a:noAutofit/>
+          </a:bodyPr>
+          <a:lstStyle/>
+          <a:p>
+            <a:pPr indent="0" lvl="0" marL="0" rtl="0" algn="l">
+              <a:spcBef>
+                <a:spcPts val="0"/>
+              </a:spcBef>
+              <a:spcAft>
+                <a:spcPts val="0"/>
+              </a:spcAft>
+              <a:buNone/>
+            </a:pPr>
+            <a:r>
+              <a:t/>
+            </a:r>
+            <a:endParaRPr/>
+          </a:p>
+        </p:txBody>
+      </p:sp>
+    </p:spTree>
+  </p:cSld>
+  <p:clrMapOvr>
+    <a:masterClrMapping/>
+  </p:clrMapOvr>
+</p:notes>
+</file>
+
+<file path=ppt/notesSlides/notesSlide6.xml><?xml version="1.0" encoding="utf-8"?>
+<p:notes xmlns:a="http://schemas.openxmlformats.org/drawingml/2006/main" xmlns:r="http://schemas.openxmlformats.org/officeDocument/2006/relationships" xmlns:mc="http://schemas.openxmlformats.org/markup-compatibility/2006" xmlns:mv="urn:schemas-microsoft-com:mac:vml" xmlns:p="http://schemas.openxmlformats.org/presentationml/2006/main" xmlns:c="http://schemas.openxmlformats.org/drawingml/2006/chart" xmlns:dgm="http://schemas.openxmlformats.org/drawingml/2006/diagram" xmlns:o="urn:schemas-microsoft-com:office:office" xmlns:v="urn:schemas-microsoft-com:vml" xmlns:pvml="urn:schemas-microsoft-com:office:powerpoint" xmlns:com="http://schemas.openxmlformats.org/drawingml/2006/compatibility" xmlns:p14="http://schemas.microsoft.com/office/powerpoint/2010/main" xmlns:p15="http://schemas.microsoft.com/office/powerpoint/2012/main" xmlns:ahyp="http://schemas.microsoft.com/office/drawing/2018/hyperlinkcolor" showMasterPhAnim="0" showMasterSp="0">
+  <p:cSld>
+    <p:spTree>
+      <p:nvGrpSpPr>
+        <p:cNvPr id="80" name="Shape 80"/>
+        <p:cNvGrpSpPr/>
+        <p:nvPr/>
+      </p:nvGrpSpPr>
+      <p:grpSpPr>
+        <a:xfrm>
+          <a:off x="0" y="0"/>
+          <a:ext cx="0" cy="0"/>
+          <a:chOff x="0" y="0"/>
+          <a:chExt cx="0" cy="0"/>
+        </a:xfrm>
+      </p:grpSpPr>
+      <p:sp>
+        <p:nvSpPr>
+          <p:cNvPr id="81" name="Google Shape;81;h24fcefba4e257cc3_0_1073:notes"/>
+          <p:cNvSpPr/>
+          <p:nvPr>
+            <p:ph idx="2" type="sldImg"/>
+          </p:nvPr>
+        </p:nvSpPr>
+        <p:spPr>
+          <a:xfrm>
+            <a:off x="381300" y="685800"/>
+            <a:ext cx="6096000" cy="3429000"/>
+          </a:xfrm>
+          <a:custGeom>
+            <a:rect b="b" l="l" r="r" t="t"/>
+            <a:pathLst>
+              <a:path extrusionOk="0" h="120000" w="120000">
+                <a:moveTo>
+                  <a:pt x="0" y="0"/>
+                </a:moveTo>
+                <a:lnTo>
+                  <a:pt x="120000" y="0"/>
+                </a:lnTo>
+                <a:lnTo>
+                  <a:pt x="120000" y="120000"/>
+                </a:lnTo>
+                <a:lnTo>
+                  <a:pt x="0" y="120000"/>
+                </a:lnTo>
+                <a:close/>
+              </a:path>
+            </a:pathLst>
+          </a:custGeom>
+        </p:spPr>
+      </p:sp>
+      <p:sp>
+        <p:nvSpPr>
+          <p:cNvPr id="82" name="Google Shape;82;h24fcefba4e257cc3_0_1073:notes"/>
+          <p:cNvSpPr txBox="1"/>
+          <p:nvPr>
+            <p:ph idx="1" type="body"/>
+          </p:nvPr>
+        </p:nvSpPr>
+        <p:spPr>
+          <a:xfrm>
+            <a:off x="685800" y="4343400"/>
+            <a:ext cx="5486400" cy="4114800"/>
+          </a:xfrm>
+          <a:prstGeom prst="rect">
+            <a:avLst/>
+          </a:prstGeom>
+        </p:spPr>
+        <p:txBody>
+          <a:bodyPr anchorCtr="0" anchor="t" bIns="91425" lIns="91425" spcFirstLastPara="1" rIns="91425" wrap="square" tIns="91425">
+            <a:noAutofit/>
+          </a:bodyPr>
+          <a:lstStyle/>
+          <a:p>
+            <a:pPr indent="0" lvl="0" marL="0" rtl="0" algn="l">
+              <a:spcBef>
+                <a:spcPts val="0"/>
+              </a:spcBef>
+              <a:spcAft>
+                <a:spcPts val="0"/>
+              </a:spcAft>
+              <a:buNone/>
+            </a:pPr>
+            <a:r>
+              <a:t/>
+            </a:r>
+            <a:endParaRPr/>
+          </a:p>
+        </p:txBody>
+      </p:sp>
+    </p:spTree>
+  </p:cSld>
+  <p:clrMapOvr>
+    <a:masterClrMapping/>
+  </p:clrMapOvr>
+</p:notes>
+</file>
+
+<file path=ppt/notesSlides/notesSlide7.xml><?xml version="1.0" encoding="utf-8"?>
+<p:notes xmlns:a="http://schemas.openxmlformats.org/drawingml/2006/main" xmlns:r="http://schemas.openxmlformats.org/officeDocument/2006/relationships" xmlns:mc="http://schemas.openxmlformats.org/markup-compatibility/2006" xmlns:mv="urn:schemas-microsoft-com:mac:vml" xmlns:p="http://schemas.openxmlformats.org/presentationml/2006/main" xmlns:c="http://schemas.openxmlformats.org/drawingml/2006/chart" xmlns:dgm="http://schemas.openxmlformats.org/drawingml/2006/diagram" xmlns:o="urn:schemas-microsoft-com:office:office" xmlns:v="urn:schemas-microsoft-com:vml" xmlns:pvml="urn:schemas-microsoft-com:office:powerpoint" xmlns:com="http://schemas.openxmlformats.org/drawingml/2006/compatibility" xmlns:p14="http://schemas.microsoft.com/office/powerpoint/2010/main" xmlns:p15="http://schemas.microsoft.com/office/powerpoint/2012/main" xmlns:ahyp="http://schemas.microsoft.com/office/drawing/2018/hyperlinkcolor" showMasterPhAnim="0" showMasterSp="0">
+  <p:cSld>
+    <p:spTree>
+      <p:nvGrpSpPr>
+        <p:cNvPr id="86" name="Shape 86"/>
+        <p:cNvGrpSpPr/>
+        <p:nvPr/>
+      </p:nvGrpSpPr>
+      <p:grpSpPr>
+        <a:xfrm>
+          <a:off x="0" y="0"/>
+          <a:ext cx="0" cy="0"/>
+          <a:chOff x="0" y="0"/>
+          <a:chExt cx="0" cy="0"/>
+        </a:xfrm>
+      </p:grpSpPr>
+      <p:sp>
+        <p:nvSpPr>
+          <p:cNvPr id="87" name="Google Shape;87;h24fcefba4e257cc3_0_1087:notes"/>
+          <p:cNvSpPr/>
+          <p:nvPr>
+            <p:ph idx="2" type="sldImg"/>
+          </p:nvPr>
+        </p:nvSpPr>
+        <p:spPr>
+          <a:xfrm>
+            <a:off x="381300" y="685800"/>
+            <a:ext cx="6096000" cy="3429000"/>
+          </a:xfrm>
+          <a:custGeom>
+            <a:rect b="b" l="l" r="r" t="t"/>
+            <a:pathLst>
+              <a:path extrusionOk="0" h="120000" w="120000">
+                <a:moveTo>
+                  <a:pt x="0" y="0"/>
+                </a:moveTo>
+                <a:lnTo>
+                  <a:pt x="120000" y="0"/>
+                </a:lnTo>
+                <a:lnTo>
+                  <a:pt x="120000" y="120000"/>
+                </a:lnTo>
+                <a:lnTo>
+                  <a:pt x="0" y="120000"/>
+                </a:lnTo>
+                <a:close/>
+              </a:path>
+            </a:pathLst>
+          </a:custGeom>
+        </p:spPr>
+      </p:sp>
+      <p:sp>
+        <p:nvSpPr>
+          <p:cNvPr id="88" name="Google Shape;88;h24fcefba4e257cc3_0_1087:notes"/>
+          <p:cNvSpPr txBox="1"/>
+          <p:nvPr>
+            <p:ph idx="1" type="body"/>
+          </p:nvPr>
+        </p:nvSpPr>
+        <p:spPr>
+          <a:xfrm>
+            <a:off x="685800" y="4343400"/>
+            <a:ext cx="5486400" cy="4114800"/>
+          </a:xfrm>
+          <a:prstGeom prst="rect">
+            <a:avLst/>
+          </a:prstGeom>
+        </p:spPr>
+        <p:txBody>
+          <a:bodyPr anchorCtr="0" anchor="t" bIns="91425" lIns="91425" spcFirstLastPara="1" rIns="91425" wrap="square" tIns="91425">
+            <a:noAutofit/>
+          </a:bodyPr>
+          <a:lstStyle/>
+          <a:p>
+            <a:pPr indent="0" lvl="0" marL="0" rtl="0" algn="l">
+              <a:spcBef>
+                <a:spcPts val="0"/>
+              </a:spcBef>
+              <a:spcAft>
+                <a:spcPts val="0"/>
+              </a:spcAft>
+              <a:buNone/>
+            </a:pPr>
+            <a:r>
+              <a:t/>
+            </a:r>
+            <a:endParaRPr/>
+          </a:p>
+        </p:txBody>
+      </p:sp>
+    </p:spTree>
+  </p:cSld>
+  <p:clrMapOvr>
+    <a:masterClrMapping/>
+  </p:clrMapOvr>
+</p:notes>
+</file>
+
+<file path=ppt/notesSlides/notesSlide8.xml><?xml version="1.0" encoding="utf-8"?>
+<p:notes xmlns:a="http://schemas.openxmlformats.org/drawingml/2006/main" xmlns:r="http://schemas.openxmlformats.org/officeDocument/2006/relationships" xmlns:mc="http://schemas.openxmlformats.org/markup-compatibility/2006" xmlns:mv="urn:schemas-microsoft-com:mac:vml" xmlns:p="http://schemas.openxmlformats.org/presentationml/2006/main" xmlns:c="http://schemas.openxmlformats.org/drawingml/2006/chart" xmlns:dgm="http://schemas.openxmlformats.org/drawingml/2006/diagram" xmlns:o="urn:schemas-microsoft-com:office:office" xmlns:v="urn:schemas-microsoft-com:vml" xmlns:pvml="urn:schemas-microsoft-com:office:powerpoint" xmlns:com="http://schemas.openxmlformats.org/drawingml/2006/compatibility" xmlns:p14="http://schemas.microsoft.com/office/powerpoint/2010/main" xmlns:p15="http://schemas.microsoft.com/office/powerpoint/2012/main" xmlns:ahyp="http://schemas.microsoft.com/office/drawing/2018/hyperlinkcolor" showMasterPhAnim="0" showMasterSp="0">
+  <p:cSld>
+    <p:spTree>
+      <p:nvGrpSpPr>
+        <p:cNvPr id="92" name="Shape 92"/>
+        <p:cNvGrpSpPr/>
+        <p:nvPr/>
+      </p:nvGrpSpPr>
+      <p:grpSpPr>
+        <a:xfrm>
+          <a:off x="0" y="0"/>
+          <a:ext cx="0" cy="0"/>
+          <a:chOff x="0" y="0"/>
+          <a:chExt cx="0" cy="0"/>
+        </a:xfrm>
+      </p:grpSpPr>
+      <p:sp>
+        <p:nvSpPr>
+          <p:cNvPr id="93" name="Google Shape;93;h24fcefba4e257cc3_0_1093:notes"/>
+          <p:cNvSpPr/>
+          <p:nvPr>
+            <p:ph idx="2" type="sldImg"/>
+          </p:nvPr>
+        </p:nvSpPr>
+        <p:spPr>
+          <a:xfrm>
+            <a:off x="381300" y="685800"/>
+            <a:ext cx="6096000" cy="3429000"/>
+          </a:xfrm>
+          <a:custGeom>
+            <a:rect b="b" l="l" r="r" t="t"/>
+            <a:pathLst>
+              <a:path extrusionOk="0" h="120000" w="120000">
+                <a:moveTo>
+                  <a:pt x="0" y="0"/>
+                </a:moveTo>
+                <a:lnTo>
+                  <a:pt x="120000" y="0"/>
+                </a:lnTo>
+                <a:lnTo>
+                  <a:pt x="120000" y="120000"/>
+                </a:lnTo>
+                <a:lnTo>
+                  <a:pt x="0" y="120000"/>
+                </a:lnTo>
+                <a:close/>
+              </a:path>
+            </a:pathLst>
+          </a:custGeom>
+        </p:spPr>
+      </p:sp>
+      <p:sp>
+        <p:nvSpPr>
+          <p:cNvPr id="94" name="Google Shape;94;h24fcefba4e257cc3_0_1093:notes"/>
+          <p:cNvSpPr txBox="1"/>
+          <p:nvPr>
+            <p:ph idx="1" type="body"/>
+          </p:nvPr>
+        </p:nvSpPr>
+        <p:spPr>
+          <a:xfrm>
+            <a:off x="685800" y="4343400"/>
+            <a:ext cx="5486400" cy="4114800"/>
+          </a:xfrm>
+          <a:prstGeom prst="rect">
+            <a:avLst/>
+          </a:prstGeom>
+        </p:spPr>
+        <p:txBody>
+          <a:bodyPr anchorCtr="0" anchor="t" bIns="91425" lIns="91425" spcFirstLastPara="1" rIns="91425" wrap="square" tIns="91425">
+            <a:noAutofit/>
+          </a:bodyPr>
+          <a:lstStyle/>
+          <a:p>
+            <a:pPr indent="0" lvl="0" marL="0" rtl="0" algn="l">
+              <a:spcBef>
+                <a:spcPts val="0"/>
+              </a:spcBef>
+              <a:spcAft>
+                <a:spcPts val="0"/>
+              </a:spcAft>
+              <a:buNone/>
+            </a:pPr>
+            <a:r>
+              <a:t/>
+            </a:r>
+            <a:endParaRPr/>
+          </a:p>
+        </p:txBody>
+      </p:sp>
+    </p:spTree>
+  </p:cSld>
+  <p:clrMapOvr>
+    <a:masterClrMapping/>
+  </p:clrMapOvr>
+</p:notes>
+</file>
+
+<file path=ppt/notesSlides/notesSlide9.xml><?xml version="1.0" encoding="utf-8"?>
+<p:notes xmlns:a="http://schemas.openxmlformats.org/drawingml/2006/main" xmlns:r="http://schemas.openxmlformats.org/officeDocument/2006/relationships" xmlns:mc="http://schemas.openxmlformats.org/markup-compatibility/2006" xmlns:mv="urn:schemas-microsoft-com:mac:vml" xmlns:p="http://schemas.openxmlformats.org/presentationml/2006/main" xmlns:c="http://schemas.openxmlformats.org/drawingml/2006/chart" xmlns:dgm="http://schemas.openxmlformats.org/drawingml/2006/diagram" xmlns:o="urn:schemas-microsoft-com:office:office" xmlns:v="urn:schemas-microsoft-com:vml" xmlns:pvml="urn:schemas-microsoft-com:office:powerpoint" xmlns:com="http://schemas.openxmlformats.org/drawingml/2006/compatibility" xmlns:p14="http://schemas.microsoft.com/office/powerpoint/2010/main" xmlns:p15="http://schemas.microsoft.com/office/powerpoint/2012/main" xmlns:ahyp="http://schemas.microsoft.com/office/drawing/2018/hyperlinkcolor" showMasterPhAnim="0" showMasterSp="0">
+  <p:cSld>
+    <p:spTree>
+      <p:nvGrpSpPr>
+        <p:cNvPr id="98" name="Shape 98"/>
+        <p:cNvGrpSpPr/>
+        <p:nvPr/>
+      </p:nvGrpSpPr>
+      <p:grpSpPr>
+        <a:xfrm>
+          <a:off x="0" y="0"/>
+          <a:ext cx="0" cy="0"/>
+          <a:chOff x="0" y="0"/>
+          <a:chExt cx="0" cy="0"/>
+        </a:xfrm>
+      </p:grpSpPr>
+      <p:sp>
+        <p:nvSpPr>
+          <p:cNvPr id="99" name="Google Shape;99;h24fcefba4e257cc3_0_1099:notes"/>
+          <p:cNvSpPr/>
+          <p:nvPr>
+            <p:ph idx="2" type="sldImg"/>
+          </p:nvPr>
+        </p:nvSpPr>
+        <p:spPr>
+          <a:xfrm>
+            <a:off x="381300" y="685800"/>
+            <a:ext cx="6096000" cy="3429000"/>
+          </a:xfrm>
+          <a:custGeom>
+            <a:rect b="b" l="l" r="r" t="t"/>
+            <a:pathLst>
+              <a:path extrusionOk="0" h="120000" w="120000">
+                <a:moveTo>
+                  <a:pt x="0" y="0"/>
+                </a:moveTo>
+                <a:lnTo>
+                  <a:pt x="120000" y="0"/>
+                </a:lnTo>
+                <a:lnTo>
+                  <a:pt x="120000" y="120000"/>
+                </a:lnTo>
+                <a:lnTo>
+                  <a:pt x="0" y="120000"/>
+                </a:lnTo>
+                <a:close/>
+              </a:path>
+            </a:pathLst>
+          </a:custGeom>
+        </p:spPr>
+      </p:sp>
+      <p:sp>
+        <p:nvSpPr>
+          <p:cNvPr id="100" name="Google Shape;100;h24fcefba4e257cc3_0_1099:notes"/>
           <p:cNvSpPr txBox="1"/>
           <p:nvPr>
             <p:ph idx="1" type="body"/>
@@ -6146,18 +6646,6 @@
 <file path=ppt/slides/slide1.xml><?xml version="1.0" encoding="utf-8"?>
 <p:sld xmlns:a="http://schemas.openxmlformats.org/drawingml/2006/main" xmlns:r="http://schemas.openxmlformats.org/officeDocument/2006/relationships" xmlns:mc="http://schemas.openxmlformats.org/markup-compatibility/2006" xmlns:mv="urn:schemas-microsoft-com:mac:vml" xmlns:p="http://schemas.openxmlformats.org/presentationml/2006/main" xmlns:c="http://schemas.openxmlformats.org/drawingml/2006/chart" xmlns:dgm="http://schemas.openxmlformats.org/drawingml/2006/diagram" xmlns:o="urn:schemas-microsoft-com:office:office" xmlns:v="urn:schemas-microsoft-com:vml" xmlns:pvml="urn:schemas-microsoft-com:office:powerpoint" xmlns:com="http://schemas.openxmlformats.org/drawingml/2006/compatibility" xmlns:p14="http://schemas.microsoft.com/office/powerpoint/2010/main" xmlns:p15="http://schemas.microsoft.com/office/powerpoint/2012/main" xmlns:ahyp="http://schemas.microsoft.com/office/drawing/2018/hyperlinkcolor">
   <p:cSld>
-    <p:bg>
-      <p:bgPr>
-        <a:blipFill>
-          <a:blip r:embed="rId3">
-            <a:alphaModFix/>
-          </a:blip>
-          <a:stretch>
-            <a:fillRect/>
-          </a:stretch>
-        </a:blipFill>
-      </p:bgPr>
-    </p:bg>
     <p:spTree>
       <p:nvGrpSpPr>
         <p:cNvPr id="53" name="Shape 53"/>
@@ -6177,6 +6665,1603 @@
           <p:cNvPr id="54" name="Google Shape;54;p13"/>
           <p:cNvSpPr txBox="1"/>
           <p:nvPr>
+            <p:ph type="ctrTitle"/>
+          </p:nvPr>
+        </p:nvSpPr>
+        <p:spPr>
+          <a:xfrm>
+            <a:off x="311700" y="1506950"/>
+            <a:ext cx="8520600" cy="1290300"/>
+          </a:xfrm>
+          <a:prstGeom prst="rect">
+            <a:avLst/>
+          </a:prstGeom>
+        </p:spPr>
+        <p:txBody>
+          <a:bodyPr anchorCtr="0" anchor="b" bIns="91425" lIns="91425" spcFirstLastPara="1" rIns="91425" wrap="square" tIns="91425">
+            <a:normAutofit fontScale="90000"/>
+          </a:bodyPr>
+          <a:lstStyle/>
+          <a:p>
+            <a:pPr indent="0" lvl="0" marL="0" rtl="0" algn="ctr">
+              <a:lnSpc>
+                <a:spcPct val="115000"/>
+              </a:lnSpc>
+              <a:spcBef>
+                <a:spcPts val="2400"/>
+              </a:spcBef>
+              <a:spcAft>
+                <a:spcPts val="0"/>
+              </a:spcAft>
+              <a:buClr>
+                <a:schemeClr val="dk1"/>
+              </a:buClr>
+              <a:buSzPct val="43612"/>
+              <a:buFont typeface="Arial"/>
+              <a:buNone/>
+            </a:pPr>
+            <a:r>
+              <a:rPr b="1" lang="en" sz="2522"/>
+              <a:t>House Price Prediction</a:t>
+            </a:r>
+            <a:endParaRPr b="1" sz="2522"/>
+          </a:p>
+          <a:p>
+            <a:pPr indent="0" lvl="0" marL="0" rtl="0" algn="ctr">
+              <a:lnSpc>
+                <a:spcPct val="115000"/>
+              </a:lnSpc>
+              <a:spcBef>
+                <a:spcPts val="1400"/>
+              </a:spcBef>
+              <a:spcAft>
+                <a:spcPts val="0"/>
+              </a:spcAft>
+              <a:buClr>
+                <a:schemeClr val="dk1"/>
+              </a:buClr>
+              <a:buSzPct val="72263"/>
+              <a:buFont typeface="Arial"/>
+              <a:buNone/>
+            </a:pPr>
+            <a:r>
+              <a:rPr b="1" lang="en" sz="1522"/>
+              <a:t>A Machine Learning Project Using King County House Sales Data</a:t>
+            </a:r>
+            <a:endParaRPr b="1" sz="1522"/>
+          </a:p>
+          <a:p>
+            <a:pPr indent="0" lvl="0" marL="0" rtl="0" algn="ctr">
+              <a:lnSpc>
+                <a:spcPct val="115000"/>
+              </a:lnSpc>
+              <a:spcBef>
+                <a:spcPts val="1200"/>
+              </a:spcBef>
+              <a:spcAft>
+                <a:spcPts val="0"/>
+              </a:spcAft>
+              <a:buClr>
+                <a:schemeClr val="dk1"/>
+              </a:buClr>
+              <a:buSzPct val="58580"/>
+              <a:buFont typeface="Arial"/>
+              <a:buNone/>
+            </a:pPr>
+            <a:r>
+              <a:rPr b="1" lang="en" sz="1878"/>
+              <a:t>Topics:</a:t>
+            </a:r>
+            <a:r>
+              <a:rPr lang="en" sz="1878"/>
+              <a:t> Data Cleaning • Exploratory Data Analysis • Model Training • Model Evaluation</a:t>
+            </a:r>
+            <a:endParaRPr sz="1878"/>
+          </a:p>
+          <a:p>
+            <a:pPr indent="0" lvl="0" marL="0" rtl="0" algn="ctr">
+              <a:spcBef>
+                <a:spcPts val="1200"/>
+              </a:spcBef>
+              <a:spcAft>
+                <a:spcPts val="0"/>
+              </a:spcAft>
+              <a:buNone/>
+            </a:pPr>
+            <a:r>
+              <a:t/>
+            </a:r>
+            <a:endParaRPr/>
+          </a:p>
+        </p:txBody>
+      </p:sp>
+      <p:sp>
+        <p:nvSpPr>
+          <p:cNvPr id="55" name="Google Shape;55;p13"/>
+          <p:cNvSpPr txBox="1"/>
+          <p:nvPr>
+            <p:ph idx="1" type="subTitle"/>
+          </p:nvPr>
+        </p:nvSpPr>
+        <p:spPr>
+          <a:xfrm>
+            <a:off x="311700" y="2834125"/>
+            <a:ext cx="8520600" cy="792600"/>
+          </a:xfrm>
+          <a:prstGeom prst="rect">
+            <a:avLst/>
+          </a:prstGeom>
+        </p:spPr>
+        <p:txBody>
+          <a:bodyPr anchorCtr="0" anchor="t" bIns="91425" lIns="91425" spcFirstLastPara="1" rIns="91425" wrap="square" tIns="91425">
+            <a:normAutofit fontScale="70000" lnSpcReduction="20000"/>
+          </a:bodyPr>
+          <a:lstStyle/>
+          <a:p>
+            <a:pPr indent="0" lvl="0" marL="0" rtl="0" algn="ctr">
+              <a:lnSpc>
+                <a:spcPct val="115000"/>
+              </a:lnSpc>
+              <a:spcBef>
+                <a:spcPts val="1200"/>
+              </a:spcBef>
+              <a:spcAft>
+                <a:spcPts val="0"/>
+              </a:spcAft>
+              <a:buClr>
+                <a:schemeClr val="dk1"/>
+              </a:buClr>
+              <a:buSzPct val="58580"/>
+              <a:buFont typeface="Arial"/>
+              <a:buNone/>
+            </a:pPr>
+            <a:r>
+              <a:rPr b="1" lang="en" sz="1878">
+                <a:solidFill>
+                  <a:schemeClr val="dk1"/>
+                </a:solidFill>
+              </a:rPr>
+              <a:t>Presented by:</a:t>
+            </a:r>
+            <a:r>
+              <a:rPr lang="en" sz="1878">
+                <a:solidFill>
+                  <a:schemeClr val="dk1"/>
+                </a:solidFill>
+              </a:rPr>
+              <a:t> Egbierele Uku</a:t>
+            </a:r>
+            <a:endParaRPr sz="1878">
+              <a:solidFill>
+                <a:schemeClr val="dk1"/>
+              </a:solidFill>
+            </a:endParaRPr>
+          </a:p>
+          <a:p>
+            <a:pPr indent="0" lvl="0" marL="0" rtl="0" algn="ctr">
+              <a:spcBef>
+                <a:spcPts val="1200"/>
+              </a:spcBef>
+              <a:spcAft>
+                <a:spcPts val="0"/>
+              </a:spcAft>
+              <a:buNone/>
+            </a:pPr>
+            <a:r>
+              <a:t/>
+            </a:r>
+            <a:endParaRPr/>
+          </a:p>
+        </p:txBody>
+      </p:sp>
+    </p:spTree>
+  </p:cSld>
+  <p:clrMapOvr>
+    <a:masterClrMapping/>
+  </p:clrMapOvr>
+</p:sld>
+</file>
+
+<file path=ppt/slides/slide10.xml><?xml version="1.0" encoding="utf-8"?>
+<p:sld xmlns:a="http://schemas.openxmlformats.org/drawingml/2006/main" xmlns:r="http://schemas.openxmlformats.org/officeDocument/2006/relationships" xmlns:mc="http://schemas.openxmlformats.org/markup-compatibility/2006" xmlns:mv="urn:schemas-microsoft-com:mac:vml" xmlns:p="http://schemas.openxmlformats.org/presentationml/2006/main" xmlns:c="http://schemas.openxmlformats.org/drawingml/2006/chart" xmlns:dgm="http://schemas.openxmlformats.org/drawingml/2006/diagram" xmlns:o="urn:schemas-microsoft-com:office:office" xmlns:v="urn:schemas-microsoft-com:vml" xmlns:pvml="urn:schemas-microsoft-com:office:powerpoint" xmlns:com="http://schemas.openxmlformats.org/drawingml/2006/compatibility" xmlns:p14="http://schemas.microsoft.com/office/powerpoint/2010/main" xmlns:p15="http://schemas.microsoft.com/office/powerpoint/2012/main" xmlns:ahyp="http://schemas.microsoft.com/office/drawing/2018/hyperlinkcolor">
+  <p:cSld>
+    <p:spTree>
+      <p:nvGrpSpPr>
+        <p:cNvPr id="107" name="Shape 107"/>
+        <p:cNvGrpSpPr/>
+        <p:nvPr/>
+      </p:nvGrpSpPr>
+      <p:grpSpPr>
+        <a:xfrm>
+          <a:off x="0" y="0"/>
+          <a:ext cx="0" cy="0"/>
+          <a:chOff x="0" y="0"/>
+          <a:chExt cx="0" cy="0"/>
+        </a:xfrm>
+      </p:grpSpPr>
+      <p:sp>
+        <p:nvSpPr>
+          <p:cNvPr id="108" name="Google Shape;108;p22"/>
+          <p:cNvSpPr txBox="1"/>
+          <p:nvPr>
+            <p:ph type="title"/>
+          </p:nvPr>
+        </p:nvSpPr>
+        <p:spPr>
+          <a:xfrm>
+            <a:off x="311700" y="445025"/>
+            <a:ext cx="8520600" cy="572700"/>
+          </a:xfrm>
+          <a:prstGeom prst="rect">
+            <a:avLst/>
+          </a:prstGeom>
+        </p:spPr>
+        <p:txBody>
+          <a:bodyPr anchorCtr="0" anchor="t" bIns="91425" lIns="91425" spcFirstLastPara="1" rIns="91425" wrap="square" tIns="91425">
+            <a:normAutofit/>
+          </a:bodyPr>
+          <a:lstStyle/>
+          <a:p>
+            <a:pPr indent="0" lvl="0" marL="0" rtl="0" algn="l">
+              <a:lnSpc>
+                <a:spcPct val="115000"/>
+              </a:lnSpc>
+              <a:spcBef>
+                <a:spcPts val="2400"/>
+              </a:spcBef>
+              <a:spcAft>
+                <a:spcPts val="600"/>
+              </a:spcAft>
+              <a:buClr>
+                <a:schemeClr val="dk1"/>
+              </a:buClr>
+              <a:buSzPts val="1100"/>
+              <a:buFont typeface="Arial"/>
+              <a:buNone/>
+            </a:pPr>
+            <a:r>
+              <a:rPr b="1" lang="en" sz="2300"/>
+              <a:t>Validation and Overfitting</a:t>
+            </a:r>
+            <a:endParaRPr/>
+          </a:p>
+        </p:txBody>
+      </p:sp>
+      <p:sp>
+        <p:nvSpPr>
+          <p:cNvPr id="109" name="Google Shape;109;p22"/>
+          <p:cNvSpPr txBox="1"/>
+          <p:nvPr>
+            <p:ph idx="1" type="body"/>
+          </p:nvPr>
+        </p:nvSpPr>
+        <p:spPr>
+          <a:xfrm>
+            <a:off x="311700" y="920800"/>
+            <a:ext cx="8520600" cy="3648000"/>
+          </a:xfrm>
+          <a:prstGeom prst="rect">
+            <a:avLst/>
+          </a:prstGeom>
+        </p:spPr>
+        <p:txBody>
+          <a:bodyPr anchorCtr="0" anchor="t" bIns="91425" lIns="91425" spcFirstLastPara="1" rIns="91425" wrap="square" tIns="91425">
+            <a:noAutofit/>
+          </a:bodyPr>
+          <a:lstStyle/>
+          <a:p>
+            <a:pPr indent="0" lvl="0" marL="0" rtl="0" algn="l">
+              <a:lnSpc>
+                <a:spcPct val="95000"/>
+              </a:lnSpc>
+              <a:spcBef>
+                <a:spcPts val="1200"/>
+              </a:spcBef>
+              <a:spcAft>
+                <a:spcPts val="0"/>
+              </a:spcAft>
+              <a:buSzPts val="275"/>
+              <a:buNone/>
+            </a:pPr>
+            <a:r>
+              <a:rPr b="1" lang="en" sz="1400">
+                <a:solidFill>
+                  <a:schemeClr val="dk1"/>
+                </a:solidFill>
+              </a:rPr>
+              <a:t>Why validation matters</a:t>
+            </a:r>
+            <a:endParaRPr b="1" sz="1400">
+              <a:solidFill>
+                <a:schemeClr val="dk1"/>
+              </a:solidFill>
+            </a:endParaRPr>
+          </a:p>
+          <a:p>
+            <a:pPr indent="-317500" lvl="0" marL="457200" rtl="0" algn="l">
+              <a:lnSpc>
+                <a:spcPct val="95000"/>
+              </a:lnSpc>
+              <a:spcBef>
+                <a:spcPts val="1200"/>
+              </a:spcBef>
+              <a:spcAft>
+                <a:spcPts val="0"/>
+              </a:spcAft>
+              <a:buClr>
+                <a:schemeClr val="dk1"/>
+              </a:buClr>
+              <a:buSzPts val="1400"/>
+              <a:buChar char="●"/>
+            </a:pPr>
+            <a:r>
+              <a:rPr lang="en" sz="1400">
+                <a:solidFill>
+                  <a:schemeClr val="dk1"/>
+                </a:solidFill>
+              </a:rPr>
+              <a:t>Checks how well a model performs on unseen data.</a:t>
+            </a:r>
+            <a:endParaRPr sz="1400">
+              <a:solidFill>
+                <a:schemeClr val="dk1"/>
+              </a:solidFill>
+            </a:endParaRPr>
+          </a:p>
+          <a:p>
+            <a:pPr indent="-317500" lvl="0" marL="457200" rtl="0" algn="l">
+              <a:lnSpc>
+                <a:spcPct val="95000"/>
+              </a:lnSpc>
+              <a:spcBef>
+                <a:spcPts val="0"/>
+              </a:spcBef>
+              <a:spcAft>
+                <a:spcPts val="0"/>
+              </a:spcAft>
+              <a:buClr>
+                <a:schemeClr val="dk1"/>
+              </a:buClr>
+              <a:buSzPts val="1400"/>
+              <a:buChar char="●"/>
+            </a:pPr>
+            <a:r>
+              <a:rPr lang="en" sz="1400">
+                <a:solidFill>
+                  <a:schemeClr val="dk1"/>
+                </a:solidFill>
+              </a:rPr>
+              <a:t>Helps identify overfitting.</a:t>
+            </a:r>
+            <a:endParaRPr sz="1400">
+              <a:solidFill>
+                <a:schemeClr val="dk1"/>
+              </a:solidFill>
+            </a:endParaRPr>
+          </a:p>
+          <a:p>
+            <a:pPr indent="-317500" lvl="0" marL="457200" rtl="0" algn="l">
+              <a:lnSpc>
+                <a:spcPct val="95000"/>
+              </a:lnSpc>
+              <a:spcBef>
+                <a:spcPts val="0"/>
+              </a:spcBef>
+              <a:spcAft>
+                <a:spcPts val="0"/>
+              </a:spcAft>
+              <a:buClr>
+                <a:schemeClr val="dk1"/>
+              </a:buClr>
+              <a:buSzPts val="1400"/>
+              <a:buChar char="●"/>
+            </a:pPr>
+            <a:r>
+              <a:rPr lang="en" sz="1400">
+                <a:solidFill>
+                  <a:schemeClr val="dk1"/>
+                </a:solidFill>
+              </a:rPr>
+              <a:t>GroupKFold keeps records with the same property ID together.</a:t>
+            </a:r>
+            <a:endParaRPr sz="1400">
+              <a:solidFill>
+                <a:schemeClr val="dk1"/>
+              </a:solidFill>
+            </a:endParaRPr>
+          </a:p>
+          <a:p>
+            <a:pPr indent="0" lvl="0" marL="0" rtl="0" algn="l">
+              <a:lnSpc>
+                <a:spcPct val="95000"/>
+              </a:lnSpc>
+              <a:spcBef>
+                <a:spcPts val="1200"/>
+              </a:spcBef>
+              <a:spcAft>
+                <a:spcPts val="0"/>
+              </a:spcAft>
+              <a:buSzPts val="275"/>
+              <a:buNone/>
+            </a:pPr>
+            <a:r>
+              <a:rPr b="1" lang="en" sz="1400">
+                <a:solidFill>
+                  <a:schemeClr val="dk1"/>
+                </a:solidFill>
+              </a:rPr>
+              <a:t>Random Forest validation results</a:t>
+            </a:r>
+            <a:endParaRPr b="1" sz="1400">
+              <a:solidFill>
+                <a:schemeClr val="dk1"/>
+              </a:solidFill>
+            </a:endParaRPr>
+          </a:p>
+          <a:p>
+            <a:pPr indent="-317500" lvl="0" marL="457200" rtl="0" algn="l">
+              <a:lnSpc>
+                <a:spcPct val="95000"/>
+              </a:lnSpc>
+              <a:spcBef>
+                <a:spcPts val="1200"/>
+              </a:spcBef>
+              <a:spcAft>
+                <a:spcPts val="0"/>
+              </a:spcAft>
+              <a:buClr>
+                <a:schemeClr val="dk1"/>
+              </a:buClr>
+              <a:buSzPts val="1400"/>
+              <a:buChar char="●"/>
+            </a:pPr>
+            <a:r>
+              <a:rPr lang="en" sz="1400">
+                <a:solidFill>
+                  <a:schemeClr val="dk1"/>
+                </a:solidFill>
+              </a:rPr>
+              <a:t>Validation MAE: </a:t>
+            </a:r>
+            <a:r>
+              <a:rPr b="1" lang="en" sz="1400">
+                <a:solidFill>
+                  <a:schemeClr val="dk1"/>
+                </a:solidFill>
+              </a:rPr>
+              <a:t>$65,704</a:t>
+            </a:r>
+            <a:endParaRPr b="1" sz="1400">
+              <a:solidFill>
+                <a:schemeClr val="dk1"/>
+              </a:solidFill>
+            </a:endParaRPr>
+          </a:p>
+          <a:p>
+            <a:pPr indent="-317500" lvl="0" marL="457200" rtl="0" algn="l">
+              <a:lnSpc>
+                <a:spcPct val="95000"/>
+              </a:lnSpc>
+              <a:spcBef>
+                <a:spcPts val="0"/>
+              </a:spcBef>
+              <a:spcAft>
+                <a:spcPts val="0"/>
+              </a:spcAft>
+              <a:buClr>
+                <a:schemeClr val="dk1"/>
+              </a:buClr>
+              <a:buSzPts val="1400"/>
+              <a:buChar char="●"/>
+            </a:pPr>
+            <a:r>
+              <a:rPr lang="en" sz="1400">
+                <a:solidFill>
+                  <a:schemeClr val="dk1"/>
+                </a:solidFill>
+              </a:rPr>
+              <a:t>Validation RMSE: </a:t>
+            </a:r>
+            <a:r>
+              <a:rPr b="1" lang="en" sz="1400">
+                <a:solidFill>
+                  <a:schemeClr val="dk1"/>
+                </a:solidFill>
+              </a:rPr>
+              <a:t>$119,862</a:t>
+            </a:r>
+            <a:endParaRPr b="1" sz="1400">
+              <a:solidFill>
+                <a:schemeClr val="dk1"/>
+              </a:solidFill>
+            </a:endParaRPr>
+          </a:p>
+          <a:p>
+            <a:pPr indent="-317500" lvl="0" marL="457200" rtl="0" algn="l">
+              <a:lnSpc>
+                <a:spcPct val="95000"/>
+              </a:lnSpc>
+              <a:spcBef>
+                <a:spcPts val="0"/>
+              </a:spcBef>
+              <a:spcAft>
+                <a:spcPts val="0"/>
+              </a:spcAft>
+              <a:buClr>
+                <a:schemeClr val="dk1"/>
+              </a:buClr>
+              <a:buSzPts val="1400"/>
+              <a:buChar char="●"/>
+            </a:pPr>
+            <a:r>
+              <a:rPr lang="en" sz="1400">
+                <a:solidFill>
+                  <a:schemeClr val="dk1"/>
+                </a:solidFill>
+              </a:rPr>
+              <a:t>Validation R²: </a:t>
+            </a:r>
+            <a:r>
+              <a:rPr b="1" lang="en" sz="1400">
+                <a:solidFill>
+                  <a:schemeClr val="dk1"/>
+                </a:solidFill>
+              </a:rPr>
+              <a:t>0.890</a:t>
+            </a:r>
+            <a:endParaRPr b="1" sz="1400">
+              <a:solidFill>
+                <a:schemeClr val="dk1"/>
+              </a:solidFill>
+            </a:endParaRPr>
+          </a:p>
+          <a:p>
+            <a:pPr indent="0" lvl="0" marL="0" rtl="0" algn="l">
+              <a:lnSpc>
+                <a:spcPct val="95000"/>
+              </a:lnSpc>
+              <a:spcBef>
+                <a:spcPts val="1200"/>
+              </a:spcBef>
+              <a:spcAft>
+                <a:spcPts val="0"/>
+              </a:spcAft>
+              <a:buSzPts val="275"/>
+              <a:buNone/>
+            </a:pPr>
+            <a:r>
+              <a:rPr b="1" lang="en" sz="1400">
+                <a:solidFill>
+                  <a:schemeClr val="dk1"/>
+                </a:solidFill>
+              </a:rPr>
+              <a:t>Key finding</a:t>
+            </a:r>
+            <a:endParaRPr b="1" sz="1400">
+              <a:solidFill>
+                <a:schemeClr val="dk1"/>
+              </a:solidFill>
+            </a:endParaRPr>
+          </a:p>
+          <a:p>
+            <a:pPr indent="-317500" lvl="0" marL="457200" rtl="0" algn="l">
+              <a:lnSpc>
+                <a:spcPct val="95000"/>
+              </a:lnSpc>
+              <a:spcBef>
+                <a:spcPts val="1200"/>
+              </a:spcBef>
+              <a:spcAft>
+                <a:spcPts val="0"/>
+              </a:spcAft>
+              <a:buClr>
+                <a:schemeClr val="dk1"/>
+              </a:buClr>
+              <a:buSzPts val="1400"/>
+              <a:buChar char="●"/>
+            </a:pPr>
+            <a:r>
+              <a:rPr lang="en" sz="1400">
+                <a:solidFill>
+                  <a:schemeClr val="dk1"/>
+                </a:solidFill>
+              </a:rPr>
+              <a:t>Training performance was stronger than validation performance.</a:t>
+            </a:r>
+            <a:endParaRPr sz="1400">
+              <a:solidFill>
+                <a:schemeClr val="dk1"/>
+              </a:solidFill>
+            </a:endParaRPr>
+          </a:p>
+          <a:p>
+            <a:pPr indent="-317500" lvl="0" marL="457200" rtl="0" algn="l">
+              <a:lnSpc>
+                <a:spcPct val="95000"/>
+              </a:lnSpc>
+              <a:spcBef>
+                <a:spcPts val="0"/>
+              </a:spcBef>
+              <a:spcAft>
+                <a:spcPts val="0"/>
+              </a:spcAft>
+              <a:buClr>
+                <a:schemeClr val="dk1"/>
+              </a:buClr>
+              <a:buSzPts val="1400"/>
+              <a:buChar char="●"/>
+            </a:pPr>
+            <a:r>
+              <a:rPr lang="en" sz="1400">
+                <a:solidFill>
+                  <a:schemeClr val="dk1"/>
+                </a:solidFill>
+              </a:rPr>
+              <a:t>This suggests some overfitting.</a:t>
+            </a:r>
+            <a:endParaRPr sz="1400">
+              <a:solidFill>
+                <a:schemeClr val="dk1"/>
+              </a:solidFill>
+            </a:endParaRPr>
+          </a:p>
+          <a:p>
+            <a:pPr indent="-317500" lvl="0" marL="457200" rtl="0" algn="l">
+              <a:lnSpc>
+                <a:spcPct val="95000"/>
+              </a:lnSpc>
+              <a:spcBef>
+                <a:spcPts val="0"/>
+              </a:spcBef>
+              <a:spcAft>
+                <a:spcPts val="0"/>
+              </a:spcAft>
+              <a:buClr>
+                <a:schemeClr val="dk1"/>
+              </a:buClr>
+              <a:buSzPts val="1400"/>
+              <a:buChar char="●"/>
+            </a:pPr>
+            <a:r>
+              <a:rPr lang="en" sz="1400">
+                <a:solidFill>
+                  <a:schemeClr val="dk1"/>
+                </a:solidFill>
+              </a:rPr>
+              <a:t>Five-fold GroupKFold results were similar for maximum depths of 20 and unrestricted depth.</a:t>
+            </a:r>
+            <a:endParaRPr sz="1400">
+              <a:solidFill>
+                <a:schemeClr val="dk1"/>
+              </a:solidFill>
+            </a:endParaRPr>
+          </a:p>
+          <a:p>
+            <a:pPr indent="0" lvl="0" marL="0" rtl="0" algn="l">
+              <a:lnSpc>
+                <a:spcPct val="95000"/>
+              </a:lnSpc>
+              <a:spcBef>
+                <a:spcPts val="1200"/>
+              </a:spcBef>
+              <a:spcAft>
+                <a:spcPts val="0"/>
+              </a:spcAft>
+              <a:buSzPts val="275"/>
+              <a:buNone/>
+            </a:pPr>
+            <a:r>
+              <a:rPr b="1" lang="en" sz="1400">
+                <a:solidFill>
+                  <a:schemeClr val="dk1"/>
+                </a:solidFill>
+              </a:rPr>
+              <a:t>Model choice:</a:t>
+            </a:r>
+            <a:r>
+              <a:rPr lang="en" sz="1400">
+                <a:solidFill>
+                  <a:schemeClr val="dk1"/>
+                </a:solidFill>
+              </a:rPr>
+              <a:t> Maximum depth of 20, providing a reasonable complexity limit with comparable cross-validation performance.</a:t>
+            </a:r>
+            <a:endParaRPr b="1" sz="1400">
+              <a:solidFill>
+                <a:schemeClr val="dk1"/>
+              </a:solidFill>
+            </a:endParaRPr>
+          </a:p>
+          <a:p>
+            <a:pPr indent="0" lvl="0" marL="0" rtl="0" algn="l">
+              <a:lnSpc>
+                <a:spcPct val="95000"/>
+              </a:lnSpc>
+              <a:spcBef>
+                <a:spcPts val="1200"/>
+              </a:spcBef>
+              <a:spcAft>
+                <a:spcPts val="0"/>
+              </a:spcAft>
+              <a:buClr>
+                <a:schemeClr val="dk1"/>
+              </a:buClr>
+              <a:buSzPts val="275"/>
+              <a:buFont typeface="Arial"/>
+              <a:buNone/>
+            </a:pPr>
+            <a:r>
+              <a:t/>
+            </a:r>
+            <a:endParaRPr sz="1400">
+              <a:solidFill>
+                <a:schemeClr val="dk1"/>
+              </a:solidFill>
+            </a:endParaRPr>
+          </a:p>
+          <a:p>
+            <a:pPr indent="0" lvl="0" marL="0" rtl="0" algn="l">
+              <a:lnSpc>
+                <a:spcPct val="95000"/>
+              </a:lnSpc>
+              <a:spcBef>
+                <a:spcPts val="1200"/>
+              </a:spcBef>
+              <a:spcAft>
+                <a:spcPts val="1200"/>
+              </a:spcAft>
+              <a:buSzPts val="275"/>
+              <a:buNone/>
+            </a:pPr>
+            <a:r>
+              <a:t/>
+            </a:r>
+            <a:endParaRPr sz="1400"/>
+          </a:p>
+        </p:txBody>
+      </p:sp>
+    </p:spTree>
+  </p:cSld>
+  <p:clrMapOvr>
+    <a:masterClrMapping/>
+  </p:clrMapOvr>
+</p:sld>
+</file>
+
+<file path=ppt/slides/slide11.xml><?xml version="1.0" encoding="utf-8"?>
+<p:sld xmlns:a="http://schemas.openxmlformats.org/drawingml/2006/main" xmlns:r="http://schemas.openxmlformats.org/officeDocument/2006/relationships" xmlns:mc="http://schemas.openxmlformats.org/markup-compatibility/2006" xmlns:mv="urn:schemas-microsoft-com:mac:vml" xmlns:p="http://schemas.openxmlformats.org/presentationml/2006/main" xmlns:c="http://schemas.openxmlformats.org/drawingml/2006/chart" xmlns:dgm="http://schemas.openxmlformats.org/drawingml/2006/diagram" xmlns:o="urn:schemas-microsoft-com:office:office" xmlns:v="urn:schemas-microsoft-com:vml" xmlns:pvml="urn:schemas-microsoft-com:office:powerpoint" xmlns:com="http://schemas.openxmlformats.org/drawingml/2006/compatibility" xmlns:p14="http://schemas.microsoft.com/office/powerpoint/2010/main" xmlns:p15="http://schemas.microsoft.com/office/powerpoint/2012/main" xmlns:ahyp="http://schemas.microsoft.com/office/drawing/2018/hyperlinkcolor">
+  <p:cSld>
+    <p:spTree>
+      <p:nvGrpSpPr>
+        <p:cNvPr id="113" name="Shape 113"/>
+        <p:cNvGrpSpPr/>
+        <p:nvPr/>
+      </p:nvGrpSpPr>
+      <p:grpSpPr>
+        <a:xfrm>
+          <a:off x="0" y="0"/>
+          <a:ext cx="0" cy="0"/>
+          <a:chOff x="0" y="0"/>
+          <a:chExt cx="0" cy="0"/>
+        </a:xfrm>
+      </p:grpSpPr>
+      <p:sp>
+        <p:nvSpPr>
+          <p:cNvPr id="114" name="Google Shape;114;p23"/>
+          <p:cNvSpPr txBox="1"/>
+          <p:nvPr>
+            <p:ph type="title"/>
+          </p:nvPr>
+        </p:nvSpPr>
+        <p:spPr>
+          <a:xfrm>
+            <a:off x="311700" y="445025"/>
+            <a:ext cx="8520600" cy="572700"/>
+          </a:xfrm>
+          <a:prstGeom prst="rect">
+            <a:avLst/>
+          </a:prstGeom>
+        </p:spPr>
+        <p:txBody>
+          <a:bodyPr anchorCtr="0" anchor="t" bIns="91425" lIns="91425" spcFirstLastPara="1" rIns="91425" wrap="square" tIns="91425">
+            <a:normAutofit/>
+          </a:bodyPr>
+          <a:lstStyle/>
+          <a:p>
+            <a:pPr indent="0" lvl="0" marL="0" rtl="0" algn="l">
+              <a:lnSpc>
+                <a:spcPct val="115000"/>
+              </a:lnSpc>
+              <a:spcBef>
+                <a:spcPts val="2400"/>
+              </a:spcBef>
+              <a:spcAft>
+                <a:spcPts val="600"/>
+              </a:spcAft>
+              <a:buClr>
+                <a:schemeClr val="dk1"/>
+              </a:buClr>
+              <a:buSzPts val="1100"/>
+              <a:buFont typeface="Arial"/>
+              <a:buNone/>
+            </a:pPr>
+            <a:r>
+              <a:rPr b="1" lang="en" sz="2300"/>
+              <a:t>Conclusion and Limitations</a:t>
+            </a:r>
+            <a:endParaRPr/>
+          </a:p>
+        </p:txBody>
+      </p:sp>
+      <p:sp>
+        <p:nvSpPr>
+          <p:cNvPr id="115" name="Google Shape;115;p23"/>
+          <p:cNvSpPr txBox="1"/>
+          <p:nvPr>
+            <p:ph idx="1" type="body"/>
+          </p:nvPr>
+        </p:nvSpPr>
+        <p:spPr>
+          <a:xfrm>
+            <a:off x="311700" y="949975"/>
+            <a:ext cx="8520600" cy="3416400"/>
+          </a:xfrm>
+          <a:prstGeom prst="rect">
+            <a:avLst/>
+          </a:prstGeom>
+        </p:spPr>
+        <p:txBody>
+          <a:bodyPr anchorCtr="0" anchor="t" bIns="91425" lIns="91425" spcFirstLastPara="1" rIns="91425" wrap="square" tIns="91425">
+            <a:normAutofit fontScale="25000" lnSpcReduction="20000"/>
+          </a:bodyPr>
+          <a:lstStyle/>
+          <a:p>
+            <a:pPr indent="0" lvl="0" marL="0" rtl="0" algn="l">
+              <a:spcBef>
+                <a:spcPts val="2400"/>
+              </a:spcBef>
+              <a:spcAft>
+                <a:spcPts val="0"/>
+              </a:spcAft>
+              <a:buClr>
+                <a:schemeClr val="dk1"/>
+              </a:buClr>
+              <a:buSzPct val="47826"/>
+              <a:buFont typeface="Arial"/>
+              <a:buNone/>
+            </a:pPr>
+            <a:r>
+              <a:t/>
+            </a:r>
+            <a:endParaRPr b="1" sz="2300">
+              <a:solidFill>
+                <a:schemeClr val="dk1"/>
+              </a:solidFill>
+            </a:endParaRPr>
+          </a:p>
+          <a:p>
+            <a:pPr indent="0" lvl="0" marL="0" rtl="0" algn="l">
+              <a:spcBef>
+                <a:spcPts val="1200"/>
+              </a:spcBef>
+              <a:spcAft>
+                <a:spcPts val="0"/>
+              </a:spcAft>
+              <a:buClr>
+                <a:schemeClr val="dk1"/>
+              </a:buClr>
+              <a:buSzPts val="275"/>
+              <a:buFont typeface="Arial"/>
+              <a:buNone/>
+            </a:pPr>
+            <a:r>
+              <a:rPr b="1" lang="en" sz="5431">
+                <a:solidFill>
+                  <a:schemeClr val="dk1"/>
+                </a:solidFill>
+              </a:rPr>
+              <a:t>Conclusion</a:t>
+            </a:r>
+            <a:endParaRPr b="1" sz="5431">
+              <a:solidFill>
+                <a:schemeClr val="dk1"/>
+              </a:solidFill>
+            </a:endParaRPr>
+          </a:p>
+          <a:p>
+            <a:pPr indent="-314819" lvl="0" marL="457200" rtl="0" algn="l">
+              <a:spcBef>
+                <a:spcPts val="1200"/>
+              </a:spcBef>
+              <a:spcAft>
+                <a:spcPts val="0"/>
+              </a:spcAft>
+              <a:buClr>
+                <a:schemeClr val="dk1"/>
+              </a:buClr>
+              <a:buSzPct val="100000"/>
+              <a:buChar char="●"/>
+            </a:pPr>
+            <a:r>
+              <a:rPr lang="en" sz="5431">
+                <a:solidFill>
+                  <a:schemeClr val="dk1"/>
+                </a:solidFill>
+              </a:rPr>
+              <a:t>Random Forest was the best-performing model among the three tested.</a:t>
+            </a:r>
+            <a:endParaRPr sz="5431">
+              <a:solidFill>
+                <a:schemeClr val="dk1"/>
+              </a:solidFill>
+            </a:endParaRPr>
+          </a:p>
+          <a:p>
+            <a:pPr indent="-314819" lvl="0" marL="457200" rtl="0" algn="l">
+              <a:spcBef>
+                <a:spcPts val="0"/>
+              </a:spcBef>
+              <a:spcAft>
+                <a:spcPts val="0"/>
+              </a:spcAft>
+              <a:buClr>
+                <a:schemeClr val="dk1"/>
+              </a:buClr>
+              <a:buSzPct val="100000"/>
+              <a:buChar char="●"/>
+            </a:pPr>
+            <a:r>
+              <a:rPr lang="en" sz="5431">
+                <a:solidFill>
+                  <a:schemeClr val="dk1"/>
+                </a:solidFill>
+              </a:rPr>
+              <a:t>Test MAE: </a:t>
+            </a:r>
+            <a:r>
+              <a:rPr b="1" lang="en" sz="5431">
+                <a:solidFill>
+                  <a:schemeClr val="dk1"/>
+                </a:solidFill>
+              </a:rPr>
+              <a:t>$67,713</a:t>
+            </a:r>
+            <a:endParaRPr b="1" sz="5431">
+              <a:solidFill>
+                <a:schemeClr val="dk1"/>
+              </a:solidFill>
+            </a:endParaRPr>
+          </a:p>
+          <a:p>
+            <a:pPr indent="-314819" lvl="0" marL="457200" rtl="0" algn="l">
+              <a:spcBef>
+                <a:spcPts val="0"/>
+              </a:spcBef>
+              <a:spcAft>
+                <a:spcPts val="0"/>
+              </a:spcAft>
+              <a:buClr>
+                <a:schemeClr val="dk1"/>
+              </a:buClr>
+              <a:buSzPct val="100000"/>
+              <a:buChar char="●"/>
+            </a:pPr>
+            <a:r>
+              <a:rPr lang="en" sz="5431">
+                <a:solidFill>
+                  <a:schemeClr val="dk1"/>
+                </a:solidFill>
+              </a:rPr>
+              <a:t>Test R²: </a:t>
+            </a:r>
+            <a:r>
+              <a:rPr b="1" lang="en" sz="5431">
+                <a:solidFill>
+                  <a:schemeClr val="dk1"/>
+                </a:solidFill>
+              </a:rPr>
+              <a:t>0.897</a:t>
+            </a:r>
+            <a:endParaRPr b="1" sz="5431">
+              <a:solidFill>
+                <a:schemeClr val="dk1"/>
+              </a:solidFill>
+            </a:endParaRPr>
+          </a:p>
+          <a:p>
+            <a:pPr indent="-314819" lvl="0" marL="457200" rtl="0" algn="l">
+              <a:spcBef>
+                <a:spcPts val="0"/>
+              </a:spcBef>
+              <a:spcAft>
+                <a:spcPts val="0"/>
+              </a:spcAft>
+              <a:buClr>
+                <a:schemeClr val="dk1"/>
+              </a:buClr>
+              <a:buSzPct val="100000"/>
+              <a:buChar char="●"/>
+            </a:pPr>
+            <a:r>
+              <a:rPr lang="en" sz="5431">
+                <a:solidFill>
+                  <a:schemeClr val="dk1"/>
+                </a:solidFill>
+              </a:rPr>
+              <a:t>The results show that property features can help predict house prices.</a:t>
+            </a:r>
+            <a:endParaRPr sz="5431">
+              <a:solidFill>
+                <a:schemeClr val="dk1"/>
+              </a:solidFill>
+            </a:endParaRPr>
+          </a:p>
+          <a:p>
+            <a:pPr indent="0" lvl="0" marL="0" rtl="0" algn="l">
+              <a:spcBef>
+                <a:spcPts val="1200"/>
+              </a:spcBef>
+              <a:spcAft>
+                <a:spcPts val="0"/>
+              </a:spcAft>
+              <a:buClr>
+                <a:schemeClr val="dk1"/>
+              </a:buClr>
+              <a:buSzPts val="275"/>
+              <a:buFont typeface="Arial"/>
+              <a:buNone/>
+            </a:pPr>
+            <a:r>
+              <a:rPr b="1" lang="en" sz="5431">
+                <a:solidFill>
+                  <a:schemeClr val="dk1"/>
+                </a:solidFill>
+              </a:rPr>
+              <a:t>Limitations</a:t>
+            </a:r>
+            <a:endParaRPr b="1" sz="5431">
+              <a:solidFill>
+                <a:schemeClr val="dk1"/>
+              </a:solidFill>
+            </a:endParaRPr>
+          </a:p>
+          <a:p>
+            <a:pPr indent="-314819" lvl="0" marL="457200" rtl="0" algn="l">
+              <a:spcBef>
+                <a:spcPts val="1200"/>
+              </a:spcBef>
+              <a:spcAft>
+                <a:spcPts val="0"/>
+              </a:spcAft>
+              <a:buClr>
+                <a:schemeClr val="dk1"/>
+              </a:buClr>
+              <a:buSzPct val="100000"/>
+              <a:buChar char="●"/>
+            </a:pPr>
+            <a:r>
+              <a:rPr lang="en" sz="5431">
+                <a:solidFill>
+                  <a:schemeClr val="dk1"/>
+                </a:solidFill>
+              </a:rPr>
+              <a:t>House prices can be influenced by factors not included in the dataset.</a:t>
+            </a:r>
+            <a:endParaRPr sz="5431">
+              <a:solidFill>
+                <a:schemeClr val="dk1"/>
+              </a:solidFill>
+            </a:endParaRPr>
+          </a:p>
+          <a:p>
+            <a:pPr indent="-314819" lvl="0" marL="457200" rtl="0" algn="l">
+              <a:spcBef>
+                <a:spcPts val="0"/>
+              </a:spcBef>
+              <a:spcAft>
+                <a:spcPts val="0"/>
+              </a:spcAft>
+              <a:buClr>
+                <a:schemeClr val="dk1"/>
+              </a:buClr>
+              <a:buSzPct val="100000"/>
+              <a:buChar char="●"/>
+            </a:pPr>
+            <a:r>
+              <a:rPr lang="en" sz="5431">
+                <a:solidFill>
+                  <a:schemeClr val="dk1"/>
+                </a:solidFill>
+              </a:rPr>
+              <a:t>Some unusual property values required investigation.</a:t>
+            </a:r>
+            <a:endParaRPr sz="5431">
+              <a:solidFill>
+                <a:schemeClr val="dk1"/>
+              </a:solidFill>
+            </a:endParaRPr>
+          </a:p>
+          <a:p>
+            <a:pPr indent="-314819" lvl="0" marL="457200" rtl="0" algn="l">
+              <a:spcBef>
+                <a:spcPts val="0"/>
+              </a:spcBef>
+              <a:spcAft>
+                <a:spcPts val="0"/>
+              </a:spcAft>
+              <a:buClr>
+                <a:schemeClr val="dk1"/>
+              </a:buClr>
+              <a:buSzPct val="100000"/>
+              <a:buChar char="●"/>
+            </a:pPr>
+            <a:r>
+              <a:rPr lang="en" sz="5431">
+                <a:solidFill>
+                  <a:schemeClr val="dk1"/>
+                </a:solidFill>
+              </a:rPr>
+              <a:t>The difference between training and validation performance suggests some overfitting.</a:t>
+            </a:r>
+            <a:endParaRPr sz="5431">
+              <a:solidFill>
+                <a:schemeClr val="dk1"/>
+              </a:solidFill>
+            </a:endParaRPr>
+          </a:p>
+          <a:p>
+            <a:pPr indent="-314819" lvl="0" marL="457200" rtl="0" algn="l">
+              <a:spcBef>
+                <a:spcPts val="0"/>
+              </a:spcBef>
+              <a:spcAft>
+                <a:spcPts val="0"/>
+              </a:spcAft>
+              <a:buClr>
+                <a:schemeClr val="dk1"/>
+              </a:buClr>
+              <a:buSzPct val="100000"/>
+              <a:buChar char="●"/>
+            </a:pPr>
+            <a:r>
+              <a:rPr lang="en" sz="5431">
+                <a:solidFill>
+                  <a:schemeClr val="dk1"/>
+                </a:solidFill>
+              </a:rPr>
+              <a:t>The test results should be treated cautiously because they were used during model experimentation.</a:t>
+            </a:r>
+            <a:endParaRPr sz="5431">
+              <a:solidFill>
+                <a:schemeClr val="dk1"/>
+              </a:solidFill>
+            </a:endParaRPr>
+          </a:p>
+          <a:p>
+            <a:pPr indent="0" lvl="0" marL="0" rtl="0" algn="l">
+              <a:spcBef>
+                <a:spcPts val="1200"/>
+              </a:spcBef>
+              <a:spcAft>
+                <a:spcPts val="0"/>
+              </a:spcAft>
+              <a:buClr>
+                <a:schemeClr val="dk1"/>
+              </a:buClr>
+              <a:buSzPts val="275"/>
+              <a:buFont typeface="Arial"/>
+              <a:buNone/>
+            </a:pPr>
+            <a:r>
+              <a:rPr b="1" lang="en" sz="5431">
+                <a:solidFill>
+                  <a:schemeClr val="dk1"/>
+                </a:solidFill>
+              </a:rPr>
+              <a:t>Future Improvements</a:t>
+            </a:r>
+            <a:endParaRPr b="1" sz="5431">
+              <a:solidFill>
+                <a:schemeClr val="dk1"/>
+              </a:solidFill>
+            </a:endParaRPr>
+          </a:p>
+          <a:p>
+            <a:pPr indent="-314819" lvl="0" marL="457200" rtl="0" algn="l">
+              <a:spcBef>
+                <a:spcPts val="1200"/>
+              </a:spcBef>
+              <a:spcAft>
+                <a:spcPts val="0"/>
+              </a:spcAft>
+              <a:buClr>
+                <a:schemeClr val="dk1"/>
+              </a:buClr>
+              <a:buSzPct val="100000"/>
+              <a:buChar char="●"/>
+            </a:pPr>
+            <a:r>
+              <a:rPr lang="en" sz="5431">
+                <a:solidFill>
+                  <a:schemeClr val="dk1"/>
+                </a:solidFill>
+              </a:rPr>
+              <a:t>Evaluate the final model on a completely untouched test set.</a:t>
+            </a:r>
+            <a:endParaRPr sz="5431">
+              <a:solidFill>
+                <a:schemeClr val="dk1"/>
+              </a:solidFill>
+            </a:endParaRPr>
+          </a:p>
+          <a:p>
+            <a:pPr indent="-314819" lvl="0" marL="457200" rtl="0" algn="l">
+              <a:spcBef>
+                <a:spcPts val="0"/>
+              </a:spcBef>
+              <a:spcAft>
+                <a:spcPts val="0"/>
+              </a:spcAft>
+              <a:buClr>
+                <a:schemeClr val="dk1"/>
+              </a:buClr>
+              <a:buSzPct val="100000"/>
+              <a:buChar char="●"/>
+            </a:pPr>
+            <a:r>
+              <a:rPr lang="en" sz="5431">
+                <a:solidFill>
+                  <a:schemeClr val="dk1"/>
+                </a:solidFill>
+              </a:rPr>
+              <a:t>Explore additional relevant features.</a:t>
+            </a:r>
+            <a:endParaRPr sz="5431">
+              <a:solidFill>
+                <a:schemeClr val="dk1"/>
+              </a:solidFill>
+            </a:endParaRPr>
+          </a:p>
+          <a:p>
+            <a:pPr indent="-314819" lvl="0" marL="457200" rtl="0" algn="l">
+              <a:spcBef>
+                <a:spcPts val="0"/>
+              </a:spcBef>
+              <a:spcAft>
+                <a:spcPts val="0"/>
+              </a:spcAft>
+              <a:buClr>
+                <a:schemeClr val="dk1"/>
+              </a:buClr>
+              <a:buSzPct val="100000"/>
+              <a:buChar char="●"/>
+            </a:pPr>
+            <a:r>
+              <a:rPr lang="en" sz="5431">
+                <a:solidFill>
+                  <a:schemeClr val="dk1"/>
+                </a:solidFill>
+              </a:rPr>
+              <a:t>Further tune the model using cross-validation.</a:t>
+            </a:r>
+            <a:endParaRPr sz="5431">
+              <a:solidFill>
+                <a:schemeClr val="dk1"/>
+              </a:solidFill>
+            </a:endParaRPr>
+          </a:p>
+          <a:p>
+            <a:pPr indent="0" lvl="0" marL="0" rtl="0" algn="l">
+              <a:spcBef>
+                <a:spcPts val="1200"/>
+              </a:spcBef>
+              <a:spcAft>
+                <a:spcPts val="1200"/>
+              </a:spcAft>
+              <a:buNone/>
+            </a:pPr>
+            <a:r>
+              <a:t/>
+            </a:r>
+            <a:endParaRPr/>
+          </a:p>
+        </p:txBody>
+      </p:sp>
+    </p:spTree>
+  </p:cSld>
+  <p:clrMapOvr>
+    <a:masterClrMapping/>
+  </p:clrMapOvr>
+</p:sld>
+</file>
+
+<file path=ppt/slides/slide12.xml><?xml version="1.0" encoding="utf-8"?>
+<p:sld xmlns:a="http://schemas.openxmlformats.org/drawingml/2006/main" xmlns:r="http://schemas.openxmlformats.org/officeDocument/2006/relationships" xmlns:mc="http://schemas.openxmlformats.org/markup-compatibility/2006" xmlns:mv="urn:schemas-microsoft-com:mac:vml" xmlns:p="http://schemas.openxmlformats.org/presentationml/2006/main" xmlns:c="http://schemas.openxmlformats.org/drawingml/2006/chart" xmlns:dgm="http://schemas.openxmlformats.org/drawingml/2006/diagram" xmlns:o="urn:schemas-microsoft-com:office:office" xmlns:v="urn:schemas-microsoft-com:vml" xmlns:pvml="urn:schemas-microsoft-com:office:powerpoint" xmlns:com="http://schemas.openxmlformats.org/drawingml/2006/compatibility" xmlns:p14="http://schemas.microsoft.com/office/powerpoint/2010/main" xmlns:p15="http://schemas.microsoft.com/office/powerpoint/2012/main" xmlns:ahyp="http://schemas.microsoft.com/office/drawing/2018/hyperlinkcolor">
+  <p:cSld>
+    <p:spTree>
+      <p:nvGrpSpPr>
+        <p:cNvPr id="119" name="Shape 119"/>
+        <p:cNvGrpSpPr/>
+        <p:nvPr/>
+      </p:nvGrpSpPr>
+      <p:grpSpPr>
+        <a:xfrm>
+          <a:off x="0" y="0"/>
+          <a:ext cx="0" cy="0"/>
+          <a:chOff x="0" y="0"/>
+          <a:chExt cx="0" cy="0"/>
+        </a:xfrm>
+      </p:grpSpPr>
+      <p:sp>
+        <p:nvSpPr>
+          <p:cNvPr id="120" name="Google Shape;120;p24"/>
+          <p:cNvSpPr txBox="1"/>
+          <p:nvPr>
+            <p:ph type="title"/>
+          </p:nvPr>
+        </p:nvSpPr>
+        <p:spPr>
+          <a:xfrm>
+            <a:off x="311700" y="445025"/>
+            <a:ext cx="8520600" cy="572700"/>
+          </a:xfrm>
+          <a:prstGeom prst="rect">
+            <a:avLst/>
+          </a:prstGeom>
+        </p:spPr>
+        <p:txBody>
+          <a:bodyPr anchorCtr="0" anchor="t" bIns="91425" lIns="91425" spcFirstLastPara="1" rIns="91425" wrap="square" tIns="91425">
+            <a:normAutofit/>
+          </a:bodyPr>
+          <a:lstStyle/>
+          <a:p>
+            <a:pPr indent="0" lvl="0" marL="0" rtl="0" algn="l">
+              <a:lnSpc>
+                <a:spcPct val="115000"/>
+              </a:lnSpc>
+              <a:spcBef>
+                <a:spcPts val="2400"/>
+              </a:spcBef>
+              <a:spcAft>
+                <a:spcPts val="600"/>
+              </a:spcAft>
+              <a:buClr>
+                <a:schemeClr val="dk1"/>
+              </a:buClr>
+              <a:buSzPts val="1100"/>
+              <a:buFont typeface="Arial"/>
+              <a:buNone/>
+            </a:pPr>
+            <a:r>
+              <a:rPr b="1" lang="en" sz="2300"/>
+              <a:t>Thank You</a:t>
+            </a:r>
+            <a:endParaRPr/>
+          </a:p>
+        </p:txBody>
+      </p:sp>
+      <p:sp>
+        <p:nvSpPr>
+          <p:cNvPr id="121" name="Google Shape;121;p24"/>
+          <p:cNvSpPr txBox="1"/>
+          <p:nvPr>
+            <p:ph idx="1" type="body"/>
+          </p:nvPr>
+        </p:nvSpPr>
+        <p:spPr>
+          <a:xfrm>
+            <a:off x="311700" y="1152475"/>
+            <a:ext cx="8520600" cy="3416400"/>
+          </a:xfrm>
+          <a:prstGeom prst="rect">
+            <a:avLst/>
+          </a:prstGeom>
+        </p:spPr>
+        <p:txBody>
+          <a:bodyPr anchorCtr="0" anchor="t" bIns="91425" lIns="91425" spcFirstLastPara="1" rIns="91425" wrap="square" tIns="91425">
+            <a:normAutofit/>
+          </a:bodyPr>
+          <a:lstStyle/>
+          <a:p>
+            <a:pPr indent="0" lvl="0" marL="0" rtl="0" algn="l">
+              <a:spcBef>
+                <a:spcPts val="1800"/>
+              </a:spcBef>
+              <a:spcAft>
+                <a:spcPts val="0"/>
+              </a:spcAft>
+              <a:buClr>
+                <a:schemeClr val="dk1"/>
+              </a:buClr>
+              <a:buSzPts val="1100"/>
+              <a:buFont typeface="Arial"/>
+              <a:buNone/>
+            </a:pPr>
+            <a:r>
+              <a:rPr b="1" lang="en" sz="1700">
+                <a:solidFill>
+                  <a:schemeClr val="dk1"/>
+                </a:solidFill>
+              </a:rPr>
+              <a:t>Questions?</a:t>
+            </a:r>
+            <a:endParaRPr b="1" sz="1700">
+              <a:solidFill>
+                <a:schemeClr val="dk1"/>
+              </a:solidFill>
+            </a:endParaRPr>
+          </a:p>
+          <a:p>
+            <a:pPr indent="0" lvl="0" marL="0" rtl="0" algn="l">
+              <a:spcBef>
+                <a:spcPts val="1200"/>
+              </a:spcBef>
+              <a:spcAft>
+                <a:spcPts val="0"/>
+              </a:spcAft>
+              <a:buClr>
+                <a:schemeClr val="dk1"/>
+              </a:buClr>
+              <a:buSzPts val="1100"/>
+              <a:buFont typeface="Arial"/>
+              <a:buNone/>
+            </a:pPr>
+            <a:r>
+              <a:rPr b="1" lang="en">
+                <a:solidFill>
+                  <a:schemeClr val="dk1"/>
+                </a:solidFill>
+              </a:rPr>
+              <a:t>House Price Prediction Using Machine Learning</a:t>
+            </a:r>
+            <a:endParaRPr b="1">
+              <a:solidFill>
+                <a:schemeClr val="dk1"/>
+              </a:solidFill>
+            </a:endParaRPr>
+          </a:p>
+          <a:p>
+            <a:pPr indent="0" lvl="0" marL="0" rtl="0" algn="l">
+              <a:spcBef>
+                <a:spcPts val="1200"/>
+              </a:spcBef>
+              <a:spcAft>
+                <a:spcPts val="0"/>
+              </a:spcAft>
+              <a:buClr>
+                <a:schemeClr val="dk1"/>
+              </a:buClr>
+              <a:buSzPts val="1100"/>
+              <a:buFont typeface="Arial"/>
+              <a:buNone/>
+            </a:pPr>
+            <a:r>
+              <a:rPr lang="en">
+                <a:solidFill>
+                  <a:schemeClr val="dk1"/>
+                </a:solidFill>
+              </a:rPr>
+              <a:t>King County House Sales Dataset</a:t>
+            </a:r>
+            <a:endParaRPr>
+              <a:solidFill>
+                <a:schemeClr val="dk1"/>
+              </a:solidFill>
+            </a:endParaRPr>
+          </a:p>
+          <a:p>
+            <a:pPr indent="0" lvl="0" marL="0" rtl="0" algn="l">
+              <a:spcBef>
+                <a:spcPts val="1200"/>
+              </a:spcBef>
+              <a:spcAft>
+                <a:spcPts val="0"/>
+              </a:spcAft>
+              <a:buClr>
+                <a:schemeClr val="dk1"/>
+              </a:buClr>
+              <a:buSzPts val="1100"/>
+              <a:buFont typeface="Arial"/>
+              <a:buNone/>
+            </a:pPr>
+            <a:r>
+              <a:rPr b="1" lang="en">
+                <a:solidFill>
+                  <a:schemeClr val="dk1"/>
+                </a:solidFill>
+              </a:rPr>
+              <a:t>Key takeaway:</a:t>
+            </a:r>
+            <a:r>
+              <a:rPr lang="en">
+                <a:solidFill>
+                  <a:schemeClr val="dk1"/>
+                </a:solidFill>
+              </a:rPr>
+              <a:t> Random Forest achieved the strongest performance among the three models tested.</a:t>
+            </a:r>
+            <a:endParaRPr>
+              <a:solidFill>
+                <a:schemeClr val="dk1"/>
+              </a:solidFill>
+            </a:endParaRPr>
+          </a:p>
+          <a:p>
+            <a:pPr indent="0" lvl="0" marL="0" rtl="0" algn="l">
+              <a:spcBef>
+                <a:spcPts val="1200"/>
+              </a:spcBef>
+              <a:spcAft>
+                <a:spcPts val="0"/>
+              </a:spcAft>
+              <a:buClr>
+                <a:schemeClr val="dk1"/>
+              </a:buClr>
+              <a:buSzPts val="1100"/>
+              <a:buFont typeface="Arial"/>
+              <a:buNone/>
+            </a:pPr>
+            <a:r>
+              <a:rPr lang="en">
+                <a:solidFill>
+                  <a:schemeClr val="dk1"/>
+                </a:solidFill>
+              </a:rPr>
+              <a:t>Thank you for listening!</a:t>
+            </a:r>
+            <a:endParaRPr>
+              <a:solidFill>
+                <a:schemeClr val="dk1"/>
+              </a:solidFill>
+            </a:endParaRPr>
+          </a:p>
+          <a:p>
+            <a:pPr indent="0" lvl="0" marL="0" rtl="0" algn="l">
+              <a:spcBef>
+                <a:spcPts val="1200"/>
+              </a:spcBef>
+              <a:spcAft>
+                <a:spcPts val="1200"/>
+              </a:spcAft>
+              <a:buNone/>
+            </a:pPr>
+            <a:r>
+              <a:t/>
+            </a:r>
+            <a:endParaRPr/>
+          </a:p>
+        </p:txBody>
+      </p:sp>
+    </p:spTree>
+  </p:cSld>
+  <p:clrMapOvr>
+    <a:masterClrMapping/>
+  </p:clrMapOvr>
+</p:sld>
+</file>
+
+<file path=ppt/slides/slide13.xml><?xml version="1.0" encoding="utf-8"?>
+<p:sld xmlns:a="http://schemas.openxmlformats.org/drawingml/2006/main" xmlns:r="http://schemas.openxmlformats.org/officeDocument/2006/relationships" xmlns:mc="http://schemas.openxmlformats.org/markup-compatibility/2006" xmlns:mv="urn:schemas-microsoft-com:mac:vml" xmlns:p="http://schemas.openxmlformats.org/presentationml/2006/main" xmlns:c="http://schemas.openxmlformats.org/drawingml/2006/chart" xmlns:dgm="http://schemas.openxmlformats.org/drawingml/2006/diagram" xmlns:o="urn:schemas-microsoft-com:office:office" xmlns:v="urn:schemas-microsoft-com:vml" xmlns:pvml="urn:schemas-microsoft-com:office:powerpoint" xmlns:com="http://schemas.openxmlformats.org/drawingml/2006/compatibility" xmlns:p14="http://schemas.microsoft.com/office/powerpoint/2010/main" xmlns:p15="http://schemas.microsoft.com/office/powerpoint/2012/main" xmlns:ahyp="http://schemas.microsoft.com/office/drawing/2018/hyperlinkcolor">
+  <p:cSld>
+    <p:spTree>
+      <p:nvGrpSpPr>
+        <p:cNvPr id="125" name="Shape 125"/>
+        <p:cNvGrpSpPr/>
+        <p:nvPr/>
+      </p:nvGrpSpPr>
+      <p:grpSpPr>
+        <a:xfrm>
+          <a:off x="0" y="0"/>
+          <a:ext cx="0" cy="0"/>
+          <a:chOff x="0" y="0"/>
+          <a:chExt cx="0" cy="0"/>
+        </a:xfrm>
+      </p:grpSpPr>
+      <p:sp>
+        <p:nvSpPr>
+          <p:cNvPr id="126" name="Google Shape;126;p25"/>
+          <p:cNvSpPr txBox="1"/>
+          <p:nvPr>
             <p:ph type="title"/>
           </p:nvPr>
         </p:nvSpPr>
@@ -6195,26 +8280,25 @@
           </a:bodyPr>
           <a:lstStyle/>
           <a:p>
-            <a:pPr indent="0" lvl="0" marL="0" rtl="0" algn="ctr">
-              <a:spcBef>
-                <a:spcPts val="0"/>
-              </a:spcBef>
-              <a:spcAft>
-                <a:spcPts val="0"/>
-              </a:spcAft>
-              <a:buNone/>
-            </a:pPr>
-            <a:r>
-              <a:rPr b="1" lang="en"/>
-              <a:t>King County House Price Prediction</a:t>
-            </a:r>
-            <a:endParaRPr b="1"/>
+            <a:pPr indent="0" lvl="0" marL="0" rtl="0" algn="l">
+              <a:spcBef>
+                <a:spcPts val="0"/>
+              </a:spcBef>
+              <a:spcAft>
+                <a:spcPts val="0"/>
+              </a:spcAft>
+              <a:buNone/>
+            </a:pPr>
+            <a:r>
+              <a:t/>
+            </a:r>
+            <a:endParaRPr/>
           </a:p>
         </p:txBody>
       </p:sp>
       <p:sp>
         <p:nvSpPr>
-          <p:cNvPr id="55" name="Google Shape;55;p13"/>
+          <p:cNvPr id="127" name="Google Shape;127;p25"/>
           <p:cNvSpPr txBox="1"/>
           <p:nvPr>
             <p:ph idx="1" type="body"/>
@@ -6281,132 +8365,13 @@
           <p:cNvPr id="60" name="Google Shape;60;p14"/>
           <p:cNvSpPr txBox="1"/>
           <p:nvPr>
-            <p:ph type="ctrTitle"/>
+            <p:ph type="title"/>
           </p:nvPr>
         </p:nvSpPr>
         <p:spPr>
           <a:xfrm>
-            <a:off x="311708" y="744575"/>
-            <a:ext cx="8520600" cy="2052600"/>
-          </a:xfrm>
-          <a:prstGeom prst="rect">
-            <a:avLst/>
-          </a:prstGeom>
-        </p:spPr>
-        <p:txBody>
-          <a:bodyPr anchorCtr="0" anchor="b" bIns="91425" lIns="91425" spcFirstLastPara="1" rIns="91425" wrap="square" tIns="91425">
-            <a:normAutofit fontScale="90000"/>
-          </a:bodyPr>
-          <a:lstStyle/>
-          <a:p>
-            <a:pPr indent="0" lvl="0" marL="0" rtl="0" algn="ctr">
-              <a:lnSpc>
-                <a:spcPct val="115000"/>
-              </a:lnSpc>
-              <a:spcBef>
-                <a:spcPts val="2400"/>
-              </a:spcBef>
-              <a:spcAft>
-                <a:spcPts val="0"/>
-              </a:spcAft>
-              <a:buNone/>
-            </a:pPr>
-            <a:r>
-              <a:rPr b="1" lang="en" sz="2106"/>
-              <a:t>Predicting House Prices</a:t>
-            </a:r>
-            <a:endParaRPr b="1" sz="2106"/>
-          </a:p>
-          <a:p>
-            <a:pPr indent="0" lvl="0" marL="0" rtl="0" algn="ctr">
-              <a:lnSpc>
-                <a:spcPct val="115000"/>
-              </a:lnSpc>
-              <a:spcBef>
-                <a:spcPts val="1200"/>
-              </a:spcBef>
-              <a:spcAft>
-                <a:spcPts val="0"/>
-              </a:spcAft>
-              <a:buNone/>
-            </a:pPr>
-            <a:r>
-              <a:rPr b="1" lang="en" sz="2106"/>
-              <a:t>Using Machine Learning to Estimate Property Values</a:t>
-            </a:r>
-            <a:endParaRPr b="1" sz="2106"/>
-          </a:p>
-          <a:p>
-            <a:pPr indent="0" lvl="0" marL="0" rtl="0" algn="ctr">
-              <a:lnSpc>
-                <a:spcPct val="115000"/>
-              </a:lnSpc>
-              <a:spcBef>
-                <a:spcPts val="1200"/>
-              </a:spcBef>
-              <a:spcAft>
-                <a:spcPts val="0"/>
-              </a:spcAft>
-              <a:buNone/>
-            </a:pPr>
-            <a:r>
-              <a:rPr lang="en" sz="2106"/>
-              <a:t>King County, Washington, USA</a:t>
-            </a:r>
-            <a:endParaRPr b="1" sz="2106"/>
-          </a:p>
-          <a:p>
-            <a:pPr indent="0" lvl="0" marL="0" rtl="0" algn="ctr">
-              <a:lnSpc>
-                <a:spcPct val="115000"/>
-              </a:lnSpc>
-              <a:spcBef>
-                <a:spcPts val="1200"/>
-              </a:spcBef>
-              <a:spcAft>
-                <a:spcPts val="0"/>
-              </a:spcAft>
-              <a:buClr>
-                <a:schemeClr val="dk1"/>
-              </a:buClr>
-              <a:buSzPct val="52243"/>
-              <a:buFont typeface="Arial"/>
-              <a:buNone/>
-            </a:pPr>
-            <a:r>
-              <a:t/>
-            </a:r>
-            <a:endParaRPr sz="2106"/>
-          </a:p>
-          <a:p>
-            <a:pPr indent="0" lvl="0" marL="0" rtl="0" algn="ctr">
-              <a:spcBef>
-                <a:spcPts val="1200"/>
-              </a:spcBef>
-              <a:spcAft>
-                <a:spcPts val="0"/>
-              </a:spcAft>
-              <a:buNone/>
-            </a:pPr>
-            <a:r>
-              <a:t/>
-            </a:r>
-            <a:endParaRPr b="1" sz="2300"/>
-          </a:p>
-        </p:txBody>
-      </p:sp>
-      <p:sp>
-        <p:nvSpPr>
-          <p:cNvPr id="61" name="Google Shape;61;p14"/>
-          <p:cNvSpPr txBox="1"/>
-          <p:nvPr>
-            <p:ph idx="1" type="subTitle"/>
-          </p:nvPr>
-        </p:nvSpPr>
-        <p:spPr>
-          <a:xfrm>
-            <a:off x="311700" y="2834125"/>
-            <a:ext cx="8520600" cy="792600"/>
+            <a:off x="311700" y="445025"/>
+            <a:ext cx="8520600" cy="572700"/>
           </a:xfrm>
           <a:prstGeom prst="rect">
             <a:avLst/>
@@ -6418,18 +8383,344 @@
           </a:bodyPr>
           <a:lstStyle/>
           <a:p>
+            <a:pPr indent="0" lvl="0" marL="0" rtl="0" algn="ctr">
+              <a:lnSpc>
+                <a:spcPct val="115000"/>
+              </a:lnSpc>
+              <a:spcBef>
+                <a:spcPts val="2400"/>
+              </a:spcBef>
+              <a:spcAft>
+                <a:spcPts val="600"/>
+              </a:spcAft>
+              <a:buClr>
+                <a:schemeClr val="dk1"/>
+              </a:buClr>
+              <a:buSzPts val="1100"/>
+              <a:buFont typeface="Arial"/>
+              <a:buNone/>
+            </a:pPr>
+            <a:r>
+              <a:rPr b="1" lang="en" sz="2300"/>
+              <a:t>Project Aim and Objectives</a:t>
+            </a:r>
+            <a:endParaRPr/>
+          </a:p>
+        </p:txBody>
+      </p:sp>
+      <p:sp>
+        <p:nvSpPr>
+          <p:cNvPr id="61" name="Google Shape;61;p14"/>
+          <p:cNvSpPr txBox="1"/>
+          <p:nvPr>
+            <p:ph idx="1" type="body"/>
+          </p:nvPr>
+        </p:nvSpPr>
+        <p:spPr>
+          <a:xfrm>
+            <a:off x="311700" y="863550"/>
+            <a:ext cx="8520600" cy="3416400"/>
+          </a:xfrm>
+          <a:prstGeom prst="rect">
+            <a:avLst/>
+          </a:prstGeom>
+        </p:spPr>
+        <p:txBody>
+          <a:bodyPr anchorCtr="0" anchor="t" bIns="91425" lIns="91425" spcFirstLastPara="1" rIns="91425" wrap="square" tIns="91425">
+            <a:noAutofit/>
+          </a:bodyPr>
+          <a:lstStyle/>
+          <a:p>
             <a:pPr indent="0" lvl="0" marL="0" rtl="0" algn="l">
               <a:spcBef>
-                <a:spcPts val="0"/>
-              </a:spcBef>
-              <a:spcAft>
-                <a:spcPts val="0"/>
-              </a:spcAft>
-              <a:buNone/>
-            </a:pPr>
-            <a:r>
-              <a:rPr lang="en"/>
-              <a:t>							Egbie Uku</a:t>
+                <a:spcPts val="2400"/>
+              </a:spcBef>
+              <a:spcAft>
+                <a:spcPts val="0"/>
+              </a:spcAft>
+              <a:buClr>
+                <a:schemeClr val="dk1"/>
+              </a:buClr>
+              <a:buSzPts val="1100"/>
+              <a:buFont typeface="Arial"/>
+              <a:buNone/>
+            </a:pPr>
+            <a:r>
+              <a:t/>
+            </a:r>
+            <a:endParaRPr b="1" sz="2700">
+              <a:solidFill>
+                <a:schemeClr val="dk1"/>
+              </a:solidFill>
+            </a:endParaRPr>
+          </a:p>
+          <a:p>
+            <a:pPr indent="0" lvl="0" marL="0" rtl="0" algn="l">
+              <a:spcBef>
+                <a:spcPts val="1200"/>
+              </a:spcBef>
+              <a:spcAft>
+                <a:spcPts val="0"/>
+              </a:spcAft>
+              <a:buClr>
+                <a:schemeClr val="dk1"/>
+              </a:buClr>
+              <a:buSzPts val="1100"/>
+              <a:buFont typeface="Arial"/>
+              <a:buNone/>
+            </a:pPr>
+            <a:r>
+              <a:rPr b="1" lang="en" sz="2100">
+                <a:solidFill>
+                  <a:schemeClr val="dk1"/>
+                </a:solidFill>
+              </a:rPr>
+              <a:t>Aim</a:t>
+            </a:r>
+            <a:endParaRPr b="1" sz="2100">
+              <a:solidFill>
+                <a:schemeClr val="dk1"/>
+              </a:solidFill>
+            </a:endParaRPr>
+          </a:p>
+          <a:p>
+            <a:pPr indent="0" lvl="0" marL="0" rtl="0" algn="l">
+              <a:spcBef>
+                <a:spcPts val="1200"/>
+              </a:spcBef>
+              <a:spcAft>
+                <a:spcPts val="0"/>
+              </a:spcAft>
+              <a:buClr>
+                <a:schemeClr val="dk1"/>
+              </a:buClr>
+              <a:buSzPts val="1100"/>
+              <a:buFont typeface="Arial"/>
+              <a:buNone/>
+            </a:pPr>
+            <a:r>
+              <a:rPr lang="en" sz="1500">
+                <a:solidFill>
+                  <a:schemeClr val="dk1"/>
+                </a:solidFill>
+              </a:rPr>
+              <a:t>To develop a machine learning model that predicts house prices using King County house sales data.</a:t>
+            </a:r>
+            <a:endParaRPr sz="1500">
+              <a:solidFill>
+                <a:schemeClr val="dk1"/>
+              </a:solidFill>
+            </a:endParaRPr>
+          </a:p>
+          <a:p>
+            <a:pPr indent="0" lvl="0" marL="0" rtl="0" algn="l">
+              <a:spcBef>
+                <a:spcPts val="1200"/>
+              </a:spcBef>
+              <a:spcAft>
+                <a:spcPts val="0"/>
+              </a:spcAft>
+              <a:buClr>
+                <a:schemeClr val="dk1"/>
+              </a:buClr>
+              <a:buSzPts val="1100"/>
+              <a:buFont typeface="Arial"/>
+              <a:buNone/>
+            </a:pPr>
+            <a:r>
+              <a:rPr b="1" lang="en" sz="1500">
+                <a:solidFill>
+                  <a:schemeClr val="dk1"/>
+                </a:solidFill>
+              </a:rPr>
+              <a:t>Objectives</a:t>
+            </a:r>
+            <a:endParaRPr b="1" sz="1500">
+              <a:solidFill>
+                <a:schemeClr val="dk1"/>
+              </a:solidFill>
+            </a:endParaRPr>
+          </a:p>
+          <a:p>
+            <a:pPr indent="-323850" lvl="0" marL="457200" rtl="0" algn="l">
+              <a:spcBef>
+                <a:spcPts val="1200"/>
+              </a:spcBef>
+              <a:spcAft>
+                <a:spcPts val="0"/>
+              </a:spcAft>
+              <a:buClr>
+                <a:schemeClr val="dk1"/>
+              </a:buClr>
+              <a:buSzPts val="1500"/>
+              <a:buChar char="●"/>
+            </a:pPr>
+            <a:r>
+              <a:rPr lang="en" sz="1500">
+                <a:solidFill>
+                  <a:schemeClr val="dk1"/>
+                </a:solidFill>
+              </a:rPr>
+              <a:t>Explore the dataset and understand its key features.</a:t>
+            </a:r>
+            <a:endParaRPr sz="1500">
+              <a:solidFill>
+                <a:schemeClr val="dk1"/>
+              </a:solidFill>
+            </a:endParaRPr>
+          </a:p>
+          <a:p>
+            <a:pPr indent="-323850" lvl="0" marL="457200" rtl="0" algn="l">
+              <a:spcBef>
+                <a:spcPts val="0"/>
+              </a:spcBef>
+              <a:spcAft>
+                <a:spcPts val="0"/>
+              </a:spcAft>
+              <a:buClr>
+                <a:schemeClr val="dk1"/>
+              </a:buClr>
+              <a:buSzPts val="1500"/>
+              <a:buChar char="●"/>
+            </a:pPr>
+            <a:r>
+              <a:rPr lang="en" sz="1500">
+                <a:solidFill>
+                  <a:schemeClr val="dk1"/>
+                </a:solidFill>
+              </a:rPr>
+              <a:t>Identify and investigate data quality issues.</a:t>
+            </a:r>
+            <a:endParaRPr sz="1500">
+              <a:solidFill>
+                <a:schemeClr val="dk1"/>
+              </a:solidFill>
+            </a:endParaRPr>
+          </a:p>
+          <a:p>
+            <a:pPr indent="-323850" lvl="0" marL="457200" rtl="0" algn="l">
+              <a:spcBef>
+                <a:spcPts val="0"/>
+              </a:spcBef>
+              <a:spcAft>
+                <a:spcPts val="0"/>
+              </a:spcAft>
+              <a:buClr>
+                <a:schemeClr val="dk1"/>
+              </a:buClr>
+              <a:buSzPts val="1500"/>
+              <a:buChar char="●"/>
+            </a:pPr>
+            <a:r>
+              <a:rPr lang="en" sz="1500">
+                <a:solidFill>
+                  <a:schemeClr val="dk1"/>
+                </a:solidFill>
+              </a:rPr>
+              <a:t>Clean and prepare the data for modelling.</a:t>
+            </a:r>
+            <a:endParaRPr sz="1500">
+              <a:solidFill>
+                <a:schemeClr val="dk1"/>
+              </a:solidFill>
+            </a:endParaRPr>
+          </a:p>
+          <a:p>
+            <a:pPr indent="-323850" lvl="0" marL="457200" rtl="0" algn="l">
+              <a:spcBef>
+                <a:spcPts val="0"/>
+              </a:spcBef>
+              <a:spcAft>
+                <a:spcPts val="0"/>
+              </a:spcAft>
+              <a:buClr>
+                <a:schemeClr val="dk1"/>
+              </a:buClr>
+              <a:buSzPts val="1500"/>
+              <a:buChar char="●"/>
+            </a:pPr>
+            <a:r>
+              <a:rPr lang="en" sz="1500">
+                <a:solidFill>
+                  <a:schemeClr val="dk1"/>
+                </a:solidFill>
+              </a:rPr>
+              <a:t>Train and compare different regression models.</a:t>
+            </a:r>
+            <a:endParaRPr sz="1500">
+              <a:solidFill>
+                <a:schemeClr val="dk1"/>
+              </a:solidFill>
+            </a:endParaRPr>
+          </a:p>
+          <a:p>
+            <a:pPr indent="-323850" lvl="0" marL="457200" rtl="0" algn="l">
+              <a:spcBef>
+                <a:spcPts val="0"/>
+              </a:spcBef>
+              <a:spcAft>
+                <a:spcPts val="0"/>
+              </a:spcAft>
+              <a:buClr>
+                <a:schemeClr val="dk1"/>
+              </a:buClr>
+              <a:buSzPts val="1500"/>
+              <a:buChar char="●"/>
+            </a:pPr>
+            <a:r>
+              <a:rPr lang="en" sz="1500">
+                <a:solidFill>
+                  <a:schemeClr val="dk1"/>
+                </a:solidFill>
+              </a:rPr>
+              <a:t>Evaluate model performance using MAE, RMSE and R².</a:t>
+            </a:r>
+            <a:endParaRPr sz="1500">
+              <a:solidFill>
+                <a:schemeClr val="dk1"/>
+              </a:solidFill>
+            </a:endParaRPr>
+          </a:p>
+          <a:p>
+            <a:pPr indent="-323850" lvl="0" marL="457200" rtl="0" algn="l">
+              <a:spcBef>
+                <a:spcPts val="0"/>
+              </a:spcBef>
+              <a:spcAft>
+                <a:spcPts val="0"/>
+              </a:spcAft>
+              <a:buClr>
+                <a:schemeClr val="dk1"/>
+              </a:buClr>
+              <a:buSzPts val="1500"/>
+              <a:buChar char="●"/>
+            </a:pPr>
+            <a:r>
+              <a:rPr lang="en" sz="1500">
+                <a:solidFill>
+                  <a:schemeClr val="dk1"/>
+                </a:solidFill>
+              </a:rPr>
+              <a:t>Select a model based on its predictive performance.</a:t>
+            </a:r>
+            <a:endParaRPr sz="1500">
+              <a:solidFill>
+                <a:schemeClr val="dk1"/>
+              </a:solidFill>
+            </a:endParaRPr>
+          </a:p>
+          <a:p>
+            <a:pPr indent="0" lvl="0" marL="0" rtl="0" algn="l">
+              <a:spcBef>
+                <a:spcPts val="1200"/>
+              </a:spcBef>
+              <a:spcAft>
+                <a:spcPts val="1200"/>
+              </a:spcAft>
+              <a:buNone/>
+            </a:pPr>
+            <a:r>
+              <a:t/>
             </a:r>
             <a:endParaRPr/>
           </a:p>
@@ -6465,38 +8756,46 @@
           <p:cNvPr id="66" name="Google Shape;66;p15"/>
           <p:cNvSpPr txBox="1"/>
           <p:nvPr>
-            <p:ph type="ctrTitle"/>
+            <p:ph type="title"/>
           </p:nvPr>
         </p:nvSpPr>
         <p:spPr>
           <a:xfrm>
-            <a:off x="311708" y="744575"/>
-            <a:ext cx="8520600" cy="2052600"/>
+            <a:off x="311700" y="445025"/>
+            <a:ext cx="8520600" cy="572700"/>
           </a:xfrm>
           <a:prstGeom prst="rect">
             <a:avLst/>
           </a:prstGeom>
         </p:spPr>
         <p:txBody>
-          <a:bodyPr anchorCtr="0" anchor="b" bIns="91425" lIns="91425" spcFirstLastPara="1" rIns="91425" wrap="square" tIns="91425">
+          <a:bodyPr anchorCtr="0" anchor="t" bIns="91425" lIns="91425" spcFirstLastPara="1" rIns="91425" wrap="square" tIns="91425">
             <a:normAutofit/>
           </a:bodyPr>
           <a:lstStyle/>
           <a:p>
-            <a:pPr indent="0" lvl="0" marL="0" rtl="0" algn="ctr">
-              <a:spcBef>
-                <a:spcPts val="0"/>
-              </a:spcBef>
-              <a:spcAft>
-                <a:spcPts val="0"/>
-              </a:spcAft>
-              <a:buNone/>
-            </a:pPr>
-            <a:r>
-              <a:rPr lang="en" sz="4300"/>
-              <a:t>Understanding the data</a:t>
-            </a:r>
-            <a:endParaRPr sz="4300"/>
+            <a:pPr indent="0" lvl="0" marL="0" rtl="0" algn="l">
+              <a:lnSpc>
+                <a:spcPct val="115000"/>
+              </a:lnSpc>
+              <a:spcBef>
+                <a:spcPts val="2400"/>
+              </a:spcBef>
+              <a:spcAft>
+                <a:spcPts val="600"/>
+              </a:spcAft>
+              <a:buClr>
+                <a:schemeClr val="dk1"/>
+              </a:buClr>
+              <a:buSzPts val="1100"/>
+              <a:buFont typeface="Arial"/>
+              <a:buNone/>
+            </a:pPr>
+            <a:r>
+              <a:rPr b="1" lang="en" sz="2300"/>
+              <a:t>Dataset at a Glance</a:t>
+            </a:r>
+            <a:endParaRPr/>
           </a:p>
         </p:txBody>
       </p:sp>
@@ -6505,13 +8804,13 @@
           <p:cNvPr id="67" name="Google Shape;67;p15"/>
           <p:cNvSpPr txBox="1"/>
           <p:nvPr>
-            <p:ph idx="1" type="subTitle"/>
+            <p:ph idx="1" type="body"/>
           </p:nvPr>
         </p:nvSpPr>
         <p:spPr>
           <a:xfrm>
-            <a:off x="94750" y="2852225"/>
-            <a:ext cx="8520600" cy="792600"/>
+            <a:off x="311700" y="1152475"/>
+            <a:ext cx="8520600" cy="3416400"/>
           </a:xfrm>
           <a:prstGeom prst="rect">
             <a:avLst/>
@@ -6519,42 +8818,35 @@
         </p:spPr>
         <p:txBody>
           <a:bodyPr anchorCtr="0" anchor="t" bIns="91425" lIns="91425" spcFirstLastPara="1" rIns="91425" wrap="square" tIns="91425">
-            <a:noAutofit/>
+            <a:normAutofit fontScale="25000" lnSpcReduction="20000"/>
           </a:bodyPr>
           <a:lstStyle/>
           <a:p>
-            <a:pPr indent="0" lvl="0" marL="914400" rtl="0" algn="ctr">
-              <a:lnSpc>
-                <a:spcPct val="115000"/>
-              </a:lnSpc>
-              <a:spcBef>
-                <a:spcPts val="1200"/>
-              </a:spcBef>
-              <a:spcAft>
-                <a:spcPts val="0"/>
-              </a:spcAft>
-              <a:buSzPts val="523"/>
-              <a:buNone/>
-            </a:pPr>
-            <a:r>
-              <a:rPr b="1" lang="en" sz="1600">
-                <a:solidFill>
-                  <a:schemeClr val="dk1"/>
-                </a:solidFill>
-              </a:rPr>
-              <a:t>Dataset King County Sales</a:t>
-            </a:r>
-            <a:endParaRPr b="1" sz="1600">
+            <a:pPr indent="0" lvl="0" marL="0" rtl="0" algn="l">
+              <a:spcBef>
+                <a:spcPts val="2400"/>
+              </a:spcBef>
+              <a:spcAft>
+                <a:spcPts val="0"/>
+              </a:spcAft>
+              <a:buClr>
+                <a:schemeClr val="dk1"/>
+              </a:buClr>
+              <a:buSzPct val="47826"/>
+              <a:buFont typeface="Arial"/>
+              <a:buNone/>
+            </a:pPr>
+            <a:r>
+              <a:t/>
+            </a:r>
+            <a:endParaRPr b="1" sz="2300">
               <a:solidFill>
                 <a:schemeClr val="dk1"/>
               </a:solidFill>
             </a:endParaRPr>
           </a:p>
           <a:p>
-            <a:pPr indent="-342900" lvl="0" marL="1371600" rtl="0" algn="l">
-              <a:lnSpc>
-                <a:spcPct val="115000"/>
-              </a:lnSpc>
+            <a:pPr indent="0" lvl="0" marL="0" rtl="0" algn="l">
               <a:spcBef>
                 <a:spcPts val="1200"/>
               </a:spcBef>
@@ -6564,50 +8856,136 @@
               <a:buClr>
                 <a:schemeClr val="dk1"/>
               </a:buClr>
-              <a:buSzPts val="1800"/>
-              <a:buChar char="●"/>
-            </a:pPr>
-            <a:r>
-              <a:rPr lang="en" sz="1800">
-                <a:solidFill>
-                  <a:schemeClr val="dk1"/>
-                </a:solidFill>
-              </a:rPr>
-              <a:t>21,613 records and 21 original columns.</a:t>
-            </a:r>
-            <a:endParaRPr sz="1800">
+              <a:buSzPts val="275"/>
+              <a:buFont typeface="Arial"/>
+              <a:buNone/>
+            </a:pPr>
+            <a:r>
+              <a:rPr b="1" lang="en" sz="6344">
+                <a:solidFill>
+                  <a:schemeClr val="dk1"/>
+                </a:solidFill>
+              </a:rPr>
+              <a:t>Dataset:</a:t>
+            </a:r>
+            <a:r>
+              <a:rPr lang="en" sz="6344">
+                <a:solidFill>
+                  <a:schemeClr val="dk1"/>
+                </a:solidFill>
+              </a:rPr>
+              <a:t> King County House Sales</a:t>
+            </a:r>
+            <a:endParaRPr sz="6344">
               <a:solidFill>
                 <a:schemeClr val="dk1"/>
               </a:solidFill>
             </a:endParaRPr>
           </a:p>
           <a:p>
-            <a:pPr indent="-342900" lvl="0" marL="1371600" rtl="0" algn="l">
-              <a:lnSpc>
-                <a:spcPct val="115000"/>
-              </a:lnSpc>
-              <a:spcBef>
-                <a:spcPts val="0"/>
-              </a:spcBef>
-              <a:spcAft>
-                <a:spcPts val="0"/>
-              </a:spcAft>
-              <a:buClr>
-                <a:schemeClr val="dk1"/>
-              </a:buClr>
-              <a:buSzPts val="1800"/>
+            <a:pPr indent="-329304" lvl="0" marL="457200" rtl="0" algn="l">
+              <a:spcBef>
+                <a:spcPts val="1200"/>
+              </a:spcBef>
+              <a:spcAft>
+                <a:spcPts val="0"/>
+              </a:spcAft>
+              <a:buClr>
+                <a:schemeClr val="dk1"/>
+              </a:buClr>
+              <a:buSzPct val="100000"/>
               <a:buChar char="●"/>
             </a:pPr>
             <a:r>
-              <a:rPr lang="en" sz="1800">
-                <a:solidFill>
-                  <a:schemeClr val="dk1"/>
-                </a:solidFill>
-              </a:rPr>
-              <a:t>Target variable: </a:t>
-            </a:r>
-            <a:r>
-              <a:rPr lang="en" sz="1800">
+              <a:rPr b="1" lang="en" sz="6344">
+                <a:solidFill>
+                  <a:schemeClr val="dk1"/>
+                </a:solidFill>
+              </a:rPr>
+              <a:t>Total records:</a:t>
+            </a:r>
+            <a:r>
+              <a:rPr lang="en" sz="6344">
+                <a:solidFill>
+                  <a:schemeClr val="dk1"/>
+                </a:solidFill>
+              </a:rPr>
+              <a:t> 21,613 house sales</a:t>
+            </a:r>
+            <a:endParaRPr sz="6344">
+              <a:solidFill>
+                <a:schemeClr val="dk1"/>
+              </a:solidFill>
+            </a:endParaRPr>
+          </a:p>
+          <a:p>
+            <a:pPr indent="-329304" lvl="0" marL="457200" rtl="0" algn="l">
+              <a:spcBef>
+                <a:spcPts val="0"/>
+              </a:spcBef>
+              <a:spcAft>
+                <a:spcPts val="0"/>
+              </a:spcAft>
+              <a:buClr>
+                <a:schemeClr val="dk1"/>
+              </a:buClr>
+              <a:buSzPct val="100000"/>
+              <a:buChar char="●"/>
+            </a:pPr>
+            <a:r>
+              <a:rPr b="1" lang="en" sz="6344">
+                <a:solidFill>
+                  <a:schemeClr val="dk1"/>
+                </a:solidFill>
+              </a:rPr>
+              <a:t>Original columns:</a:t>
+            </a:r>
+            <a:r>
+              <a:rPr lang="en" sz="6344">
+                <a:solidFill>
+                  <a:schemeClr val="dk1"/>
+                </a:solidFill>
+              </a:rPr>
+              <a:t> 21</a:t>
+            </a:r>
+            <a:endParaRPr sz="6344">
+              <a:solidFill>
+                <a:schemeClr val="dk1"/>
+              </a:solidFill>
+            </a:endParaRPr>
+          </a:p>
+          <a:p>
+            <a:pPr indent="-329304" lvl="0" marL="457200" rtl="0" algn="l">
+              <a:spcBef>
+                <a:spcPts val="0"/>
+              </a:spcBef>
+              <a:spcAft>
+                <a:spcPts val="0"/>
+              </a:spcAft>
+              <a:buClr>
+                <a:schemeClr val="dk1"/>
+              </a:buClr>
+              <a:buSzPct val="100000"/>
+              <a:buChar char="●"/>
+            </a:pPr>
+            <a:r>
+              <a:rPr b="1" lang="en" sz="6344">
+                <a:solidFill>
+                  <a:schemeClr val="dk1"/>
+                </a:solidFill>
+              </a:rPr>
+              <a:t>Target variable:</a:t>
+            </a:r>
+            <a:r>
+              <a:rPr lang="en" sz="6344">
+                <a:solidFill>
+                  <a:schemeClr val="dk1"/>
+                </a:solidFill>
+              </a:rPr>
+              <a:t> </a:t>
+            </a:r>
+            <a:r>
+              <a:rPr lang="en" sz="6344">
                 <a:solidFill>
                   <a:srgbClr val="188038"/>
                 </a:solidFill>
@@ -6618,135 +8996,387 @@
               </a:rPr>
               <a:t>price</a:t>
             </a:r>
-            <a:r>
-              <a:rPr lang="en" sz="1800">
-                <a:solidFill>
-                  <a:schemeClr val="dk1"/>
-                </a:solidFill>
-              </a:rPr>
-              <a:t>.</a:t>
-            </a:r>
-            <a:endParaRPr sz="1800">
+            <a:endParaRPr sz="6344">
+              <a:solidFill>
+                <a:srgbClr val="188038"/>
+              </a:solidFill>
+              <a:latin typeface="Roboto Mono"/>
+              <a:ea typeface="Roboto Mono"/>
+              <a:cs typeface="Roboto Mono"/>
+              <a:sym typeface="Roboto Mono"/>
+            </a:endParaRPr>
+          </a:p>
+          <a:p>
+            <a:pPr indent="-329304" lvl="0" marL="457200" rtl="0" algn="l">
+              <a:spcBef>
+                <a:spcPts val="0"/>
+              </a:spcBef>
+              <a:spcAft>
+                <a:spcPts val="0"/>
+              </a:spcAft>
+              <a:buClr>
+                <a:schemeClr val="dk1"/>
+              </a:buClr>
+              <a:buSzPct val="100000"/>
+              <a:buChar char="●"/>
+            </a:pPr>
+            <a:r>
+              <a:rPr b="1" lang="en" sz="6344">
+                <a:solidFill>
+                  <a:schemeClr val="dk1"/>
+                </a:solidFill>
+              </a:rPr>
+              <a:t>Target unit:</a:t>
+            </a:r>
+            <a:r>
+              <a:rPr lang="en" sz="6344">
+                <a:solidFill>
+                  <a:schemeClr val="dk1"/>
+                </a:solidFill>
+              </a:rPr>
+              <a:t> US dollars (USD)</a:t>
+            </a:r>
+            <a:endParaRPr sz="6344">
               <a:solidFill>
                 <a:schemeClr val="dk1"/>
               </a:solidFill>
             </a:endParaRPr>
           </a:p>
           <a:p>
-            <a:pPr indent="-342900" lvl="0" marL="1371600" rtl="0" algn="l">
-              <a:lnSpc>
-                <a:spcPct val="115000"/>
-              </a:lnSpc>
-              <a:spcBef>
-                <a:spcPts val="0"/>
-              </a:spcBef>
-              <a:spcAft>
-                <a:spcPts val="0"/>
-              </a:spcAft>
-              <a:buClr>
-                <a:schemeClr val="dk1"/>
-              </a:buClr>
-              <a:buSzPts val="1800"/>
+            <a:pPr indent="-329304" lvl="0" marL="457200" rtl="0" algn="l">
+              <a:spcBef>
+                <a:spcPts val="0"/>
+              </a:spcBef>
+              <a:spcAft>
+                <a:spcPts val="0"/>
+              </a:spcAft>
+              <a:buClr>
+                <a:schemeClr val="dk1"/>
+              </a:buClr>
+              <a:buSzPct val="100000"/>
               <a:buChar char="●"/>
             </a:pPr>
             <a:r>
-              <a:rPr lang="en" sz="1800">
-                <a:solidFill>
-                  <a:schemeClr val="dk1"/>
-                </a:solidFill>
-              </a:rPr>
-              <a:t>House prices are strongly right-skewed.</a:t>
-            </a:r>
-            <a:endParaRPr sz="1800">
+              <a:rPr b="1" lang="en" sz="6344">
+                <a:solidFill>
+                  <a:schemeClr val="dk1"/>
+                </a:solidFill>
+              </a:rPr>
+              <a:t>Data types:</a:t>
+            </a:r>
+            <a:r>
+              <a:rPr lang="en" sz="6344">
+                <a:solidFill>
+                  <a:schemeClr val="dk1"/>
+                </a:solidFill>
+              </a:rPr>
+              <a:t> Numerical and categorical features</a:t>
+            </a:r>
+            <a:endParaRPr sz="6344">
               <a:solidFill>
                 <a:schemeClr val="dk1"/>
               </a:solidFill>
             </a:endParaRPr>
           </a:p>
           <a:p>
-            <a:pPr indent="-342900" lvl="0" marL="1371600" rtl="0" algn="l">
-              <a:lnSpc>
-                <a:spcPct val="115000"/>
-              </a:lnSpc>
-              <a:spcBef>
-                <a:spcPts val="0"/>
-              </a:spcBef>
-              <a:spcAft>
-                <a:spcPts val="0"/>
-              </a:spcAft>
-              <a:buClr>
-                <a:schemeClr val="dk1"/>
-              </a:buClr>
-              <a:buSzPts val="1800"/>
+            <a:pPr indent="-329304" lvl="0" marL="457200" rtl="0" algn="l">
+              <a:spcBef>
+                <a:spcPts val="0"/>
+              </a:spcBef>
+              <a:spcAft>
+                <a:spcPts val="0"/>
+              </a:spcAft>
+              <a:buClr>
+                <a:schemeClr val="dk1"/>
+              </a:buClr>
+              <a:buSzPct val="100000"/>
               <a:buChar char="●"/>
             </a:pPr>
             <a:r>
-              <a:rPr lang="en" sz="1800">
-                <a:solidFill>
-                  <a:schemeClr val="dk1"/>
-                </a:solidFill>
-              </a:rPr>
-              <a:t>Living area and property grade are strongly associated with price.</a:t>
-            </a:r>
-            <a:endParaRPr sz="1800">
+              <a:rPr b="1" lang="en" sz="6344">
+                <a:solidFill>
+                  <a:schemeClr val="dk1"/>
+                </a:solidFill>
+              </a:rPr>
+              <a:t>Geographical coverage:</a:t>
+            </a:r>
+            <a:r>
+              <a:rPr lang="en" sz="6344">
+                <a:solidFill>
+                  <a:schemeClr val="dk1"/>
+                </a:solidFill>
+              </a:rPr>
+              <a:t> King County, Washington, USA</a:t>
+            </a:r>
+            <a:endParaRPr sz="6344">
               <a:solidFill>
                 <a:schemeClr val="dk1"/>
               </a:solidFill>
             </a:endParaRPr>
           </a:p>
           <a:p>
-            <a:pPr indent="-342900" lvl="0" marL="1371600" rtl="0" algn="l">
-              <a:lnSpc>
-                <a:spcPct val="115000"/>
-              </a:lnSpc>
-              <a:spcBef>
-                <a:spcPts val="0"/>
-              </a:spcBef>
-              <a:spcAft>
-                <a:spcPts val="0"/>
-              </a:spcAft>
-              <a:buClr>
-                <a:schemeClr val="dk1"/>
-              </a:buClr>
-              <a:buSzPts val="1800"/>
-              <a:buChar char="●"/>
-            </a:pPr>
-            <a:r>
-              <a:rPr lang="en" sz="1800">
-                <a:solidFill>
-                  <a:schemeClr val="dk1"/>
-                </a:solidFill>
-              </a:rPr>
-              <a:t>An unusual 33-bedroom record was identified for investigation.</a:t>
-            </a:r>
-            <a:endParaRPr sz="1800">
+            <a:pPr indent="0" lvl="0" marL="0" rtl="0" algn="l">
+              <a:spcBef>
+                <a:spcPts val="1200"/>
+              </a:spcBef>
+              <a:spcAft>
+                <a:spcPts val="0"/>
+              </a:spcAft>
+              <a:buClr>
+                <a:schemeClr val="dk1"/>
+              </a:buClr>
+              <a:buSzPts val="275"/>
+              <a:buFont typeface="Arial"/>
+              <a:buNone/>
+            </a:pPr>
+            <a:r>
+              <a:rPr b="1" lang="en" sz="6344">
+                <a:solidFill>
+                  <a:schemeClr val="dk1"/>
+                </a:solidFill>
+              </a:rPr>
+              <a:t>Examples of key features</a:t>
+            </a:r>
+            <a:endParaRPr b="1" sz="6344">
               <a:solidFill>
                 <a:schemeClr val="dk1"/>
               </a:solidFill>
             </a:endParaRPr>
           </a:p>
           <a:p>
-            <a:pPr indent="0" lvl="0" marL="0" rtl="0" algn="ctr">
-              <a:lnSpc>
-                <a:spcPct val="115000"/>
-              </a:lnSpc>
+            <a:pPr indent="-329304" lvl="0" marL="457200" rtl="0" algn="l">
               <a:spcBef>
                 <a:spcPts val="1200"/>
               </a:spcBef>
               <a:spcAft>
-                <a:spcPts val="1200"/>
-              </a:spcAft>
-              <a:buSzPts val="523"/>
-              <a:buNone/>
-            </a:pPr>
-            <a:r>
-              <a:t/>
-            </a:r>
-            <a:endParaRPr sz="1600">
+                <a:spcPts val="0"/>
+              </a:spcAft>
+              <a:buClr>
+                <a:schemeClr val="dk1"/>
+              </a:buClr>
+              <a:buSzPct val="100000"/>
+              <a:buChar char="●"/>
+            </a:pPr>
+            <a:r>
+              <a:rPr lang="en" sz="6344">
+                <a:solidFill>
+                  <a:schemeClr val="dk1"/>
+                </a:solidFill>
+              </a:rPr>
+              <a:t>Living area (</a:t>
+            </a:r>
+            <a:r>
+              <a:rPr lang="en" sz="6344">
+                <a:solidFill>
+                  <a:srgbClr val="188038"/>
+                </a:solidFill>
+                <a:latin typeface="Roboto Mono"/>
+                <a:ea typeface="Roboto Mono"/>
+                <a:cs typeface="Roboto Mono"/>
+                <a:sym typeface="Roboto Mono"/>
+              </a:rPr>
+              <a:t>sqft_living</a:t>
+            </a:r>
+            <a:r>
+              <a:rPr lang="en" sz="6344">
+                <a:solidFill>
+                  <a:schemeClr val="dk1"/>
+                </a:solidFill>
+              </a:rPr>
+              <a:t>)</a:t>
+            </a:r>
+            <a:endParaRPr sz="6344">
               <a:solidFill>
                 <a:schemeClr val="dk1"/>
               </a:solidFill>
             </a:endParaRPr>
+          </a:p>
+          <a:p>
+            <a:pPr indent="-329304" lvl="0" marL="457200" rtl="0" algn="l">
+              <a:spcBef>
+                <a:spcPts val="0"/>
+              </a:spcBef>
+              <a:spcAft>
+                <a:spcPts val="0"/>
+              </a:spcAft>
+              <a:buClr>
+                <a:schemeClr val="dk1"/>
+              </a:buClr>
+              <a:buSzPct val="100000"/>
+              <a:buChar char="●"/>
+            </a:pPr>
+            <a:r>
+              <a:rPr lang="en" sz="6344">
+                <a:solidFill>
+                  <a:schemeClr val="dk1"/>
+                </a:solidFill>
+              </a:rPr>
+              <a:t>Bedrooms and bathrooms</a:t>
+            </a:r>
+            <a:endParaRPr sz="6344">
+              <a:solidFill>
+                <a:schemeClr val="dk1"/>
+              </a:solidFill>
+            </a:endParaRPr>
+          </a:p>
+          <a:p>
+            <a:pPr indent="-329304" lvl="0" marL="457200" rtl="0" algn="l">
+              <a:spcBef>
+                <a:spcPts val="0"/>
+              </a:spcBef>
+              <a:spcAft>
+                <a:spcPts val="0"/>
+              </a:spcAft>
+              <a:buClr>
+                <a:schemeClr val="dk1"/>
+              </a:buClr>
+              <a:buSzPct val="100000"/>
+              <a:buChar char="●"/>
+            </a:pPr>
+            <a:r>
+              <a:rPr lang="en" sz="6344">
+                <a:solidFill>
+                  <a:schemeClr val="dk1"/>
+                </a:solidFill>
+              </a:rPr>
+              <a:t>Property grade (</a:t>
+            </a:r>
+            <a:r>
+              <a:rPr lang="en" sz="6344">
+                <a:solidFill>
+                  <a:srgbClr val="188038"/>
+                </a:solidFill>
+                <a:latin typeface="Roboto Mono"/>
+                <a:ea typeface="Roboto Mono"/>
+                <a:cs typeface="Roboto Mono"/>
+                <a:sym typeface="Roboto Mono"/>
+              </a:rPr>
+              <a:t>grade</a:t>
+            </a:r>
+            <a:r>
+              <a:rPr lang="en" sz="6344">
+                <a:solidFill>
+                  <a:schemeClr val="dk1"/>
+                </a:solidFill>
+              </a:rPr>
+              <a:t>)</a:t>
+            </a:r>
+            <a:endParaRPr sz="6344">
+              <a:solidFill>
+                <a:schemeClr val="dk1"/>
+              </a:solidFill>
+            </a:endParaRPr>
+          </a:p>
+          <a:p>
+            <a:pPr indent="-329304" lvl="0" marL="457200" rtl="0" algn="l">
+              <a:spcBef>
+                <a:spcPts val="0"/>
+              </a:spcBef>
+              <a:spcAft>
+                <a:spcPts val="0"/>
+              </a:spcAft>
+              <a:buClr>
+                <a:schemeClr val="dk1"/>
+              </a:buClr>
+              <a:buSzPct val="100000"/>
+              <a:buChar char="●"/>
+            </a:pPr>
+            <a:r>
+              <a:rPr lang="en" sz="6344">
+                <a:solidFill>
+                  <a:schemeClr val="dk1"/>
+                </a:solidFill>
+              </a:rPr>
+              <a:t>Location (</a:t>
+            </a:r>
+            <a:r>
+              <a:rPr lang="en" sz="6344">
+                <a:solidFill>
+                  <a:srgbClr val="188038"/>
+                </a:solidFill>
+                <a:latin typeface="Roboto Mono"/>
+                <a:ea typeface="Roboto Mono"/>
+                <a:cs typeface="Roboto Mono"/>
+                <a:sym typeface="Roboto Mono"/>
+              </a:rPr>
+              <a:t>zipcode</a:t>
+            </a:r>
+            <a:r>
+              <a:rPr lang="en" sz="6344">
+                <a:solidFill>
+                  <a:schemeClr val="dk1"/>
+                </a:solidFill>
+              </a:rPr>
+              <a:t>)</a:t>
+            </a:r>
+            <a:endParaRPr sz="6344">
+              <a:solidFill>
+                <a:schemeClr val="dk1"/>
+              </a:solidFill>
+            </a:endParaRPr>
+          </a:p>
+          <a:p>
+            <a:pPr indent="-329304" lvl="0" marL="457200" rtl="0" algn="l">
+              <a:spcBef>
+                <a:spcPts val="0"/>
+              </a:spcBef>
+              <a:spcAft>
+                <a:spcPts val="0"/>
+              </a:spcAft>
+              <a:buClr>
+                <a:schemeClr val="dk1"/>
+              </a:buClr>
+              <a:buSzPct val="100000"/>
+              <a:buChar char="●"/>
+            </a:pPr>
+            <a:r>
+              <a:rPr lang="en" sz="6344">
+                <a:solidFill>
+                  <a:schemeClr val="dk1"/>
+                </a:solidFill>
+              </a:rPr>
+              <a:t>Sale date (</a:t>
+            </a:r>
+            <a:r>
+              <a:rPr lang="en" sz="6344">
+                <a:solidFill>
+                  <a:srgbClr val="188038"/>
+                </a:solidFill>
+                <a:latin typeface="Roboto Mono"/>
+                <a:ea typeface="Roboto Mono"/>
+                <a:cs typeface="Roboto Mono"/>
+                <a:sym typeface="Roboto Mono"/>
+              </a:rPr>
+              <a:t>date</a:t>
+            </a:r>
+            <a:r>
+              <a:rPr lang="en" sz="6344">
+                <a:solidFill>
+                  <a:schemeClr val="dk1"/>
+                </a:solidFill>
+              </a:rPr>
+              <a:t>)</a:t>
+            </a:r>
+            <a:endParaRPr sz="6344">
+              <a:solidFill>
+                <a:schemeClr val="dk1"/>
+              </a:solidFill>
+            </a:endParaRPr>
+          </a:p>
+          <a:p>
+            <a:pPr indent="0" lvl="0" marL="0" rtl="0" algn="l">
+              <a:spcBef>
+                <a:spcPts val="1200"/>
+              </a:spcBef>
+              <a:spcAft>
+                <a:spcPts val="1200"/>
+              </a:spcAft>
+              <a:buNone/>
+            </a:pPr>
+            <a:r>
+              <a:t/>
+            </a:r>
+            <a:endParaRPr/>
           </a:p>
         </p:txBody>
       </p:sp>
@@ -6780,52 +9410,13 @@
           <p:cNvPr id="72" name="Google Shape;72;p16"/>
           <p:cNvSpPr txBox="1"/>
           <p:nvPr>
-            <p:ph type="ctrTitle"/>
+            <p:ph type="title"/>
           </p:nvPr>
         </p:nvSpPr>
         <p:spPr>
           <a:xfrm>
-            <a:off x="311708" y="744575"/>
-            <a:ext cx="8520600" cy="2052600"/>
-          </a:xfrm>
-          <a:prstGeom prst="rect">
-            <a:avLst/>
-          </a:prstGeom>
-        </p:spPr>
-        <p:txBody>
-          <a:bodyPr anchorCtr="0" anchor="b" bIns="91425" lIns="91425" spcFirstLastPara="1" rIns="91425" wrap="square" tIns="91425">
-            <a:normAutofit/>
-          </a:bodyPr>
-          <a:lstStyle/>
-          <a:p>
-            <a:pPr indent="0" lvl="0" marL="0" rtl="0" algn="ctr">
-              <a:spcBef>
-                <a:spcPts val="0"/>
-              </a:spcBef>
-              <a:spcAft>
-                <a:spcPts val="0"/>
-              </a:spcAft>
-              <a:buNone/>
-            </a:pPr>
-            <a:r>
-              <a:t/>
-            </a:r>
-            <a:endParaRPr/>
-          </a:p>
-        </p:txBody>
-      </p:sp>
-      <p:sp>
-        <p:nvSpPr>
-          <p:cNvPr id="73" name="Google Shape;73;p16"/>
-          <p:cNvSpPr txBox="1"/>
-          <p:nvPr>
-            <p:ph idx="1" type="subTitle"/>
-          </p:nvPr>
-        </p:nvSpPr>
-        <p:spPr>
-          <a:xfrm>
-            <a:off x="311700" y="2834125"/>
-            <a:ext cx="8520600" cy="792600"/>
+            <a:off x="311700" y="445025"/>
+            <a:ext cx="8520600" cy="572700"/>
           </a:xfrm>
           <a:prstGeom prst="rect">
             <a:avLst/>
@@ -6837,50 +9428,444 @@
           </a:bodyPr>
           <a:lstStyle/>
           <a:p>
-            <a:pPr indent="0" lvl="0" marL="0" rtl="0" algn="ctr">
-              <a:spcBef>
-                <a:spcPts val="0"/>
-              </a:spcBef>
-              <a:spcAft>
-                <a:spcPts val="0"/>
-              </a:spcAft>
-              <a:buNone/>
-            </a:pPr>
-            <a:r>
-              <a:t/>
+            <a:pPr indent="0" lvl="0" marL="0" rtl="0" algn="l">
+              <a:lnSpc>
+                <a:spcPct val="115000"/>
+              </a:lnSpc>
+              <a:spcBef>
+                <a:spcPts val="2400"/>
+              </a:spcBef>
+              <a:spcAft>
+                <a:spcPts val="600"/>
+              </a:spcAft>
+              <a:buClr>
+                <a:schemeClr val="dk1"/>
+              </a:buClr>
+              <a:buSzPts val="1100"/>
+              <a:buFont typeface="Arial"/>
+              <a:buNone/>
+            </a:pPr>
+            <a:r>
+              <a:rPr b="1" lang="en" sz="2300"/>
+              <a:t>Data Cleaning and Preparation</a:t>
             </a:r>
             <a:endParaRPr/>
           </a:p>
         </p:txBody>
       </p:sp>
-      <p:pic>
-        <p:nvPicPr>
-          <p:cNvPr id="74" name="Google Shape;74;p16" title="histograph.png"/>
-          <p:cNvPicPr preferRelativeResize="0"/>
-          <p:nvPr/>
-        </p:nvPicPr>
-        <p:blipFill>
-          <a:blip r:embed="rId3">
-            <a:alphaModFix/>
-          </a:blip>
-          <a:stretch>
-            <a:fillRect/>
-          </a:stretch>
-        </p:blipFill>
+      <p:sp>
+        <p:nvSpPr>
+          <p:cNvPr id="73" name="Google Shape;73;p16"/>
+          <p:cNvSpPr txBox="1"/>
+          <p:nvPr>
+            <p:ph idx="1" type="body"/>
+          </p:nvPr>
+        </p:nvSpPr>
         <p:spPr>
           <a:xfrm>
-            <a:off x="0" y="308841"/>
-            <a:ext cx="9143999" cy="4525818"/>
+            <a:off x="311700" y="1152475"/>
+            <a:ext cx="8520600" cy="3416400"/>
           </a:xfrm>
           <a:prstGeom prst="rect">
             <a:avLst/>
           </a:prstGeom>
-          <a:noFill/>
-          <a:ln>
-            <a:noFill/>
-          </a:ln>
         </p:spPr>
-      </p:pic>
+        <p:txBody>
+          <a:bodyPr anchorCtr="0" anchor="t" bIns="91425" lIns="91425" spcFirstLastPara="1" rIns="91425" wrap="square" tIns="91425">
+            <a:normAutofit fontScale="25000" lnSpcReduction="20000"/>
+          </a:bodyPr>
+          <a:lstStyle/>
+          <a:p>
+            <a:pPr indent="0" lvl="0" marL="0" rtl="0" algn="l">
+              <a:spcBef>
+                <a:spcPts val="2400"/>
+              </a:spcBef>
+              <a:spcAft>
+                <a:spcPts val="0"/>
+              </a:spcAft>
+              <a:buClr>
+                <a:schemeClr val="dk1"/>
+              </a:buClr>
+              <a:buSzPts val="275"/>
+              <a:buFont typeface="Arial"/>
+              <a:buNone/>
+            </a:pPr>
+            <a:r>
+              <a:t/>
+            </a:r>
+            <a:endParaRPr b="1" sz="7554">
+              <a:solidFill>
+                <a:schemeClr val="dk1"/>
+              </a:solidFill>
+            </a:endParaRPr>
+          </a:p>
+          <a:p>
+            <a:pPr indent="0" lvl="0" marL="0" rtl="0" algn="l">
+              <a:spcBef>
+                <a:spcPts val="1200"/>
+              </a:spcBef>
+              <a:spcAft>
+                <a:spcPts val="0"/>
+              </a:spcAft>
+              <a:buClr>
+                <a:schemeClr val="dk1"/>
+              </a:buClr>
+              <a:buSzPts val="275"/>
+              <a:buFont typeface="Arial"/>
+              <a:buNone/>
+            </a:pPr>
+            <a:r>
+              <a:rPr b="1" lang="en" sz="6354">
+                <a:solidFill>
+                  <a:schemeClr val="dk1"/>
+                </a:solidFill>
+              </a:rPr>
+              <a:t>Data quality checks</a:t>
+            </a:r>
+            <a:endParaRPr b="1" sz="6354">
+              <a:solidFill>
+                <a:schemeClr val="dk1"/>
+              </a:solidFill>
+            </a:endParaRPr>
+          </a:p>
+          <a:p>
+            <a:pPr indent="-329477" lvl="0" marL="457200" rtl="0" algn="l">
+              <a:spcBef>
+                <a:spcPts val="1200"/>
+              </a:spcBef>
+              <a:spcAft>
+                <a:spcPts val="0"/>
+              </a:spcAft>
+              <a:buClr>
+                <a:schemeClr val="dk1"/>
+              </a:buClr>
+              <a:buSzPct val="100000"/>
+              <a:buChar char="●"/>
+            </a:pPr>
+            <a:r>
+              <a:rPr lang="en" sz="6354">
+                <a:solidFill>
+                  <a:schemeClr val="dk1"/>
+                </a:solidFill>
+              </a:rPr>
+              <a:t>Checked for missing values and exact duplicate rows.</a:t>
+            </a:r>
+            <a:endParaRPr sz="6354">
+              <a:solidFill>
+                <a:schemeClr val="dk1"/>
+              </a:solidFill>
+            </a:endParaRPr>
+          </a:p>
+          <a:p>
+            <a:pPr indent="-329477" lvl="0" marL="457200" rtl="0" algn="l">
+              <a:spcBef>
+                <a:spcPts val="0"/>
+              </a:spcBef>
+              <a:spcAft>
+                <a:spcPts val="0"/>
+              </a:spcAft>
+              <a:buClr>
+                <a:schemeClr val="dk1"/>
+              </a:buClr>
+              <a:buSzPct val="100000"/>
+              <a:buChar char="●"/>
+            </a:pPr>
+            <a:r>
+              <a:rPr lang="en" sz="6354">
+                <a:solidFill>
+                  <a:schemeClr val="dk1"/>
+                </a:solidFill>
+              </a:rPr>
+              <a:t>Investigated repeated property IDs to reduce data leakage.</a:t>
+            </a:r>
+            <a:endParaRPr sz="6354">
+              <a:solidFill>
+                <a:schemeClr val="dk1"/>
+              </a:solidFill>
+            </a:endParaRPr>
+          </a:p>
+          <a:p>
+            <a:pPr indent="-329477" lvl="0" marL="457200" rtl="0" algn="l">
+              <a:spcBef>
+                <a:spcPts val="0"/>
+              </a:spcBef>
+              <a:spcAft>
+                <a:spcPts val="0"/>
+              </a:spcAft>
+              <a:buClr>
+                <a:schemeClr val="dk1"/>
+              </a:buClr>
+              <a:buSzPct val="100000"/>
+              <a:buChar char="●"/>
+            </a:pPr>
+            <a:r>
+              <a:rPr lang="en" sz="6354">
+                <a:solidFill>
+                  <a:schemeClr val="dk1"/>
+                </a:solidFill>
+              </a:rPr>
+              <a:t>Identified unusual values, including properties with zero bedrooms or bathrooms.</a:t>
+            </a:r>
+            <a:endParaRPr sz="6354">
+              <a:solidFill>
+                <a:schemeClr val="dk1"/>
+              </a:solidFill>
+            </a:endParaRPr>
+          </a:p>
+          <a:p>
+            <a:pPr indent="-329477" lvl="0" marL="457200" rtl="0" algn="l">
+              <a:spcBef>
+                <a:spcPts val="0"/>
+              </a:spcBef>
+              <a:spcAft>
+                <a:spcPts val="0"/>
+              </a:spcAft>
+              <a:buClr>
+                <a:schemeClr val="dk1"/>
+              </a:buClr>
+              <a:buSzPct val="100000"/>
+              <a:buChar char="●"/>
+            </a:pPr>
+            <a:r>
+              <a:rPr lang="en" sz="6354">
+                <a:solidFill>
+                  <a:schemeClr val="dk1"/>
+                </a:solidFill>
+              </a:rPr>
+              <a:t>Investigated an unusual 33-bedroom record rather than removing it automatically.</a:t>
+            </a:r>
+            <a:endParaRPr sz="6354">
+              <a:solidFill>
+                <a:schemeClr val="dk1"/>
+              </a:solidFill>
+            </a:endParaRPr>
+          </a:p>
+          <a:p>
+            <a:pPr indent="0" lvl="0" marL="0" rtl="0" algn="l">
+              <a:spcBef>
+                <a:spcPts val="1200"/>
+              </a:spcBef>
+              <a:spcAft>
+                <a:spcPts val="0"/>
+              </a:spcAft>
+              <a:buClr>
+                <a:schemeClr val="dk1"/>
+              </a:buClr>
+              <a:buSzPts val="275"/>
+              <a:buFont typeface="Arial"/>
+              <a:buNone/>
+            </a:pPr>
+            <a:r>
+              <a:rPr b="1" lang="en" sz="6354">
+                <a:solidFill>
+                  <a:schemeClr val="dk1"/>
+                </a:solidFill>
+              </a:rPr>
+              <a:t>Preparation for modelling</a:t>
+            </a:r>
+            <a:endParaRPr b="1" sz="6354">
+              <a:solidFill>
+                <a:schemeClr val="dk1"/>
+              </a:solidFill>
+            </a:endParaRPr>
+          </a:p>
+          <a:p>
+            <a:pPr indent="-329477" lvl="0" marL="457200" rtl="0" algn="l">
+              <a:spcBef>
+                <a:spcPts val="1200"/>
+              </a:spcBef>
+              <a:spcAft>
+                <a:spcPts val="0"/>
+              </a:spcAft>
+              <a:buClr>
+                <a:schemeClr val="dk1"/>
+              </a:buClr>
+              <a:buSzPct val="100000"/>
+              <a:buChar char="●"/>
+            </a:pPr>
+            <a:r>
+              <a:rPr lang="en" sz="6354">
+                <a:solidFill>
+                  <a:schemeClr val="dk1"/>
+                </a:solidFill>
+              </a:rPr>
+              <a:t>Converted the sale date into a datetime format.</a:t>
+            </a:r>
+            <a:endParaRPr sz="6354">
+              <a:solidFill>
+                <a:schemeClr val="dk1"/>
+              </a:solidFill>
+            </a:endParaRPr>
+          </a:p>
+          <a:p>
+            <a:pPr indent="-329477" lvl="0" marL="457200" rtl="0" algn="l">
+              <a:spcBef>
+                <a:spcPts val="0"/>
+              </a:spcBef>
+              <a:spcAft>
+                <a:spcPts val="0"/>
+              </a:spcAft>
+              <a:buClr>
+                <a:schemeClr val="dk1"/>
+              </a:buClr>
+              <a:buSzPct val="100000"/>
+              <a:buChar char="●"/>
+            </a:pPr>
+            <a:r>
+              <a:rPr lang="en" sz="6354">
+                <a:solidFill>
+                  <a:schemeClr val="dk1"/>
+                </a:solidFill>
+              </a:rPr>
+              <a:t>Created additional features: </a:t>
+            </a:r>
+            <a:r>
+              <a:rPr lang="en" sz="6354">
+                <a:solidFill>
+                  <a:srgbClr val="188038"/>
+                </a:solidFill>
+                <a:latin typeface="Roboto Mono"/>
+                <a:ea typeface="Roboto Mono"/>
+                <a:cs typeface="Roboto Mono"/>
+                <a:sym typeface="Roboto Mono"/>
+              </a:rPr>
+              <a:t>sale_year</a:t>
+            </a:r>
+            <a:r>
+              <a:rPr lang="en" sz="6354">
+                <a:solidFill>
+                  <a:schemeClr val="dk1"/>
+                </a:solidFill>
+              </a:rPr>
+              <a:t> and </a:t>
+            </a:r>
+            <a:r>
+              <a:rPr lang="en" sz="6354">
+                <a:solidFill>
+                  <a:srgbClr val="188038"/>
+                </a:solidFill>
+                <a:latin typeface="Roboto Mono"/>
+                <a:ea typeface="Roboto Mono"/>
+                <a:cs typeface="Roboto Mono"/>
+                <a:sym typeface="Roboto Mono"/>
+              </a:rPr>
+              <a:t>sale_month</a:t>
+            </a:r>
+            <a:r>
+              <a:rPr lang="en" sz="6354">
+                <a:solidFill>
+                  <a:schemeClr val="dk1"/>
+                </a:solidFill>
+              </a:rPr>
+              <a:t>.</a:t>
+            </a:r>
+            <a:endParaRPr sz="6354">
+              <a:solidFill>
+                <a:schemeClr val="dk1"/>
+              </a:solidFill>
+            </a:endParaRPr>
+          </a:p>
+          <a:p>
+            <a:pPr indent="-329477" lvl="0" marL="457200" rtl="0" algn="l">
+              <a:spcBef>
+                <a:spcPts val="0"/>
+              </a:spcBef>
+              <a:spcAft>
+                <a:spcPts val="0"/>
+              </a:spcAft>
+              <a:buClr>
+                <a:schemeClr val="dk1"/>
+              </a:buClr>
+              <a:buSzPct val="100000"/>
+              <a:buChar char="●"/>
+            </a:pPr>
+            <a:r>
+              <a:rPr lang="en" sz="6354">
+                <a:solidFill>
+                  <a:schemeClr val="dk1"/>
+                </a:solidFill>
+              </a:rPr>
+              <a:t>Treated zero bedroom and bathroom counts as missing values for modelling.</a:t>
+            </a:r>
+            <a:endParaRPr sz="6354">
+              <a:solidFill>
+                <a:schemeClr val="dk1"/>
+              </a:solidFill>
+            </a:endParaRPr>
+          </a:p>
+          <a:p>
+            <a:pPr indent="-329477" lvl="0" marL="457200" rtl="0" algn="l">
+              <a:spcBef>
+                <a:spcPts val="0"/>
+              </a:spcBef>
+              <a:spcAft>
+                <a:spcPts val="0"/>
+              </a:spcAft>
+              <a:buClr>
+                <a:schemeClr val="dk1"/>
+              </a:buClr>
+              <a:buSzPct val="100000"/>
+              <a:buChar char="●"/>
+            </a:pPr>
+            <a:r>
+              <a:rPr lang="en" sz="6354">
+                <a:solidFill>
+                  <a:schemeClr val="dk1"/>
+                </a:solidFill>
+              </a:rPr>
+              <a:t>Used median imputation for numerical features.</a:t>
+            </a:r>
+            <a:endParaRPr sz="6354">
+              <a:solidFill>
+                <a:schemeClr val="dk1"/>
+              </a:solidFill>
+            </a:endParaRPr>
+          </a:p>
+          <a:p>
+            <a:pPr indent="-329477" lvl="0" marL="457200" rtl="0" algn="l">
+              <a:spcBef>
+                <a:spcPts val="0"/>
+              </a:spcBef>
+              <a:spcAft>
+                <a:spcPts val="0"/>
+              </a:spcAft>
+              <a:buClr>
+                <a:schemeClr val="dk1"/>
+              </a:buClr>
+              <a:buSzPct val="100000"/>
+              <a:buChar char="●"/>
+            </a:pPr>
+            <a:r>
+              <a:rPr lang="en" sz="6354">
+                <a:solidFill>
+                  <a:schemeClr val="dk1"/>
+                </a:solidFill>
+              </a:rPr>
+              <a:t>Encoded ZIP codes using OneHotEncoder.</a:t>
+            </a:r>
+            <a:endParaRPr sz="6354">
+              <a:solidFill>
+                <a:schemeClr val="dk1"/>
+              </a:solidFill>
+            </a:endParaRPr>
+          </a:p>
+          <a:p>
+            <a:pPr indent="0" lvl="0" marL="0" rtl="0" algn="l">
+              <a:spcBef>
+                <a:spcPts val="1200"/>
+              </a:spcBef>
+              <a:spcAft>
+                <a:spcPts val="1200"/>
+              </a:spcAft>
+              <a:buNone/>
+            </a:pPr>
+            <a:r>
+              <a:t/>
+            </a:r>
+            <a:endParaRPr/>
+          </a:p>
+        </p:txBody>
+      </p:sp>
     </p:spTree>
   </p:cSld>
   <p:clrMapOvr>
@@ -6894,7 +9879,7 @@
   <p:cSld>
     <p:spTree>
       <p:nvGrpSpPr>
-        <p:cNvPr id="78" name="Shape 78"/>
+        <p:cNvPr id="77" name="Shape 77"/>
         <p:cNvGrpSpPr/>
         <p:nvPr/>
       </p:nvGrpSpPr>
@@ -6908,56 +9893,16 @@
       </p:grpSpPr>
       <p:sp>
         <p:nvSpPr>
-          <p:cNvPr id="79" name="Google Shape;79;p17"/>
+          <p:cNvPr id="78" name="Google Shape;78;p17"/>
           <p:cNvSpPr txBox="1"/>
           <p:nvPr>
-            <p:ph type="ctrTitle"/>
+            <p:ph type="title"/>
           </p:nvPr>
         </p:nvSpPr>
         <p:spPr>
           <a:xfrm>
-            <a:off x="311708" y="744575"/>
-            <a:ext cx="8520600" cy="2052600"/>
-          </a:xfrm>
-          <a:prstGeom prst="rect">
-            <a:avLst/>
-          </a:prstGeom>
-        </p:spPr>
-        <p:txBody>
-          <a:bodyPr anchorCtr="0" anchor="b" bIns="91425" lIns="91425" spcFirstLastPara="1" rIns="91425" wrap="square" tIns="91425">
-            <a:normAutofit/>
-          </a:bodyPr>
-          <a:lstStyle/>
-          <a:p>
-            <a:pPr indent="0" lvl="0" marL="0" rtl="0" algn="ctr">
-              <a:spcBef>
-                <a:spcPts val="0"/>
-              </a:spcBef>
-              <a:spcAft>
-                <a:spcPts val="0"/>
-              </a:spcAft>
-              <a:buNone/>
-            </a:pPr>
-            <a:r>
-              <a:rPr lang="en"/>
-              <a:t>Prepare the data</a:t>
-            </a:r>
-            <a:endParaRPr/>
-          </a:p>
-        </p:txBody>
-      </p:sp>
-      <p:sp>
-        <p:nvSpPr>
-          <p:cNvPr id="80" name="Google Shape;80;p17"/>
-          <p:cNvSpPr txBox="1"/>
-          <p:nvPr>
-            <p:ph idx="1" type="subTitle"/>
-          </p:nvPr>
-        </p:nvSpPr>
-        <p:spPr>
-          <a:xfrm>
-            <a:off x="311700" y="2834125"/>
-            <a:ext cx="8520600" cy="615600"/>
+            <a:off x="311700" y="445025"/>
+            <a:ext cx="8520600" cy="572700"/>
           </a:xfrm>
           <a:prstGeom prst="rect">
             <a:avLst/>
@@ -6965,143 +9910,489 @@
         </p:spPr>
         <p:txBody>
           <a:bodyPr anchorCtr="0" anchor="t" bIns="91425" lIns="91425" spcFirstLastPara="1" rIns="91425" wrap="square" tIns="91425">
-            <a:noAutofit/>
+            <a:normAutofit/>
           </a:bodyPr>
           <a:lstStyle/>
           <a:p>
-            <a:pPr indent="-342900" lvl="0" marL="457200" rtl="0" algn="l">
+            <a:pPr indent="0" lvl="0" marL="0" rtl="0" algn="ctr">
               <a:lnSpc>
                 <a:spcPct val="115000"/>
               </a:lnSpc>
               <a:spcBef>
+                <a:spcPts val="2400"/>
+              </a:spcBef>
+              <a:spcAft>
+                <a:spcPts val="600"/>
+              </a:spcAft>
+              <a:buClr>
+                <a:schemeClr val="dk1"/>
+              </a:buClr>
+              <a:buSzPts val="1100"/>
+              <a:buFont typeface="Arial"/>
+              <a:buNone/>
+            </a:pPr>
+            <a:r>
+              <a:rPr b="1" lang="en" sz="2300"/>
+              <a:t>Modelling Approach</a:t>
+            </a:r>
+            <a:endParaRPr/>
+          </a:p>
+        </p:txBody>
+      </p:sp>
+      <p:sp>
+        <p:nvSpPr>
+          <p:cNvPr id="79" name="Google Shape;79;p17"/>
+          <p:cNvSpPr txBox="1"/>
+          <p:nvPr>
+            <p:ph idx="1" type="body"/>
+          </p:nvPr>
+        </p:nvSpPr>
+        <p:spPr>
+          <a:xfrm>
+            <a:off x="311700" y="1017725"/>
+            <a:ext cx="8520600" cy="3551100"/>
+          </a:xfrm>
+          <a:prstGeom prst="rect">
+            <a:avLst/>
+          </a:prstGeom>
+        </p:spPr>
+        <p:txBody>
+          <a:bodyPr anchorCtr="0" anchor="t" bIns="91425" lIns="91425" spcFirstLastPara="1" rIns="91425" wrap="square" tIns="91425">
+            <a:normAutofit fontScale="25000" lnSpcReduction="20000"/>
+          </a:bodyPr>
+          <a:lstStyle/>
+          <a:p>
+            <a:pPr indent="0" lvl="0" marL="0" rtl="0" algn="l">
+              <a:spcBef>
+                <a:spcPts val="2400"/>
+              </a:spcBef>
+              <a:spcAft>
+                <a:spcPts val="0"/>
+              </a:spcAft>
+              <a:buClr>
+                <a:schemeClr val="dk1"/>
+              </a:buClr>
+              <a:buSzPct val="47826"/>
+              <a:buFont typeface="Arial"/>
+              <a:buNone/>
+            </a:pPr>
+            <a:r>
+              <a:t/>
+            </a:r>
+            <a:endParaRPr b="1" sz="2300">
+              <a:solidFill>
+                <a:schemeClr val="dk1"/>
+              </a:solidFill>
+            </a:endParaRPr>
+          </a:p>
+          <a:p>
+            <a:pPr indent="0" lvl="0" marL="0" rtl="0" algn="l">
+              <a:spcBef>
                 <a:spcPts val="1200"/>
               </a:spcBef>
               <a:spcAft>
                 <a:spcPts val="0"/>
               </a:spcAft>
-              <a:buSzPts val="1800"/>
+              <a:buClr>
+                <a:schemeClr val="dk1"/>
+              </a:buClr>
+              <a:buSzPts val="275"/>
+              <a:buFont typeface="Arial"/>
+              <a:buNone/>
+            </a:pPr>
+            <a:r>
+              <a:rPr b="1" lang="en" sz="6243">
+                <a:solidFill>
+                  <a:schemeClr val="dk1"/>
+                </a:solidFill>
+              </a:rPr>
+              <a:t>Workflow</a:t>
+            </a:r>
+            <a:endParaRPr b="1" sz="6243">
+              <a:solidFill>
+                <a:schemeClr val="dk1"/>
+              </a:solidFill>
+            </a:endParaRPr>
+          </a:p>
+          <a:p>
+            <a:pPr indent="-327709" lvl="0" marL="457200" rtl="0" algn="l">
+              <a:spcBef>
+                <a:spcPts val="1200"/>
+              </a:spcBef>
+              <a:spcAft>
+                <a:spcPts val="0"/>
+              </a:spcAft>
+              <a:buClr>
+                <a:schemeClr val="dk1"/>
+              </a:buClr>
+              <a:buSzPct val="100000"/>
+              <a:buAutoNum type="arabicPeriod"/>
+            </a:pPr>
+            <a:r>
+              <a:rPr b="1" lang="en" sz="6243">
+                <a:solidFill>
+                  <a:schemeClr val="dk1"/>
+                </a:solidFill>
+              </a:rPr>
+              <a:t>Load the data</a:t>
+            </a:r>
+            <a:r>
+              <a:rPr lang="en" sz="6243">
+                <a:solidFill>
+                  <a:schemeClr val="dk1"/>
+                </a:solidFill>
+              </a:rPr>
+              <a:t> — Import the King County house sales dataset.</a:t>
+            </a:r>
+            <a:endParaRPr sz="6243">
+              <a:solidFill>
+                <a:schemeClr val="dk1"/>
+              </a:solidFill>
+            </a:endParaRPr>
+          </a:p>
+          <a:p>
+            <a:pPr indent="-327709" lvl="0" marL="457200" rtl="0" algn="l">
+              <a:spcBef>
+                <a:spcPts val="0"/>
+              </a:spcBef>
+              <a:spcAft>
+                <a:spcPts val="0"/>
+              </a:spcAft>
+              <a:buClr>
+                <a:schemeClr val="dk1"/>
+              </a:buClr>
+              <a:buSzPct val="100000"/>
+              <a:buAutoNum type="arabicPeriod"/>
+            </a:pPr>
+            <a:r>
+              <a:rPr b="1" lang="en" sz="6243">
+                <a:solidFill>
+                  <a:schemeClr val="dk1"/>
+                </a:solidFill>
+              </a:rPr>
+              <a:t>Explore and clean</a:t>
+            </a:r>
+            <a:r>
+              <a:rPr lang="en" sz="6243">
+                <a:solidFill>
+                  <a:schemeClr val="dk1"/>
+                </a:solidFill>
+              </a:rPr>
+              <a:t> — Check data quality and investigate unusual values.</a:t>
+            </a:r>
+            <a:endParaRPr sz="6243">
+              <a:solidFill>
+                <a:schemeClr val="dk1"/>
+              </a:solidFill>
+            </a:endParaRPr>
+          </a:p>
+          <a:p>
+            <a:pPr indent="-327709" lvl="0" marL="457200" rtl="0" algn="l">
+              <a:spcBef>
+                <a:spcPts val="0"/>
+              </a:spcBef>
+              <a:spcAft>
+                <a:spcPts val="0"/>
+              </a:spcAft>
+              <a:buClr>
+                <a:schemeClr val="dk1"/>
+              </a:buClr>
+              <a:buSzPct val="100000"/>
+              <a:buAutoNum type="arabicPeriod"/>
+            </a:pPr>
+            <a:r>
+              <a:rPr b="1" lang="en" sz="6243">
+                <a:solidFill>
+                  <a:schemeClr val="dk1"/>
+                </a:solidFill>
+              </a:rPr>
+              <a:t>Prepare features</a:t>
+            </a:r>
+            <a:r>
+              <a:rPr lang="en" sz="6243">
+                <a:solidFill>
+                  <a:schemeClr val="dk1"/>
+                </a:solidFill>
+              </a:rPr>
+              <a:t> — Impute missing values and encode ZIP codes.</a:t>
+            </a:r>
+            <a:endParaRPr sz="6243">
+              <a:solidFill>
+                <a:schemeClr val="dk1"/>
+              </a:solidFill>
+            </a:endParaRPr>
+          </a:p>
+          <a:p>
+            <a:pPr indent="-327709" lvl="0" marL="457200" rtl="0" algn="l">
+              <a:spcBef>
+                <a:spcPts val="0"/>
+              </a:spcBef>
+              <a:spcAft>
+                <a:spcPts val="0"/>
+              </a:spcAft>
+              <a:buClr>
+                <a:schemeClr val="dk1"/>
+              </a:buClr>
+              <a:buSzPct val="100000"/>
+              <a:buAutoNum type="arabicPeriod"/>
+            </a:pPr>
+            <a:r>
+              <a:rPr b="1" lang="en" sz="6243">
+                <a:solidFill>
+                  <a:schemeClr val="dk1"/>
+                </a:solidFill>
+              </a:rPr>
+              <a:t>Split the data</a:t>
+            </a:r>
+            <a:r>
+              <a:rPr lang="en" sz="6243">
+                <a:solidFill>
+                  <a:schemeClr val="dk1"/>
+                </a:solidFill>
+              </a:rPr>
+              <a:t> — Create training and testing sets while keeping repeated property IDs separate.</a:t>
+            </a:r>
+            <a:endParaRPr sz="6243">
+              <a:solidFill>
+                <a:schemeClr val="dk1"/>
+              </a:solidFill>
+            </a:endParaRPr>
+          </a:p>
+          <a:p>
+            <a:pPr indent="-327709" lvl="0" marL="457200" rtl="0" algn="l">
+              <a:spcBef>
+                <a:spcPts val="0"/>
+              </a:spcBef>
+              <a:spcAft>
+                <a:spcPts val="0"/>
+              </a:spcAft>
+              <a:buClr>
+                <a:schemeClr val="dk1"/>
+              </a:buClr>
+              <a:buSzPct val="100000"/>
+              <a:buAutoNum type="arabicPeriod"/>
+            </a:pPr>
+            <a:r>
+              <a:rPr b="1" lang="en" sz="6243">
+                <a:solidFill>
+                  <a:schemeClr val="dk1"/>
+                </a:solidFill>
+              </a:rPr>
+              <a:t>Train models</a:t>
+            </a:r>
+            <a:r>
+              <a:rPr lang="en" sz="6243">
+                <a:solidFill>
+                  <a:schemeClr val="dk1"/>
+                </a:solidFill>
+              </a:rPr>
+              <a:t> — Fit three regression algorithms.</a:t>
+            </a:r>
+            <a:endParaRPr sz="6243">
+              <a:solidFill>
+                <a:schemeClr val="dk1"/>
+              </a:solidFill>
+            </a:endParaRPr>
+          </a:p>
+          <a:p>
+            <a:pPr indent="-327709" lvl="0" marL="457200" rtl="0" algn="l">
+              <a:spcBef>
+                <a:spcPts val="0"/>
+              </a:spcBef>
+              <a:spcAft>
+                <a:spcPts val="0"/>
+              </a:spcAft>
+              <a:buClr>
+                <a:schemeClr val="dk1"/>
+              </a:buClr>
+              <a:buSzPct val="100000"/>
+              <a:buAutoNum type="arabicPeriod"/>
+            </a:pPr>
+            <a:r>
+              <a:rPr b="1" lang="en" sz="6243">
+                <a:solidFill>
+                  <a:schemeClr val="dk1"/>
+                </a:solidFill>
+              </a:rPr>
+              <a:t>Evaluate performance</a:t>
+            </a:r>
+            <a:r>
+              <a:rPr lang="en" sz="6243">
+                <a:solidFill>
+                  <a:schemeClr val="dk1"/>
+                </a:solidFill>
+              </a:rPr>
+              <a:t> — Compare predictions using MAE, RMSE and R².</a:t>
+            </a:r>
+            <a:endParaRPr sz="6243">
+              <a:solidFill>
+                <a:schemeClr val="dk1"/>
+              </a:solidFill>
+            </a:endParaRPr>
+          </a:p>
+          <a:p>
+            <a:pPr indent="-327709" lvl="0" marL="457200" rtl="0" algn="l">
+              <a:spcBef>
+                <a:spcPts val="0"/>
+              </a:spcBef>
+              <a:spcAft>
+                <a:spcPts val="0"/>
+              </a:spcAft>
+              <a:buClr>
+                <a:schemeClr val="dk1"/>
+              </a:buClr>
+              <a:buSzPct val="100000"/>
+              <a:buAutoNum type="arabicPeriod"/>
+            </a:pPr>
+            <a:r>
+              <a:rPr b="1" lang="en" sz="6243">
+                <a:solidFill>
+                  <a:schemeClr val="dk1"/>
+                </a:solidFill>
+              </a:rPr>
+              <a:t>Select a model</a:t>
+            </a:r>
+            <a:r>
+              <a:rPr lang="en" sz="6243">
+                <a:solidFill>
+                  <a:schemeClr val="dk1"/>
+                </a:solidFill>
+              </a:rPr>
+              <a:t> — Choose the best-performing model based on evaluation results.</a:t>
+            </a:r>
+            <a:endParaRPr sz="6243">
+              <a:solidFill>
+                <a:schemeClr val="dk1"/>
+              </a:solidFill>
+            </a:endParaRPr>
+          </a:p>
+          <a:p>
+            <a:pPr indent="0" lvl="0" marL="0" rtl="0" algn="l">
+              <a:spcBef>
+                <a:spcPts val="1200"/>
+              </a:spcBef>
+              <a:spcAft>
+                <a:spcPts val="0"/>
+              </a:spcAft>
+              <a:buClr>
+                <a:schemeClr val="dk1"/>
+              </a:buClr>
+              <a:buSzPts val="275"/>
+              <a:buFont typeface="Arial"/>
+              <a:buNone/>
+            </a:pPr>
+            <a:r>
+              <a:rPr b="1" lang="en" sz="6243">
+                <a:solidFill>
+                  <a:schemeClr val="dk1"/>
+                </a:solidFill>
+              </a:rPr>
+              <a:t>Models tested</a:t>
+            </a:r>
+            <a:endParaRPr b="1" sz="6243">
+              <a:solidFill>
+                <a:schemeClr val="dk1"/>
+              </a:solidFill>
+            </a:endParaRPr>
+          </a:p>
+          <a:p>
+            <a:pPr indent="-327709" lvl="0" marL="457200" rtl="0" algn="l">
+              <a:spcBef>
+                <a:spcPts val="1200"/>
+              </a:spcBef>
+              <a:spcAft>
+                <a:spcPts val="0"/>
+              </a:spcAft>
+              <a:buClr>
+                <a:schemeClr val="dk1"/>
+              </a:buClr>
+              <a:buSzPct val="100000"/>
               <a:buChar char="●"/>
             </a:pPr>
             <a:r>
-              <a:rPr lang="en" sz="1800"/>
-              <a:t>Checked for missing values and exact duplicate rows.</a:t>
-            </a:r>
-            <a:endParaRPr sz="1800"/>
-          </a:p>
-          <a:p>
-            <a:pPr indent="-342900" lvl="0" marL="457200" rtl="0" algn="l">
-              <a:lnSpc>
-                <a:spcPct val="115000"/>
-              </a:lnSpc>
-              <a:spcBef>
-                <a:spcPts val="0"/>
-              </a:spcBef>
-              <a:spcAft>
-                <a:spcPts val="0"/>
-              </a:spcAft>
-              <a:buSzPts val="1800"/>
+              <a:rPr lang="en" sz="6243">
+                <a:solidFill>
+                  <a:schemeClr val="dk1"/>
+                </a:solidFill>
+              </a:rPr>
+              <a:t>Linear Regression</a:t>
+            </a:r>
+            <a:endParaRPr sz="6243">
+              <a:solidFill>
+                <a:schemeClr val="dk1"/>
+              </a:solidFill>
+            </a:endParaRPr>
+          </a:p>
+          <a:p>
+            <a:pPr indent="-327709" lvl="0" marL="457200" rtl="0" algn="l">
+              <a:spcBef>
+                <a:spcPts val="0"/>
+              </a:spcBef>
+              <a:spcAft>
+                <a:spcPts val="0"/>
+              </a:spcAft>
+              <a:buClr>
+                <a:schemeClr val="dk1"/>
+              </a:buClr>
+              <a:buSzPct val="100000"/>
               <a:buChar char="●"/>
             </a:pPr>
             <a:r>
-              <a:rPr lang="en" sz="1800"/>
-              <a:t>Treated zero bedroom and bathroom values as missing for modelling and imputed them.</a:t>
-            </a:r>
-            <a:endParaRPr sz="1800"/>
-          </a:p>
-          <a:p>
-            <a:pPr indent="-342900" lvl="0" marL="457200" rtl="0" algn="l">
-              <a:lnSpc>
-                <a:spcPct val="115000"/>
-              </a:lnSpc>
-              <a:spcBef>
-                <a:spcPts val="0"/>
-              </a:spcBef>
-              <a:spcAft>
-                <a:spcPts val="0"/>
-              </a:spcAft>
-              <a:buSzPts val="1800"/>
+              <a:rPr lang="en" sz="6243">
+                <a:solidFill>
+                  <a:schemeClr val="dk1"/>
+                </a:solidFill>
+              </a:rPr>
+              <a:t>Decision Tree Regressor</a:t>
+            </a:r>
+            <a:endParaRPr sz="6243">
+              <a:solidFill>
+                <a:schemeClr val="dk1"/>
+              </a:solidFill>
+            </a:endParaRPr>
+          </a:p>
+          <a:p>
+            <a:pPr indent="-327709" lvl="0" marL="457200" rtl="0" algn="l">
+              <a:spcBef>
+                <a:spcPts val="0"/>
+              </a:spcBef>
+              <a:spcAft>
+                <a:spcPts val="0"/>
+              </a:spcAft>
+              <a:buClr>
+                <a:schemeClr val="dk1"/>
+              </a:buClr>
+              <a:buSzPct val="100000"/>
               <a:buChar char="●"/>
             </a:pPr>
             <a:r>
-              <a:rPr lang="en" sz="1800"/>
-              <a:t>Encoded ZIP codes into numerical features.</a:t>
-            </a:r>
-            <a:endParaRPr sz="1800"/>
-          </a:p>
-          <a:p>
-            <a:pPr indent="-342900" lvl="0" marL="457200" rtl="0" algn="l">
-              <a:lnSpc>
-                <a:spcPct val="115000"/>
-              </a:lnSpc>
-              <a:spcBef>
-                <a:spcPts val="0"/>
-              </a:spcBef>
-              <a:spcAft>
-                <a:spcPts val="0"/>
-              </a:spcAft>
-              <a:buSzPts val="1800"/>
-              <a:buChar char="●"/>
-            </a:pPr>
-            <a:r>
-              <a:rPr lang="en" sz="1800"/>
-              <a:t>Created sale year and sale month features from the date.</a:t>
-            </a:r>
-            <a:endParaRPr sz="1800"/>
-          </a:p>
-          <a:p>
-            <a:pPr indent="-342900" lvl="0" marL="457200" rtl="0" algn="l">
-              <a:lnSpc>
-                <a:spcPct val="115000"/>
-              </a:lnSpc>
-              <a:spcBef>
-                <a:spcPts val="0"/>
-              </a:spcBef>
-              <a:spcAft>
-                <a:spcPts val="0"/>
-              </a:spcAft>
-              <a:buSzPts val="1800"/>
-              <a:buChar char="●"/>
-            </a:pPr>
-            <a:r>
-              <a:rPr lang="en" sz="1800"/>
-              <a:t>Split the data into 80% training and 20% testing sets.</a:t>
-            </a:r>
-            <a:endParaRPr sz="1800"/>
-          </a:p>
-          <a:p>
-            <a:pPr indent="-342900" lvl="0" marL="457200" rtl="0" algn="l">
-              <a:lnSpc>
-                <a:spcPct val="115000"/>
-              </a:lnSpc>
-              <a:spcBef>
-                <a:spcPts val="0"/>
-              </a:spcBef>
-              <a:spcAft>
-                <a:spcPts val="0"/>
-              </a:spcAft>
-              <a:buSzPts val="1800"/>
-              <a:buChar char="●"/>
-            </a:pPr>
-            <a:r>
-              <a:rPr lang="en" sz="1800"/>
-              <a:t>Kept repeated property IDs in separate groups to reduce data leakage.</a:t>
-            </a:r>
-            <a:endParaRPr sz="1800"/>
-          </a:p>
-          <a:p>
-            <a:pPr indent="0" lvl="0" marL="0" rtl="0" algn="ctr">
+              <a:rPr lang="en" sz="6243">
+                <a:solidFill>
+                  <a:schemeClr val="dk1"/>
+                </a:solidFill>
+              </a:rPr>
+              <a:t>Random Forest Regressor</a:t>
+            </a:r>
+            <a:endParaRPr sz="6243">
+              <a:solidFill>
+                <a:schemeClr val="dk1"/>
+              </a:solidFill>
+            </a:endParaRPr>
+          </a:p>
+          <a:p>
+            <a:pPr indent="0" lvl="0" marL="0" rtl="0" algn="l">
               <a:spcBef>
                 <a:spcPts val="1200"/>
               </a:spcBef>
               <a:spcAft>
-                <a:spcPts val="0"/>
+                <a:spcPts val="1200"/>
               </a:spcAft>
               <a:buNone/>
             </a:pPr>
             <a:r>
               <a:t/>
             </a:r>
-            <a:endParaRPr sz="1600"/>
+            <a:endParaRPr/>
           </a:p>
         </p:txBody>
       </p:sp>
@@ -7118,7 +10409,7 @@
   <p:cSld>
     <p:spTree>
       <p:nvGrpSpPr>
-        <p:cNvPr id="84" name="Shape 84"/>
+        <p:cNvPr id="83" name="Shape 83"/>
         <p:cNvGrpSpPr/>
         <p:nvPr/>
       </p:nvGrpSpPr>
@@ -7132,56 +10423,16 @@
       </p:grpSpPr>
       <p:sp>
         <p:nvSpPr>
-          <p:cNvPr id="85" name="Google Shape;85;p18"/>
+          <p:cNvPr id="84" name="Google Shape;84;p18"/>
           <p:cNvSpPr txBox="1"/>
           <p:nvPr>
-            <p:ph type="ctrTitle"/>
+            <p:ph type="title"/>
           </p:nvPr>
         </p:nvSpPr>
         <p:spPr>
           <a:xfrm>
-            <a:off x="311708" y="744575"/>
-            <a:ext cx="8520600" cy="2052600"/>
-          </a:xfrm>
-          <a:prstGeom prst="rect">
-            <a:avLst/>
-          </a:prstGeom>
-        </p:spPr>
-        <p:txBody>
-          <a:bodyPr anchorCtr="0" anchor="b" bIns="91425" lIns="91425" spcFirstLastPara="1" rIns="91425" wrap="square" tIns="91425">
-            <a:normAutofit/>
-          </a:bodyPr>
-          <a:lstStyle/>
-          <a:p>
-            <a:pPr indent="0" lvl="0" marL="0" rtl="0" algn="ctr">
-              <a:spcBef>
-                <a:spcPts val="0"/>
-              </a:spcBef>
-              <a:spcAft>
-                <a:spcPts val="0"/>
-              </a:spcAft>
-              <a:buNone/>
-            </a:pPr>
-            <a:r>
-              <a:rPr lang="en"/>
-              <a:t>Comparing the models</a:t>
-            </a:r>
-            <a:endParaRPr/>
-          </a:p>
-        </p:txBody>
-      </p:sp>
-      <p:sp>
-        <p:nvSpPr>
-          <p:cNvPr id="86" name="Google Shape;86;p18"/>
-          <p:cNvSpPr txBox="1"/>
-          <p:nvPr>
-            <p:ph idx="1" type="subTitle"/>
-          </p:nvPr>
-        </p:nvSpPr>
-        <p:spPr>
-          <a:xfrm>
-            <a:off x="311700" y="2834125"/>
-            <a:ext cx="8520600" cy="792600"/>
+            <a:off x="311700" y="445025"/>
+            <a:ext cx="8520600" cy="572700"/>
           </a:xfrm>
           <a:prstGeom prst="rect">
             <a:avLst/>
@@ -7189,7 +10440,7 @@
         </p:spPr>
         <p:txBody>
           <a:bodyPr anchorCtr="0" anchor="t" bIns="91425" lIns="91425" spcFirstLastPara="1" rIns="91425" wrap="square" tIns="91425">
-            <a:noAutofit/>
+            <a:normAutofit/>
           </a:bodyPr>
           <a:lstStyle/>
           <a:p>
@@ -7198,10 +10449,10 @@
                 <a:spcPct val="115000"/>
               </a:lnSpc>
               <a:spcBef>
-                <a:spcPts val="1200"/>
-              </a:spcBef>
-              <a:spcAft>
-                <a:spcPts val="0"/>
+                <a:spcPts val="2400"/>
+              </a:spcBef>
+              <a:spcAft>
+                <a:spcPts val="600"/>
               </a:spcAft>
               <a:buClr>
                 <a:schemeClr val="dk1"/>
@@ -7211,24 +10462,61 @@
               <a:buNone/>
             </a:pPr>
             <a:r>
-              <a:rPr lang="en" sz="1600">
-                <a:solidFill>
-                  <a:schemeClr val="dk1"/>
-                </a:solidFill>
-              </a:rPr>
-              <a:t>I evaluated three regression algorithms on the same test dataset.</a:t>
-            </a:r>
-            <a:endParaRPr sz="1600">
+              <a:rPr b="1" lang="en" sz="2300"/>
+              <a:t>Model Comparison</a:t>
+            </a:r>
+            <a:endParaRPr/>
+          </a:p>
+        </p:txBody>
+      </p:sp>
+      <p:sp>
+        <p:nvSpPr>
+          <p:cNvPr id="85" name="Google Shape;85;p18"/>
+          <p:cNvSpPr txBox="1"/>
+          <p:nvPr>
+            <p:ph idx="1" type="body"/>
+          </p:nvPr>
+        </p:nvSpPr>
+        <p:spPr>
+          <a:xfrm>
+            <a:off x="311700" y="1152475"/>
+            <a:ext cx="8520600" cy="3416400"/>
+          </a:xfrm>
+          <a:prstGeom prst="rect">
+            <a:avLst/>
+          </a:prstGeom>
+        </p:spPr>
+        <p:txBody>
+          <a:bodyPr anchorCtr="0" anchor="t" bIns="91425" lIns="91425" spcFirstLastPara="1" rIns="91425" wrap="square" tIns="91425">
+            <a:normAutofit/>
+          </a:bodyPr>
+          <a:lstStyle/>
+          <a:p>
+            <a:pPr indent="0" lvl="0" marL="0" rtl="0" algn="l">
+              <a:spcBef>
+                <a:spcPts val="1200"/>
+              </a:spcBef>
+              <a:spcAft>
+                <a:spcPts val="0"/>
+              </a:spcAft>
+              <a:buNone/>
+            </a:pPr>
+            <a:r>
+              <a:rPr b="1" lang="en" sz="2500">
+                <a:solidFill>
+                  <a:schemeClr val="dk1"/>
+                </a:solidFill>
+              </a:rPr>
+              <a:t>1. Linear Regression</a:t>
+            </a:r>
+            <a:endParaRPr b="1" sz="2500">
               <a:solidFill>
                 <a:schemeClr val="dk1"/>
               </a:solidFill>
             </a:endParaRPr>
           </a:p>
           <a:p>
-            <a:pPr indent="-330200" lvl="0" marL="457200" rtl="0" algn="l">
-              <a:lnSpc>
-                <a:spcPct val="115000"/>
-              </a:lnSpc>
+            <a:pPr indent="-387350" lvl="0" marL="457200" rtl="0" algn="l">
               <a:spcBef>
                 <a:spcPts val="1200"/>
               </a:spcBef>
@@ -7238,104 +10526,74 @@
               <a:buClr>
                 <a:schemeClr val="dk1"/>
               </a:buClr>
-              <a:buSzPts val="1600"/>
+              <a:buSzPts val="2500"/>
               <a:buChar char="●"/>
             </a:pPr>
             <a:r>
-              <a:rPr b="1" lang="en" sz="1600">
-                <a:solidFill>
-                  <a:schemeClr val="dk1"/>
-                </a:solidFill>
-              </a:rPr>
-              <a:t>Linear Regression:</a:t>
-            </a:r>
-            <a:r>
-              <a:rPr lang="en" sz="1600">
-                <a:solidFill>
-                  <a:schemeClr val="dk1"/>
-                </a:solidFill>
-              </a:rPr>
-              <a:t> Test MAE ≈ $134,529</a:t>
-            </a:r>
-            <a:endParaRPr sz="1600">
+              <a:rPr lang="en" sz="2500">
+                <a:solidFill>
+                  <a:schemeClr val="dk1"/>
+                </a:solidFill>
+              </a:rPr>
+              <a:t>MAE: $134,529</a:t>
+            </a:r>
+            <a:endParaRPr sz="2500">
               <a:solidFill>
                 <a:schemeClr val="dk1"/>
               </a:solidFill>
             </a:endParaRPr>
           </a:p>
           <a:p>
-            <a:pPr indent="-330200" lvl="0" marL="457200" rtl="0" algn="l">
-              <a:lnSpc>
-                <a:spcPct val="115000"/>
-              </a:lnSpc>
-              <a:spcBef>
-                <a:spcPts val="0"/>
-              </a:spcBef>
-              <a:spcAft>
-                <a:spcPts val="0"/>
-              </a:spcAft>
-              <a:buClr>
-                <a:schemeClr val="dk1"/>
-              </a:buClr>
-              <a:buSzPts val="1600"/>
+            <a:pPr indent="-387350" lvl="0" marL="457200" rtl="0" algn="l">
+              <a:spcBef>
+                <a:spcPts val="0"/>
+              </a:spcBef>
+              <a:spcAft>
+                <a:spcPts val="0"/>
+              </a:spcAft>
+              <a:buClr>
+                <a:schemeClr val="dk1"/>
+              </a:buClr>
+              <a:buSzPts val="2500"/>
               <a:buChar char="●"/>
             </a:pPr>
             <a:r>
-              <a:rPr b="1" lang="en" sz="1600">
-                <a:solidFill>
-                  <a:schemeClr val="dk1"/>
-                </a:solidFill>
-              </a:rPr>
-              <a:t>Decision Tree:</a:t>
-            </a:r>
-            <a:r>
-              <a:rPr lang="en" sz="1600">
-                <a:solidFill>
-                  <a:schemeClr val="dk1"/>
-                </a:solidFill>
-              </a:rPr>
-              <a:t> Test MAE ≈ $102,052</a:t>
-            </a:r>
-            <a:endParaRPr sz="1600">
+              <a:rPr lang="en" sz="2500">
+                <a:solidFill>
+                  <a:schemeClr val="dk1"/>
+                </a:solidFill>
+              </a:rPr>
+              <a:t>RMSE: $214,902</a:t>
+            </a:r>
+            <a:endParaRPr sz="2500">
               <a:solidFill>
                 <a:schemeClr val="dk1"/>
               </a:solidFill>
             </a:endParaRPr>
           </a:p>
           <a:p>
-            <a:pPr indent="-330200" lvl="0" marL="457200" rtl="0" algn="l">
-              <a:lnSpc>
-                <a:spcPct val="115000"/>
-              </a:lnSpc>
-              <a:spcBef>
-                <a:spcPts val="0"/>
-              </a:spcBef>
-              <a:spcAft>
-                <a:spcPts val="0"/>
-              </a:spcAft>
-              <a:buClr>
-                <a:schemeClr val="dk1"/>
-              </a:buClr>
-              <a:buSzPts val="1600"/>
+            <a:pPr indent="-387350" lvl="0" marL="457200" rtl="0" algn="l">
+              <a:spcBef>
+                <a:spcPts val="0"/>
+              </a:spcBef>
+              <a:spcAft>
+                <a:spcPts val="0"/>
+              </a:spcAft>
+              <a:buClr>
+                <a:schemeClr val="dk1"/>
+              </a:buClr>
+              <a:buSzPts val="2500"/>
               <a:buChar char="●"/>
             </a:pPr>
             <a:r>
-              <a:rPr b="1" lang="en" sz="1600">
-                <a:solidFill>
-                  <a:schemeClr val="dk1"/>
-                </a:solidFill>
-              </a:rPr>
-              <a:t>Random Forest:</a:t>
-            </a:r>
-            <a:r>
-              <a:rPr lang="en" sz="1600">
-                <a:solidFill>
-                  <a:schemeClr val="dk1"/>
-                </a:solidFill>
-              </a:rPr>
-              <a:t> Test MAE ≈ $67,713</a:t>
-            </a:r>
-            <a:endParaRPr sz="1600">
+              <a:rPr lang="en" sz="2500">
+                <a:solidFill>
+                  <a:schemeClr val="dk1"/>
+                </a:solidFill>
+              </a:rPr>
+              <a:t>R²: 0.669</a:t>
+            </a:r>
+            <a:endParaRPr sz="2500">
               <a:solidFill>
                 <a:schemeClr val="dk1"/>
               </a:solidFill>
@@ -7343,51 +10601,11 @@
           </a:p>
           <a:p>
             <a:pPr indent="0" lvl="0" marL="0" rtl="0" algn="l">
-              <a:lnSpc>
-                <a:spcPct val="115000"/>
-              </a:lnSpc>
               <a:spcBef>
                 <a:spcPts val="1200"/>
               </a:spcBef>
               <a:spcAft>
-                <a:spcPts val="0"/>
-              </a:spcAft>
-              <a:buClr>
-                <a:schemeClr val="dk1"/>
-              </a:buClr>
-              <a:buSzPts val="1100"/>
-              <a:buFont typeface="Arial"/>
-              <a:buNone/>
-            </a:pPr>
-            <a:r>
-              <a:rPr b="1" lang="en" sz="1600">
-                <a:solidFill>
-                  <a:schemeClr val="dk1"/>
-                </a:solidFill>
-              </a:rPr>
-              <a:t>Finding:</a:t>
-            </a:r>
-            <a:r>
-              <a:rPr lang="en" sz="1600">
-                <a:solidFill>
-                  <a:schemeClr val="dk1"/>
-                </a:solidFill>
-              </a:rPr>
-              <a:t> Random Forest had the lowest average absolute prediction error and performed best among the three models tested.</a:t>
-            </a:r>
-            <a:endParaRPr sz="1600">
-              <a:solidFill>
-                <a:schemeClr val="dk1"/>
-              </a:solidFill>
-            </a:endParaRPr>
-          </a:p>
-          <a:p>
-            <a:pPr indent="0" lvl="0" marL="0" rtl="0" algn="ctr">
-              <a:spcBef>
                 <a:spcPts val="1200"/>
-              </a:spcBef>
-              <a:spcAft>
-                <a:spcPts val="0"/>
               </a:spcAft>
               <a:buNone/>
             </a:pPr>
@@ -7409,21 +10627,9 @@
 <file path=ppt/slides/slide7.xml><?xml version="1.0" encoding="utf-8"?>
 <p:sld xmlns:a="http://schemas.openxmlformats.org/drawingml/2006/main" xmlns:r="http://schemas.openxmlformats.org/officeDocument/2006/relationships" xmlns:mc="http://schemas.openxmlformats.org/markup-compatibility/2006" xmlns:mv="urn:schemas-microsoft-com:mac:vml" xmlns:p="http://schemas.openxmlformats.org/presentationml/2006/main" xmlns:c="http://schemas.openxmlformats.org/drawingml/2006/chart" xmlns:dgm="http://schemas.openxmlformats.org/drawingml/2006/diagram" xmlns:o="urn:schemas-microsoft-com:office:office" xmlns:v="urn:schemas-microsoft-com:vml" xmlns:pvml="urn:schemas-microsoft-com:office:powerpoint" xmlns:com="http://schemas.openxmlformats.org/drawingml/2006/compatibility" xmlns:p14="http://schemas.microsoft.com/office/powerpoint/2010/main" xmlns:p15="http://schemas.microsoft.com/office/powerpoint/2012/main" xmlns:ahyp="http://schemas.microsoft.com/office/drawing/2018/hyperlinkcolor">
   <p:cSld>
-    <p:bg>
-      <p:bgPr>
-        <a:blipFill>
-          <a:blip r:embed="rId3">
-            <a:alphaModFix/>
-          </a:blip>
-          <a:stretch>
-            <a:fillRect/>
-          </a:stretch>
-        </a:blipFill>
-      </p:bgPr>
-    </p:bg>
     <p:spTree>
       <p:nvGrpSpPr>
-        <p:cNvPr id="90" name="Shape 90"/>
+        <p:cNvPr id="89" name="Shape 89"/>
         <p:cNvGrpSpPr/>
         <p:nvPr/>
       </p:nvGrpSpPr>
@@ -7435,6 +10641,206 @@
           <a:chExt cx="0" cy="0"/>
         </a:xfrm>
       </p:grpSpPr>
+      <p:sp>
+        <p:nvSpPr>
+          <p:cNvPr id="90" name="Google Shape;90;p19"/>
+          <p:cNvSpPr txBox="1"/>
+          <p:nvPr>
+            <p:ph type="title"/>
+          </p:nvPr>
+        </p:nvSpPr>
+        <p:spPr>
+          <a:xfrm>
+            <a:off x="311700" y="445025"/>
+            <a:ext cx="8520600" cy="572700"/>
+          </a:xfrm>
+          <a:prstGeom prst="rect">
+            <a:avLst/>
+          </a:prstGeom>
+        </p:spPr>
+        <p:txBody>
+          <a:bodyPr anchorCtr="0" anchor="t" bIns="91425" lIns="91425" spcFirstLastPara="1" rIns="91425" wrap="square" tIns="91425">
+            <a:normAutofit fontScale="90000"/>
+          </a:bodyPr>
+          <a:lstStyle/>
+          <a:p>
+            <a:pPr indent="0" lvl="0" marL="0" rtl="0" algn="l">
+              <a:spcBef>
+                <a:spcPts val="0"/>
+              </a:spcBef>
+              <a:spcAft>
+                <a:spcPts val="0"/>
+              </a:spcAft>
+              <a:buNone/>
+            </a:pPr>
+            <a:r>
+              <a:rPr lang="en"/>
+              <a:t>Model </a:t>
+            </a:r>
+            <a:r>
+              <a:rPr lang="en"/>
+              <a:t>Comparison</a:t>
+            </a:r>
+            <a:r>
+              <a:rPr lang="en"/>
+              <a:t> (cont’d)</a:t>
+            </a:r>
+            <a:endParaRPr/>
+          </a:p>
+        </p:txBody>
+      </p:sp>
+      <p:sp>
+        <p:nvSpPr>
+          <p:cNvPr id="91" name="Google Shape;91;p19"/>
+          <p:cNvSpPr txBox="1"/>
+          <p:nvPr>
+            <p:ph idx="1" type="body"/>
+          </p:nvPr>
+        </p:nvSpPr>
+        <p:spPr>
+          <a:xfrm>
+            <a:off x="311700" y="1152475"/>
+            <a:ext cx="8520600" cy="3416400"/>
+          </a:xfrm>
+          <a:prstGeom prst="rect">
+            <a:avLst/>
+          </a:prstGeom>
+        </p:spPr>
+        <p:txBody>
+          <a:bodyPr anchorCtr="0" anchor="t" bIns="91425" lIns="91425" spcFirstLastPara="1" rIns="91425" wrap="square" tIns="91425">
+            <a:normAutofit/>
+          </a:bodyPr>
+          <a:lstStyle/>
+          <a:p>
+            <a:pPr indent="0" lvl="0" marL="0" rtl="0" algn="l">
+              <a:spcBef>
+                <a:spcPts val="1200"/>
+              </a:spcBef>
+              <a:spcAft>
+                <a:spcPts val="0"/>
+              </a:spcAft>
+              <a:buClr>
+                <a:schemeClr val="dk1"/>
+              </a:buClr>
+              <a:buSzPts val="1100"/>
+              <a:buFont typeface="Arial"/>
+              <a:buNone/>
+            </a:pPr>
+            <a:r>
+              <a:rPr b="1" lang="en" sz="2400">
+                <a:solidFill>
+                  <a:schemeClr val="dk1"/>
+                </a:solidFill>
+              </a:rPr>
+              <a:t>2. Decision Tree</a:t>
+            </a:r>
+            <a:endParaRPr b="1" sz="2400">
+              <a:solidFill>
+                <a:schemeClr val="dk1"/>
+              </a:solidFill>
+            </a:endParaRPr>
+          </a:p>
+          <a:p>
+            <a:pPr indent="-381000" lvl="0" marL="457200" rtl="0" algn="l">
+              <a:spcBef>
+                <a:spcPts val="1200"/>
+              </a:spcBef>
+              <a:spcAft>
+                <a:spcPts val="0"/>
+              </a:spcAft>
+              <a:buClr>
+                <a:schemeClr val="dk1"/>
+              </a:buClr>
+              <a:buSzPts val="2400"/>
+              <a:buChar char="●"/>
+            </a:pPr>
+            <a:r>
+              <a:rPr lang="en" sz="2400">
+                <a:solidFill>
+                  <a:schemeClr val="dk1"/>
+                </a:solidFill>
+              </a:rPr>
+              <a:t>MAE: $102,052</a:t>
+            </a:r>
+            <a:endParaRPr sz="2400">
+              <a:solidFill>
+                <a:schemeClr val="dk1"/>
+              </a:solidFill>
+            </a:endParaRPr>
+          </a:p>
+          <a:p>
+            <a:pPr indent="-381000" lvl="0" marL="457200" rtl="0" algn="l">
+              <a:spcBef>
+                <a:spcPts val="0"/>
+              </a:spcBef>
+              <a:spcAft>
+                <a:spcPts val="0"/>
+              </a:spcAft>
+              <a:buClr>
+                <a:schemeClr val="dk1"/>
+              </a:buClr>
+              <a:buSzPts val="2400"/>
+              <a:buChar char="●"/>
+            </a:pPr>
+            <a:r>
+              <a:rPr lang="en" sz="2400">
+                <a:solidFill>
+                  <a:schemeClr val="dk1"/>
+                </a:solidFill>
+              </a:rPr>
+              <a:t>RMSE: $182,958</a:t>
+            </a:r>
+            <a:endParaRPr sz="2400">
+              <a:solidFill>
+                <a:schemeClr val="dk1"/>
+              </a:solidFill>
+            </a:endParaRPr>
+          </a:p>
+          <a:p>
+            <a:pPr indent="-381000" lvl="0" marL="457200" rtl="0" algn="l">
+              <a:spcBef>
+                <a:spcPts val="0"/>
+              </a:spcBef>
+              <a:spcAft>
+                <a:spcPts val="0"/>
+              </a:spcAft>
+              <a:buClr>
+                <a:schemeClr val="dk1"/>
+              </a:buClr>
+              <a:buSzPts val="2400"/>
+              <a:buChar char="●"/>
+            </a:pPr>
+            <a:r>
+              <a:rPr lang="en" sz="2400">
+                <a:solidFill>
+                  <a:schemeClr val="dk1"/>
+                </a:solidFill>
+              </a:rPr>
+              <a:t>R²: 0.760</a:t>
+            </a:r>
+            <a:endParaRPr sz="2400">
+              <a:solidFill>
+                <a:schemeClr val="dk1"/>
+              </a:solidFill>
+            </a:endParaRPr>
+          </a:p>
+          <a:p>
+            <a:pPr indent="0" lvl="0" marL="0" rtl="0" algn="l">
+              <a:spcBef>
+                <a:spcPts val="1200"/>
+              </a:spcBef>
+              <a:spcAft>
+                <a:spcPts val="1200"/>
+              </a:spcAft>
+              <a:buNone/>
+            </a:pPr>
+            <a:r>
+              <a:t/>
+            </a:r>
+            <a:endParaRPr/>
+          </a:p>
+        </p:txBody>
+      </p:sp>
     </p:spTree>
   </p:cSld>
   <p:clrMapOvr>
@@ -7448,7 +10854,7 @@
   <p:cSld>
     <p:spTree>
       <p:nvGrpSpPr>
-        <p:cNvPr id="94" name="Shape 94"/>
+        <p:cNvPr id="95" name="Shape 95"/>
         <p:cNvGrpSpPr/>
         <p:nvPr/>
       </p:nvGrpSpPr>
@@ -7462,79 +10868,16 @@
       </p:grpSpPr>
       <p:sp>
         <p:nvSpPr>
-          <p:cNvPr id="95" name="Google Shape;95;p20"/>
+          <p:cNvPr id="96" name="Google Shape;96;p20"/>
           <p:cNvSpPr txBox="1"/>
           <p:nvPr>
-            <p:ph type="ctrTitle"/>
+            <p:ph type="title"/>
           </p:nvPr>
         </p:nvSpPr>
         <p:spPr>
           <a:xfrm>
-            <a:off x="311708" y="744575"/>
-            <a:ext cx="8520600" cy="2052600"/>
-          </a:xfrm>
-          <a:prstGeom prst="rect">
-            <a:avLst/>
-          </a:prstGeom>
-        </p:spPr>
-        <p:txBody>
-          <a:bodyPr anchorCtr="0" anchor="b" bIns="91425" lIns="91425" spcFirstLastPara="1" rIns="91425" wrap="square" tIns="91425">
-            <a:normAutofit/>
-          </a:bodyPr>
-          <a:lstStyle/>
-          <a:p>
-            <a:pPr indent="0" lvl="0" marL="0" rtl="0" algn="ctr">
-              <a:lnSpc>
-                <a:spcPct val="115000"/>
-              </a:lnSpc>
-              <a:spcBef>
-                <a:spcPts val="2400"/>
-              </a:spcBef>
-              <a:spcAft>
-                <a:spcPts val="0"/>
-              </a:spcAft>
-              <a:buClr>
-                <a:schemeClr val="dk1"/>
-              </a:buClr>
-              <a:buSzPts val="1100"/>
-              <a:buFont typeface="Arial"/>
-              <a:buNone/>
-            </a:pPr>
-            <a:r>
-              <a:rPr b="1" lang="en" sz="2300"/>
-              <a:t>Recommendation and Limitations</a:t>
-            </a:r>
-            <a:endParaRPr b="1" sz="2300"/>
-          </a:p>
-          <a:p>
-            <a:pPr indent="0" lvl="0" marL="0" rtl="0" algn="ctr">
-              <a:spcBef>
-                <a:spcPts val="600"/>
-              </a:spcBef>
-              <a:spcAft>
-                <a:spcPts val="0"/>
-              </a:spcAft>
-              <a:buNone/>
-            </a:pPr>
-            <a:r>
-              <a:t/>
-            </a:r>
-            <a:endParaRPr/>
-          </a:p>
-        </p:txBody>
-      </p:sp>
-      <p:sp>
-        <p:nvSpPr>
-          <p:cNvPr id="96" name="Google Shape;96;p20"/>
-          <p:cNvSpPr txBox="1"/>
-          <p:nvPr>
-            <p:ph idx="1" type="subTitle"/>
-          </p:nvPr>
-        </p:nvSpPr>
-        <p:spPr>
-          <a:xfrm>
-            <a:off x="259625" y="1875975"/>
-            <a:ext cx="8520600" cy="792600"/>
+            <a:off x="311700" y="445025"/>
+            <a:ext cx="8520600" cy="572700"/>
           </a:xfrm>
           <a:prstGeom prst="rect">
             <a:avLst/>
@@ -7542,14 +10885,51 @@
         </p:spPr>
         <p:txBody>
           <a:bodyPr anchorCtr="0" anchor="t" bIns="91425" lIns="91425" spcFirstLastPara="1" rIns="91425" wrap="square" tIns="91425">
-            <a:noAutofit/>
+            <a:normAutofit fontScale="90000"/>
           </a:bodyPr>
           <a:lstStyle/>
           <a:p>
             <a:pPr indent="0" lvl="0" marL="0" rtl="0" algn="l">
-              <a:lnSpc>
-                <a:spcPct val="115000"/>
-              </a:lnSpc>
+              <a:spcBef>
+                <a:spcPts val="0"/>
+              </a:spcBef>
+              <a:spcAft>
+                <a:spcPts val="0"/>
+              </a:spcAft>
+              <a:buNone/>
+            </a:pPr>
+            <a:r>
+              <a:rPr lang="en"/>
+              <a:t>Model Comparision (cont’d)</a:t>
+            </a:r>
+            <a:endParaRPr/>
+          </a:p>
+        </p:txBody>
+      </p:sp>
+      <p:sp>
+        <p:nvSpPr>
+          <p:cNvPr id="97" name="Google Shape;97;p20"/>
+          <p:cNvSpPr txBox="1"/>
+          <p:nvPr>
+            <p:ph idx="1" type="body"/>
+          </p:nvPr>
+        </p:nvSpPr>
+        <p:spPr>
+          <a:xfrm>
+            <a:off x="311700" y="1152475"/>
+            <a:ext cx="8520600" cy="3416400"/>
+          </a:xfrm>
+          <a:prstGeom prst="rect">
+            <a:avLst/>
+          </a:prstGeom>
+        </p:spPr>
+        <p:txBody>
+          <a:bodyPr anchorCtr="0" anchor="t" bIns="91425" lIns="91425" spcFirstLastPara="1" rIns="91425" wrap="square" tIns="91425">
+            <a:normAutofit/>
+          </a:bodyPr>
+          <a:lstStyle/>
+          <a:p>
+            <a:pPr indent="0" lvl="0" marL="0" rtl="0" algn="l">
               <a:spcBef>
                 <a:spcPts val="1200"/>
               </a:spcBef>
@@ -7564,32 +10944,21 @@
               <a:buNone/>
             </a:pPr>
             <a:r>
-              <a:rPr b="1" lang="en" sz="1400">
-                <a:solidFill>
-                  <a:schemeClr val="dk1"/>
-                </a:solidFill>
-              </a:rPr>
-              <a:t>Recommendation:</a:t>
-            </a:r>
-            <a:r>
-              <a:rPr lang="en" sz="1400">
-                <a:solidFill>
-                  <a:schemeClr val="dk1"/>
-                </a:solidFill>
-              </a:rPr>
-              <a:t> Select Random Forest from the three models evaluated.</a:t>
-            </a:r>
-            <a:endParaRPr sz="1400">
+              <a:rPr b="1" lang="en" sz="2400">
+                <a:solidFill>
+                  <a:schemeClr val="dk1"/>
+                </a:solidFill>
+              </a:rPr>
+              <a:t>3. Random Forest — Best Performing Model</a:t>
+            </a:r>
+            <a:endParaRPr b="1" sz="2400">
               <a:solidFill>
                 <a:schemeClr val="dk1"/>
               </a:solidFill>
             </a:endParaRPr>
           </a:p>
           <a:p>
-            <a:pPr indent="-317500" lvl="0" marL="457200" rtl="0" algn="l">
-              <a:lnSpc>
-                <a:spcPct val="115000"/>
-              </a:lnSpc>
+            <a:pPr indent="-381000" lvl="0" marL="457200" rtl="0" algn="l">
               <a:spcBef>
                 <a:spcPts val="1200"/>
               </a:spcBef>
@@ -7599,80 +10968,74 @@
               <a:buClr>
                 <a:schemeClr val="dk1"/>
               </a:buClr>
-              <a:buSzPts val="1400"/>
+              <a:buSzPts val="2400"/>
               <a:buChar char="●"/>
             </a:pPr>
             <a:r>
-              <a:rPr lang="en" sz="1400">
-                <a:solidFill>
-                  <a:schemeClr val="dk1"/>
-                </a:solidFill>
-              </a:rPr>
-              <a:t>Lowest test MAE: approximately $67,713.</a:t>
-            </a:r>
-            <a:endParaRPr sz="1400">
+              <a:rPr lang="en" sz="2400">
+                <a:solidFill>
+                  <a:schemeClr val="dk1"/>
+                </a:solidFill>
+              </a:rPr>
+              <a:t>MAE: $67,713</a:t>
+            </a:r>
+            <a:endParaRPr sz="2400">
               <a:solidFill>
                 <a:schemeClr val="dk1"/>
               </a:solidFill>
             </a:endParaRPr>
           </a:p>
           <a:p>
-            <a:pPr indent="-317500" lvl="0" marL="457200" rtl="0" algn="l">
-              <a:lnSpc>
-                <a:spcPct val="115000"/>
-              </a:lnSpc>
-              <a:spcBef>
-                <a:spcPts val="0"/>
-              </a:spcBef>
-              <a:spcAft>
-                <a:spcPts val="0"/>
-              </a:spcAft>
-              <a:buClr>
-                <a:schemeClr val="dk1"/>
-              </a:buClr>
-              <a:buSzPts val="1400"/>
+            <a:pPr indent="-381000" lvl="0" marL="457200" rtl="0" algn="l">
+              <a:spcBef>
+                <a:spcPts val="0"/>
+              </a:spcBef>
+              <a:spcAft>
+                <a:spcPts val="0"/>
+              </a:spcAft>
+              <a:buClr>
+                <a:schemeClr val="dk1"/>
+              </a:buClr>
+              <a:buSzPts val="2400"/>
               <a:buChar char="●"/>
             </a:pPr>
             <a:r>
-              <a:rPr lang="en" sz="1400">
-                <a:solidFill>
-                  <a:schemeClr val="dk1"/>
-                </a:solidFill>
-              </a:rPr>
-              <a:t>Test R²: approximately 0.897.</a:t>
-            </a:r>
-            <a:endParaRPr sz="1400">
+              <a:rPr lang="en" sz="2400">
+                <a:solidFill>
+                  <a:schemeClr val="dk1"/>
+                </a:solidFill>
+              </a:rPr>
+              <a:t>RMSE: $119,702</a:t>
+            </a:r>
+            <a:endParaRPr sz="2400">
               <a:solidFill>
                 <a:schemeClr val="dk1"/>
               </a:solidFill>
             </a:endParaRPr>
           </a:p>
           <a:p>
-            <a:pPr indent="-317500" lvl="0" marL="457200" rtl="0" algn="l">
-              <a:lnSpc>
-                <a:spcPct val="115000"/>
-              </a:lnSpc>
-              <a:spcBef>
-                <a:spcPts val="0"/>
-              </a:spcBef>
-              <a:spcAft>
-                <a:spcPts val="0"/>
-              </a:spcAft>
-              <a:buClr>
-                <a:schemeClr val="dk1"/>
-              </a:buClr>
-              <a:buSzPts val="1400"/>
+            <a:pPr indent="-381000" lvl="0" marL="457200" rtl="0" algn="l">
+              <a:spcBef>
+                <a:spcPts val="0"/>
+              </a:spcBef>
+              <a:spcAft>
+                <a:spcPts val="0"/>
+              </a:spcAft>
+              <a:buClr>
+                <a:schemeClr val="dk1"/>
+              </a:buClr>
+              <a:buSzPts val="2400"/>
               <a:buChar char="●"/>
             </a:pPr>
             <a:r>
-              <a:rPr lang="en" sz="1400">
-                <a:solidFill>
-                  <a:schemeClr val="dk1"/>
-                </a:solidFill>
-              </a:rPr>
-              <a:t>Important features included living area, property grade and location.</a:t>
-            </a:r>
-            <a:endParaRPr sz="1400">
+              <a:rPr lang="en" sz="2400">
+                <a:solidFill>
+                  <a:schemeClr val="dk1"/>
+                </a:solidFill>
+              </a:rPr>
+              <a:t>R²: 0.897</a:t>
+            </a:r>
+            <a:endParaRPr sz="2400">
               <a:solidFill>
                 <a:schemeClr val="dk1"/>
               </a:solidFill>
@@ -7680,9 +11043,130 @@
           </a:p>
           <a:p>
             <a:pPr indent="0" lvl="0" marL="0" rtl="0" algn="l">
-              <a:lnSpc>
-                <a:spcPct val="115000"/>
-              </a:lnSpc>
+              <a:spcBef>
+                <a:spcPts val="1200"/>
+              </a:spcBef>
+              <a:spcAft>
+                <a:spcPts val="1200"/>
+              </a:spcAft>
+              <a:buNone/>
+            </a:pPr>
+            <a:r>
+              <a:t/>
+            </a:r>
+            <a:endParaRPr/>
+          </a:p>
+        </p:txBody>
+      </p:sp>
+    </p:spTree>
+  </p:cSld>
+  <p:clrMapOvr>
+    <a:masterClrMapping/>
+  </p:clrMapOvr>
+</p:sld>
+</file>
+
+<file path=ppt/slides/slide9.xml><?xml version="1.0" encoding="utf-8"?>
+<p:sld xmlns:a="http://schemas.openxmlformats.org/drawingml/2006/main" xmlns:r="http://schemas.openxmlformats.org/officeDocument/2006/relationships" xmlns:mc="http://schemas.openxmlformats.org/markup-compatibility/2006" xmlns:mv="urn:schemas-microsoft-com:mac:vml" xmlns:p="http://schemas.openxmlformats.org/presentationml/2006/main" xmlns:c="http://schemas.openxmlformats.org/drawingml/2006/chart" xmlns:dgm="http://schemas.openxmlformats.org/drawingml/2006/diagram" xmlns:o="urn:schemas-microsoft-com:office:office" xmlns:v="urn:schemas-microsoft-com:vml" xmlns:pvml="urn:schemas-microsoft-com:office:powerpoint" xmlns:com="http://schemas.openxmlformats.org/drawingml/2006/compatibility" xmlns:p14="http://schemas.microsoft.com/office/powerpoint/2010/main" xmlns:p15="http://schemas.microsoft.com/office/powerpoint/2012/main" xmlns:ahyp="http://schemas.microsoft.com/office/drawing/2018/hyperlinkcolor">
+  <p:cSld>
+    <p:spTree>
+      <p:nvGrpSpPr>
+        <p:cNvPr id="101" name="Shape 101"/>
+        <p:cNvGrpSpPr/>
+        <p:nvPr/>
+      </p:nvGrpSpPr>
+      <p:grpSpPr>
+        <a:xfrm>
+          <a:off x="0" y="0"/>
+          <a:ext cx="0" cy="0"/>
+          <a:chOff x="0" y="0"/>
+          <a:chExt cx="0" cy="0"/>
+        </a:xfrm>
+      </p:grpSpPr>
+      <p:sp>
+        <p:nvSpPr>
+          <p:cNvPr id="102" name="Google Shape;102;p21"/>
+          <p:cNvSpPr txBox="1"/>
+          <p:nvPr>
+            <p:ph type="title"/>
+          </p:nvPr>
+        </p:nvSpPr>
+        <p:spPr>
+          <a:xfrm>
+            <a:off x="311700" y="445025"/>
+            <a:ext cx="8520600" cy="572700"/>
+          </a:xfrm>
+          <a:prstGeom prst="rect">
+            <a:avLst/>
+          </a:prstGeom>
+        </p:spPr>
+        <p:txBody>
+          <a:bodyPr anchorCtr="0" anchor="t" bIns="91425" lIns="91425" spcFirstLastPara="1" rIns="91425" wrap="square" tIns="91425">
+            <a:normAutofit fontScale="90000"/>
+          </a:bodyPr>
+          <a:lstStyle/>
+          <a:p>
+            <a:pPr indent="0" lvl="0" marL="0" rtl="0" algn="l">
+              <a:spcBef>
+                <a:spcPts val="0"/>
+              </a:spcBef>
+              <a:spcAft>
+                <a:spcPts val="0"/>
+              </a:spcAft>
+              <a:buClr>
+                <a:schemeClr val="dk1"/>
+              </a:buClr>
+              <a:buSzPct val="39286"/>
+              <a:buFont typeface="Arial"/>
+              <a:buNone/>
+            </a:pPr>
+            <a:r>
+              <a:rPr lang="en"/>
+              <a:t>Model Comparision (cont’d)</a:t>
+            </a:r>
+            <a:endParaRPr/>
+          </a:p>
+          <a:p>
+            <a:pPr indent="0" lvl="0" marL="0" rtl="0" algn="l">
+              <a:spcBef>
+                <a:spcPts val="0"/>
+              </a:spcBef>
+              <a:spcAft>
+                <a:spcPts val="0"/>
+              </a:spcAft>
+              <a:buNone/>
+            </a:pPr>
+            <a:r>
+              <a:t/>
+            </a:r>
+            <a:endParaRPr/>
+          </a:p>
+        </p:txBody>
+      </p:sp>
+      <p:sp>
+        <p:nvSpPr>
+          <p:cNvPr id="103" name="Google Shape;103;p21"/>
+          <p:cNvSpPr txBox="1"/>
+          <p:nvPr>
+            <p:ph idx="1" type="body"/>
+          </p:nvPr>
+        </p:nvSpPr>
+        <p:spPr>
+          <a:xfrm>
+            <a:off x="311700" y="1152475"/>
+            <a:ext cx="8520600" cy="3416400"/>
+          </a:xfrm>
+          <a:prstGeom prst="rect">
+            <a:avLst/>
+          </a:prstGeom>
+        </p:spPr>
+        <p:txBody>
+          <a:bodyPr anchorCtr="0" anchor="t" bIns="91425" lIns="91425" spcFirstLastPara="1" rIns="91425" wrap="square" tIns="91425">
+            <a:normAutofit/>
+          </a:bodyPr>
+          <a:lstStyle/>
+          <a:p>
+            <a:pPr indent="0" lvl="0" marL="0" rtl="0" algn="l">
               <a:spcBef>
                 <a:spcPts val="1200"/>
               </a:spcBef>
@@ -7697,24 +11181,21 @@
               <a:buNone/>
             </a:pPr>
             <a:r>
-              <a:rPr b="1" lang="en" sz="1400">
-                <a:solidFill>
-                  <a:schemeClr val="dk1"/>
-                </a:solidFill>
-              </a:rPr>
-              <a:t>Limitations</a:t>
-            </a:r>
-            <a:endParaRPr b="1" sz="1400">
+              <a:rPr b="1" lang="en" sz="2100">
+                <a:solidFill>
+                  <a:schemeClr val="dk1"/>
+                </a:solidFill>
+              </a:rPr>
+              <a:t>Key Findings</a:t>
+            </a:r>
+            <a:endParaRPr b="1" sz="2100">
               <a:solidFill>
                 <a:schemeClr val="dk1"/>
               </a:solidFill>
             </a:endParaRPr>
           </a:p>
           <a:p>
-            <a:pPr indent="-317500" lvl="0" marL="457200" rtl="0" algn="l">
-              <a:lnSpc>
-                <a:spcPct val="115000"/>
-              </a:lnSpc>
+            <a:pPr indent="-361950" lvl="0" marL="457200" rtl="0" algn="l">
               <a:spcBef>
                 <a:spcPts val="1200"/>
               </a:spcBef>
@@ -7724,139 +11205,121 @@
               <a:buClr>
                 <a:schemeClr val="dk1"/>
               </a:buClr>
-              <a:buSzPts val="1400"/>
+              <a:buSzPts val="2100"/>
               <a:buChar char="●"/>
             </a:pPr>
             <a:r>
-              <a:rPr lang="en" sz="1400">
-                <a:solidFill>
-                  <a:schemeClr val="dk1"/>
-                </a:solidFill>
-              </a:rPr>
-              <a:t>Predictions are estimates, not guaranteed sale prices.</a:t>
-            </a:r>
-            <a:endParaRPr sz="1400">
+              <a:rPr lang="en" sz="2100">
+                <a:solidFill>
+                  <a:schemeClr val="dk1"/>
+                </a:solidFill>
+              </a:rPr>
+              <a:t>Random Forest achieved the lowest prediction errors.</a:t>
+            </a:r>
+            <a:endParaRPr sz="2100">
               <a:solidFill>
                 <a:schemeClr val="dk1"/>
               </a:solidFill>
             </a:endParaRPr>
           </a:p>
           <a:p>
-            <a:pPr indent="-317500" lvl="0" marL="457200" rtl="0" algn="l">
-              <a:lnSpc>
-                <a:spcPct val="115000"/>
-              </a:lnSpc>
-              <a:spcBef>
-                <a:spcPts val="0"/>
-              </a:spcBef>
-              <a:spcAft>
-                <a:spcPts val="0"/>
-              </a:spcAft>
-              <a:buClr>
-                <a:schemeClr val="dk1"/>
-              </a:buClr>
-              <a:buSzPts val="1400"/>
+            <a:pPr indent="-361950" lvl="0" marL="457200" rtl="0" algn="l">
+              <a:spcBef>
+                <a:spcPts val="0"/>
+              </a:spcBef>
+              <a:spcAft>
+                <a:spcPts val="0"/>
+              </a:spcAft>
+              <a:buClr>
+                <a:schemeClr val="dk1"/>
+              </a:buClr>
+              <a:buSzPts val="2100"/>
               <a:buChar char="●"/>
             </a:pPr>
             <a:r>
-              <a:rPr lang="en" sz="1400">
-                <a:solidFill>
-                  <a:schemeClr val="dk1"/>
-                </a:solidFill>
-              </a:rPr>
-              <a:t>Errors can be larger for expensive properties.</a:t>
-            </a:r>
-            <a:endParaRPr sz="1400">
+              <a:rPr lang="en" sz="2100">
+                <a:solidFill>
+                  <a:schemeClr val="dk1"/>
+                </a:solidFill>
+              </a:rPr>
+              <a:t>It had the highest R² of the three models.</a:t>
+            </a:r>
+            <a:endParaRPr sz="2100">
               <a:solidFill>
                 <a:schemeClr val="dk1"/>
               </a:solidFill>
             </a:endParaRPr>
           </a:p>
           <a:p>
-            <a:pPr indent="-317500" lvl="0" marL="457200" rtl="0" algn="l">
-              <a:lnSpc>
-                <a:spcPct val="115000"/>
-              </a:lnSpc>
-              <a:spcBef>
-                <a:spcPts val="0"/>
-              </a:spcBef>
-              <a:spcAft>
-                <a:spcPts val="0"/>
-              </a:spcAft>
-              <a:buClr>
-                <a:schemeClr val="dk1"/>
-              </a:buClr>
-              <a:buSzPts val="1400"/>
+            <a:pPr indent="-361950" lvl="0" marL="457200" rtl="0" algn="l">
+              <a:spcBef>
+                <a:spcPts val="0"/>
+              </a:spcBef>
+              <a:spcAft>
+                <a:spcPts val="0"/>
+              </a:spcAft>
+              <a:buClr>
+                <a:schemeClr val="dk1"/>
+              </a:buClr>
+              <a:buSzPts val="2100"/>
               <a:buChar char="●"/>
             </a:pPr>
             <a:r>
-              <a:rPr lang="en" sz="1400">
-                <a:solidFill>
-                  <a:schemeClr val="dk1"/>
-                </a:solidFill>
-              </a:rPr>
-              <a:t>Further independent validation is needed before using the model in a real business setting.</a:t>
-            </a:r>
-            <a:endParaRPr sz="1400">
+              <a:rPr lang="en" sz="2100">
+                <a:solidFill>
+                  <a:schemeClr val="dk1"/>
+                </a:solidFill>
+              </a:rPr>
+              <a:t>Decision Tree showed signs of overfitting.</a:t>
+            </a:r>
+            <a:endParaRPr sz="2100">
               <a:solidFill>
                 <a:schemeClr val="dk1"/>
               </a:solidFill>
             </a:endParaRPr>
           </a:p>
           <a:p>
-            <a:pPr indent="0" lvl="0" marL="0" rtl="0" algn="l">
-              <a:lnSpc>
-                <a:spcPct val="115000"/>
-              </a:lnSpc>
-              <a:spcBef>
-                <a:spcPts val="1200"/>
-              </a:spcBef>
-              <a:spcAft>
-                <a:spcPts val="0"/>
-              </a:spcAft>
-              <a:buClr>
-                <a:schemeClr val="dk1"/>
-              </a:buClr>
-              <a:buSzPts val="1100"/>
-              <a:buFont typeface="Arial"/>
-              <a:buNone/>
-            </a:pPr>
-            <a:r>
-              <a:rPr b="1" lang="en" sz="1400">
-                <a:solidFill>
-                  <a:schemeClr val="dk1"/>
-                </a:solidFill>
-              </a:rPr>
-              <a:t>Conclusion:</a:t>
-            </a:r>
-            <a:r>
-              <a:rPr lang="en" sz="1400">
-                <a:solidFill>
-                  <a:schemeClr val="dk1"/>
-                </a:solidFill>
-              </a:rPr>
-              <a:t> Random Forest provided the strongest predictive performance among the models tested</a:t>
-            </a:r>
-            <a:endParaRPr sz="1400">
+            <a:pPr indent="-361950" lvl="0" marL="457200" rtl="0" algn="l">
+              <a:spcBef>
+                <a:spcPts val="0"/>
+              </a:spcBef>
+              <a:spcAft>
+                <a:spcPts val="0"/>
+              </a:spcAft>
+              <a:buClr>
+                <a:schemeClr val="dk1"/>
+              </a:buClr>
+              <a:buSzPts val="2100"/>
+              <a:buChar char="●"/>
+            </a:pPr>
+            <a:r>
+              <a:rPr lang="en" sz="2100">
+                <a:solidFill>
+                  <a:schemeClr val="dk1"/>
+                </a:solidFill>
+              </a:rPr>
+              <a:t>Linear Regression had the weakest overall performance.</a:t>
+            </a:r>
+            <a:endParaRPr sz="2100">
               <a:solidFill>
                 <a:schemeClr val="dk1"/>
               </a:solidFill>
             </a:endParaRPr>
           </a:p>
           <a:p>
-            <a:pPr indent="0" lvl="0" marL="0" rtl="0" algn="ctr">
+            <a:pPr indent="0" lvl="0" marL="0" rtl="0" algn="l">
               <a:spcBef>
                 <a:spcPts val="1200"/>
               </a:spcBef>
               <a:spcAft>
-                <a:spcPts val="0"/>
+                <a:spcPts val="1200"/>
               </a:spcAft>
               <a:buNone/>
             </a:pPr>
             <a:r>
               <a:t/>
             </a:r>
-            <a:endParaRPr sz="1400"/>
+            <a:endParaRPr/>
           </a:p>
         </p:txBody>
       </p:sp>
@@ -7869,6 +11332,285 @@
 </file>
 
 <file path=ppt/theme/theme1.xml><?xml version="1.0" encoding="utf-8"?>
+<a:theme xmlns:a="http://schemas.openxmlformats.org/drawingml/2006/main" xmlns:r="http://schemas.openxmlformats.org/officeDocument/2006/relationships" name="Simple Light">
+  <a:themeElements>
+    <a:clrScheme name="Simple Light">
+      <a:dk1>
+        <a:srgbClr val="000000"/>
+      </a:dk1>
+      <a:lt1>
+        <a:srgbClr val="FFFFFF"/>
+      </a:lt1>
+      <a:dk2>
+        <a:srgbClr val="595959"/>
+      </a:dk2>
+      <a:lt2>
+        <a:srgbClr val="EEEEEE"/>
+      </a:lt2>
+      <a:accent1>
+        <a:srgbClr val="4285F4"/>
+      </a:accent1>
+      <a:accent2>
+        <a:srgbClr val="212121"/>
+      </a:accent2>
+      <a:accent3>
+        <a:srgbClr val="78909C"/>
+      </a:accent3>
+      <a:accent4>
+        <a:srgbClr val="FFAB40"/>
+      </a:accent4>
+      <a:accent5>
+        <a:srgbClr val="0097A7"/>
+      </a:accent5>
+      <a:accent6>
+        <a:srgbClr val="EEFF41"/>
+      </a:accent6>
+      <a:hlink>
+        <a:srgbClr val="0097A7"/>
+      </a:hlink>
+      <a:folHlink>
+        <a:srgbClr val="0097A7"/>
+      </a:folHlink>
+    </a:clrScheme>
+    <a:fontScheme name="Office">
+      <a:majorFont>
+        <a:latin typeface="Arial"/>
+        <a:ea typeface=""/>
+        <a:cs typeface=""/>
+        <a:font script="Jpan" typeface="ＭＳ Ｐゴシック"/>
+        <a:font script="Hang" typeface="맑은 고딕"/>
+        <a:font script="Hans" typeface="宋体"/>
+        <a:font script="Hant" typeface="新細明體"/>
+        <a:font script="Arab" typeface="Times New Roman"/>
+        <a:font script="Hebr" typeface="Times New Roman"/>
+        <a:font script="Thai" typeface="Angsana New"/>
+        <a:font script="Ethi" typeface="Nyala"/>
+        <a:font script="Beng" typeface="Vrinda"/>
+        <a:font script="Gujr" typeface="Shruti"/>
+        <a:font script="Khmr" typeface="MoolBoran"/>
+        <a:font script="Knda" typeface="Tunga"/>
+        <a:font script="Guru" typeface="Raavi"/>
+        <a:font script="Cans" typeface="Euphemia"/>
+        <a:font script="Cher" typeface="Plantagenet Cherokee"/>
+        <a:font script="Yiii" typeface="Microsoft Yi Baiti"/>
+        <a:font script="Tibt" typeface="Microsoft Himalaya"/>
+        <a:font script="Thaa" typeface="MV Boli"/>
+        <a:font script="Deva" typeface="Mangal"/>
+        <a:font script="Telu" typeface="Gautami"/>
+        <a:font script="Taml" typeface="Latha"/>
+        <a:font script="Syrc" typeface="Estrangelo Edessa"/>
+        <a:font script="Orya" typeface="Kalinga"/>
+        <a:font script="Mlym" typeface="Kartika"/>
+        <a:font script="Laoo" typeface="DokChampa"/>
+        <a:font script="Sinh" typeface="Iskoola Pota"/>
+        <a:font script="Mong" typeface="Mongolian Baiti"/>
+        <a:font script="Viet" typeface="Times New Roman"/>
+        <a:font script="Uigh" typeface="Microsoft Uighur"/>
+        <a:font script="Geor" typeface="Sylfaen"/>
+      </a:majorFont>
+      <a:minorFont>
+        <a:latin typeface="Arial"/>
+        <a:ea typeface=""/>
+        <a:cs typeface=""/>
+        <a:font script="Jpan" typeface="ＭＳ Ｐゴシック"/>
+        <a:font script="Hang" typeface="맑은 고딕"/>
+        <a:font script="Hans" typeface="宋体"/>
+        <a:font script="Hant" typeface="新細明體"/>
+        <a:font script="Arab" typeface="Arial"/>
+        <a:font script="Hebr" typeface="Arial"/>
+        <a:font script="Thai" typeface="Cordia New"/>
+        <a:font script="Ethi" typeface="Nyala"/>
+        <a:font script="Beng" typeface="Vrinda"/>
+        <a:font script="Gujr" typeface="Shruti"/>
+        <a:font script="Khmr" typeface="DaunPenh"/>
+        <a:font script="Knda" typeface="Tunga"/>
+        <a:font script="Guru" typeface="Raavi"/>
+        <a:font script="Cans" typeface="Euphemia"/>
+        <a:font script="Cher" typeface="Plantagenet Cherokee"/>
+        <a:font script="Yiii" typeface="Microsoft Yi Baiti"/>
+        <a:font script="Tibt" typeface="Microsoft Himalaya"/>
+        <a:font script="Thaa" typeface="MV Boli"/>
+        <a:font script="Deva" typeface="Mangal"/>
+        <a:font script="Telu" typeface="Gautami"/>
+        <a:font script="Taml" typeface="Latha"/>
+        <a:font script="Syrc" typeface="Estrangelo Edessa"/>
+        <a:font script="Orya" typeface="Kalinga"/>
+        <a:font script="Mlym" typeface="Kartika"/>
+        <a:font script="Laoo" typeface="DokChampa"/>
+        <a:font script="Sinh" typeface="Iskoola Pota"/>
+        <a:font script="Mong" typeface="Mongolian Baiti"/>
+        <a:font script="Viet" typeface="Arial"/>
+        <a:font script="Uigh" typeface="Microsoft Uighur"/>
+        <a:font script="Geor" typeface="Sylfaen"/>
+      </a:minorFont>
+    </a:fontScheme>
+    <a:fmtScheme name="Office">
+      <a:fillStyleLst>
+        <a:solidFill>
+          <a:schemeClr val="phClr"/>
+        </a:solidFill>
+        <a:gradFill rotWithShape="1">
+          <a:gsLst>
+            <a:gs pos="0">
+              <a:schemeClr val="phClr">
+                <a:tint val="50000"/>
+                <a:satMod val="300000"/>
+              </a:schemeClr>
+            </a:gs>
+            <a:gs pos="35000">
+              <a:schemeClr val="phClr">
+                <a:tint val="37000"/>
+                <a:satMod val="300000"/>
+              </a:schemeClr>
+            </a:gs>
+            <a:gs pos="100000">
+              <a:schemeClr val="phClr">
+                <a:tint val="15000"/>
+                <a:satMod val="350000"/>
+              </a:schemeClr>
+            </a:gs>
+          </a:gsLst>
+          <a:lin ang="16200000" scaled="1"/>
+        </a:gradFill>
+        <a:gradFill rotWithShape="1">
+          <a:gsLst>
+            <a:gs pos="0">
+              <a:schemeClr val="phClr">
+                <a:tint val="100000"/>
+                <a:shade val="100000"/>
+                <a:satMod val="130000"/>
+              </a:schemeClr>
+            </a:gs>
+            <a:gs pos="100000">
+              <a:schemeClr val="phClr">
+                <a:tint val="50000"/>
+                <a:shade val="100000"/>
+                <a:satMod val="350000"/>
+              </a:schemeClr>
+            </a:gs>
+          </a:gsLst>
+          <a:lin ang="16200000" scaled="0"/>
+        </a:gradFill>
+      </a:fillStyleLst>
+      <a:lnStyleLst>
+        <a:ln w="9525" cap="flat" cmpd="sng" algn="ctr">
+          <a:solidFill>
+            <a:schemeClr val="phClr">
+              <a:shade val="95000"/>
+              <a:satMod val="105000"/>
+            </a:schemeClr>
+          </a:solidFill>
+          <a:prstDash val="solid"/>
+        </a:ln>
+        <a:ln w="25400" cap="flat" cmpd="sng" algn="ctr">
+          <a:solidFill>
+            <a:schemeClr val="phClr"/>
+          </a:solidFill>
+          <a:prstDash val="solid"/>
+        </a:ln>
+        <a:ln w="38100" cap="flat" cmpd="sng" algn="ctr">
+          <a:solidFill>
+            <a:schemeClr val="phClr"/>
+          </a:solidFill>
+          <a:prstDash val="solid"/>
+        </a:ln>
+      </a:lnStyleLst>
+      <a:effectStyleLst>
+        <a:effectStyle>
+          <a:effectLst>
+            <a:outerShdw blurRad="40000" dist="20000" dir="5400000" rotWithShape="0">
+              <a:srgbClr val="000000">
+                <a:alpha val="38000"/>
+              </a:srgbClr>
+            </a:outerShdw>
+          </a:effectLst>
+        </a:effectStyle>
+        <a:effectStyle>
+          <a:effectLst>
+            <a:outerShdw blurRad="40000" dist="23000" dir="5400000" rotWithShape="0">
+              <a:srgbClr val="000000">
+                <a:alpha val="35000"/>
+              </a:srgbClr>
+            </a:outerShdw>
+          </a:effectLst>
+        </a:effectStyle>
+        <a:effectStyle>
+          <a:effectLst>
+            <a:outerShdw blurRad="40000" dist="23000" dir="5400000" rotWithShape="0">
+              <a:srgbClr val="000000">
+                <a:alpha val="35000"/>
+              </a:srgbClr>
+            </a:outerShdw>
+          </a:effectLst>
+          <a:scene3d>
+            <a:camera prst="orthographicFront">
+              <a:rot lat="0" lon="0" rev="0"/>
+            </a:camera>
+            <a:lightRig rig="threePt" dir="t">
+              <a:rot lat="0" lon="0" rev="1200000"/>
+            </a:lightRig>
+          </a:scene3d>
+          <a:sp3d>
+            <a:bevelT w="63500" h="25400"/>
+          </a:sp3d>
+        </a:effectStyle>
+      </a:effectStyleLst>
+      <a:bgFillStyleLst>
+        <a:solidFill>
+          <a:schemeClr val="phClr"/>
+        </a:solidFill>
+        <a:gradFill rotWithShape="1">
+          <a:gsLst>
+            <a:gs pos="0">
+              <a:schemeClr val="phClr">
+                <a:tint val="40000"/>
+                <a:satMod val="350000"/>
+              </a:schemeClr>
+            </a:gs>
+            <a:gs pos="40000">
+              <a:schemeClr val="phClr">
+                <a:tint val="45000"/>
+                <a:shade val="99000"/>
+                <a:satMod val="350000"/>
+              </a:schemeClr>
+            </a:gs>
+            <a:gs pos="100000">
+              <a:schemeClr val="phClr">
+                <a:shade val="20000"/>
+                <a:satMod val="255000"/>
+              </a:schemeClr>
+            </a:gs>
+          </a:gsLst>
+          <a:path path="circle">
+            <a:fillToRect l="50000" t="-80000" r="50000" b="180000"/>
+          </a:path>
+        </a:gradFill>
+        <a:gradFill rotWithShape="1">
+          <a:gsLst>
+            <a:gs pos="0">
+              <a:schemeClr val="phClr">
+                <a:tint val="80000"/>
+                <a:satMod val="300000"/>
+              </a:schemeClr>
+            </a:gs>
+            <a:gs pos="100000">
+              <a:schemeClr val="phClr">
+                <a:shade val="30000"/>
+                <a:satMod val="200000"/>
+              </a:schemeClr>
+            </a:gs>
+          </a:gsLst>
+          <a:path path="circle">
+            <a:fillToRect l="50000" t="50000" r="50000" b="50000"/>
+          </a:path>
+        </a:gradFill>
+      </a:bgFillStyleLst>
+    </a:fmtScheme>
+  </a:themeElements>
+</a:theme>
+</file>
+
+<file path=ppt/theme/theme2.xml><?xml version="1.0" encoding="utf-8"?>
 <a:theme xmlns:a="http://schemas.openxmlformats.org/drawingml/2006/main" xmlns:r="http://schemas.openxmlformats.org/officeDocument/2006/relationships">
   <a:themeElements>
     <a:clrScheme name="Default">
@@ -8145,283 +11887,4 @@
     </a:fmtScheme>
   </a:themeElements>
 </a:theme>
-</file>
-
-<file path=ppt/theme/theme2.xml><?xml version="1.0" encoding="utf-8"?>
-<a:theme xmlns:a="http://schemas.openxmlformats.org/drawingml/2006/main" xmlns:r="http://schemas.openxmlformats.org/officeDocument/2006/relationships" name="Simple Light">
-  <a:themeElements>
-    <a:clrScheme name="Simple Light">
-      <a:dk1>
-        <a:srgbClr val="000000"/>
-      </a:dk1>
-      <a:lt1>
-        <a:srgbClr val="FFFFFF"/>
-      </a:lt1>
-      <a:dk2>
-        <a:srgbClr val="595959"/>
-      </a:dk2>
-      <a:lt2>
-        <a:srgbClr val="EEEEEE"/>
-      </a:lt2>
-      <a:accent1>
-        <a:srgbClr val="4285F4"/>
-      </a:accent1>
-      <a:accent2>
-        <a:srgbClr val="212121"/>
-      </a:accent2>
-      <a:accent3>
-        <a:srgbClr val="78909C"/>
-      </a:accent3>
-      <a:accent4>
-        <a:srgbClr val="FFAB40"/>
-      </a:accent4>
-      <a:accent5>
-        <a:srgbClr val="0097A7"/>
-      </a:accent5>
-      <a:accent6>
-        <a:srgbClr val="EEFF41"/>
-      </a:accent6>
-      <a:hlink>
-        <a:srgbClr val="0097A7"/>
-      </a:hlink>
-      <a:folHlink>
-        <a:srgbClr val="0097A7"/>
-      </a:folHlink>
-    </a:clrScheme>
-    <a:fontScheme name="Office">
-      <a:majorFont>
-        <a:latin typeface="Arial"/>
-        <a:ea typeface=""/>
-        <a:cs typeface=""/>
-        <a:font script="Jpan" typeface="ＭＳ Ｐゴシック"/>
-        <a:font script="Hang" typeface="맑은 고딕"/>
-        <a:font script="Hans" typeface="宋体"/>
-        <a:font script="Hant" typeface="新細明體"/>
-        <a:font script="Arab" typeface="Times New Roman"/>
-        <a:font script="Hebr" typeface="Times New Roman"/>
-        <a:font script="Thai" typeface="Angsana New"/>
-        <a:font script="Ethi" typeface="Nyala"/>
-        <a:font script="Beng" typeface="Vrinda"/>
-        <a:font script="Gujr" typeface="Shruti"/>
-        <a:font script="Khmr" typeface="MoolBoran"/>
-        <a:font script="Knda" typeface="Tunga"/>
-        <a:font script="Guru" typeface="Raavi"/>
-        <a:font script="Cans" typeface="Euphemia"/>
-        <a:font script="Cher" typeface="Plantagenet Cherokee"/>
-        <a:font script="Yiii" typeface="Microsoft Yi Baiti"/>
-        <a:font script="Tibt" typeface="Microsoft Himalaya"/>
-        <a:font script="Thaa" typeface="MV Boli"/>
-        <a:font script="Deva" typeface="Mangal"/>
-        <a:font script="Telu" typeface="Gautami"/>
-        <a:font script="Taml" typeface="Latha"/>
-        <a:font script="Syrc" typeface="Estrangelo Edessa"/>
-        <a:font script="Orya" typeface="Kalinga"/>
-        <a:font script="Mlym" typeface="Kartika"/>
-        <a:font script="Laoo" typeface="DokChampa"/>
-        <a:font script="Sinh" typeface="Iskoola Pota"/>
-        <a:font script="Mong" typeface="Mongolian Baiti"/>
-        <a:font script="Viet" typeface="Times New Roman"/>
-        <a:font script="Uigh" typeface="Microsoft Uighur"/>
-        <a:font script="Geor" typeface="Sylfaen"/>
-      </a:majorFont>
-      <a:minorFont>
-        <a:latin typeface="Arial"/>
-        <a:ea typeface=""/>
-        <a:cs typeface=""/>
-        <a:font script="Jpan" typeface="ＭＳ Ｐゴシック"/>
-        <a:font script="Hang" typeface="맑은 고딕"/>
-        <a:font script="Hans" typeface="宋体"/>
-        <a:font script="Hant" typeface="新細明體"/>
-        <a:font script="Arab" typeface="Arial"/>
-        <a:font script="Hebr" typeface="Arial"/>
-        <a:font script="Thai" typeface="Cordia New"/>
-        <a:font script="Ethi" typeface="Nyala"/>
-        <a:font script="Beng" typeface="Vrinda"/>
-        <a:font script="Gujr" typeface="Shruti"/>
-        <a:font script="Khmr" typeface="DaunPenh"/>
-        <a:font script="Knda" typeface="Tunga"/>
-        <a:font script="Guru" typeface="Raavi"/>
-        <a:font script="Cans" typeface="Euphemia"/>
-        <a:font script="Cher" typeface="Plantagenet Cherokee"/>
-        <a:font script="Yiii" typeface="Microsoft Yi Baiti"/>
-        <a:font script="Tibt" typeface="Microsoft Himalaya"/>
-        <a:font script="Thaa" typeface="MV Boli"/>
-        <a:font script="Deva" typeface="Mangal"/>
-        <a:font script="Telu" typeface="Gautami"/>
-        <a:font script="Taml" typeface="Latha"/>
-        <a:font script="Syrc" typeface="Estrangelo Edessa"/>
-        <a:font script="Orya" typeface="Kalinga"/>
-        <a:font script="Mlym" typeface="Kartika"/>
-        <a:font script="Laoo" typeface="DokChampa"/>
-        <a:font script="Sinh" typeface="Iskoola Pota"/>
-        <a:font script="Mong" typeface="Mongolian Baiti"/>
-        <a:font script="Viet" typeface="Arial"/>
-        <a:font script="Uigh" typeface="Microsoft Uighur"/>
-        <a:font script="Geor" typeface="Sylfaen"/>
-      </a:minorFont>
-    </a:fontScheme>
-    <a:fmtScheme name="Office">
-      <a:fillStyleLst>
-        <a:solidFill>
-          <a:schemeClr val="phClr"/>
-        </a:solidFill>
-        <a:gradFill rotWithShape="1">
-          <a:gsLst>
-            <a:gs pos="0">
-              <a:schemeClr val="phClr">
-                <a:tint val="50000"/>
-                <a:satMod val="300000"/>
-              </a:schemeClr>
-            </a:gs>
-            <a:gs pos="35000">
-              <a:schemeClr val="phClr">
-                <a:tint val="37000"/>
-                <a:satMod val="300000"/>
-              </a:schemeClr>
-            </a:gs>
-            <a:gs pos="100000">
-              <a:schemeClr val="phClr">
-                <a:tint val="15000"/>
-                <a:satMod val="350000"/>
-              </a:schemeClr>
-            </a:gs>
-          </a:gsLst>
-          <a:lin ang="16200000" scaled="1"/>
-        </a:gradFill>
-        <a:gradFill rotWithShape="1">
-          <a:gsLst>
-            <a:gs pos="0">
-              <a:schemeClr val="phClr">
-                <a:tint val="100000"/>
-                <a:shade val="100000"/>
-                <a:satMod val="130000"/>
-              </a:schemeClr>
-            </a:gs>
-            <a:gs pos="100000">
-              <a:schemeClr val="phClr">
-                <a:tint val="50000"/>
-                <a:shade val="100000"/>
-                <a:satMod val="350000"/>
-              </a:schemeClr>
-            </a:gs>
-          </a:gsLst>
-          <a:lin ang="16200000" scaled="0"/>
-        </a:gradFill>
-      </a:fillStyleLst>
-      <a:lnStyleLst>
-        <a:ln w="9525" cap="flat" cmpd="sng" algn="ctr">
-          <a:solidFill>
-            <a:schemeClr val="phClr">
-              <a:shade val="95000"/>
-              <a:satMod val="105000"/>
-            </a:schemeClr>
-          </a:solidFill>
-          <a:prstDash val="solid"/>
-        </a:ln>
-        <a:ln w="25400" cap="flat" cmpd="sng" algn="ctr">
-          <a:solidFill>
-            <a:schemeClr val="phClr"/>
-          </a:solidFill>
-          <a:prstDash val="solid"/>
-        </a:ln>
-        <a:ln w="38100" cap="flat" cmpd="sng" algn="ctr">
-          <a:solidFill>
-            <a:schemeClr val="phClr"/>
-          </a:solidFill>
-          <a:prstDash val="solid"/>
-        </a:ln>
-      </a:lnStyleLst>
-      <a:effectStyleLst>
-        <a:effectStyle>
-          <a:effectLst>
-            <a:outerShdw blurRad="40000" dist="20000" dir="5400000" rotWithShape="0">
-              <a:srgbClr val="000000">
-                <a:alpha val="38000"/>
-              </a:srgbClr>
-            </a:outerShdw>
-          </a:effectLst>
-        </a:effectStyle>
-        <a:effectStyle>
-          <a:effectLst>
-            <a:outerShdw blurRad="40000" dist="23000" dir="5400000" rotWithShape="0">
-              <a:srgbClr val="000000">
-                <a:alpha val="35000"/>
-              </a:srgbClr>
-            </a:outerShdw>
-          </a:effectLst>
-        </a:effectStyle>
-        <a:effectStyle>
-          <a:effectLst>
-            <a:outerShdw blurRad="40000" dist="23000" dir="5400000" rotWithShape="0">
-              <a:srgbClr val="000000">
-                <a:alpha val="35000"/>
-              </a:srgbClr>
-            </a:outerShdw>
-          </a:effectLst>
-          <a:scene3d>
-            <a:camera prst="orthographicFront">
-              <a:rot lat="0" lon="0" rev="0"/>
-            </a:camera>
-            <a:lightRig rig="threePt" dir="t">
-              <a:rot lat="0" lon="0" rev="1200000"/>
-            </a:lightRig>
-          </a:scene3d>
-          <a:sp3d>
-            <a:bevelT w="63500" h="25400"/>
-          </a:sp3d>
-        </a:effectStyle>
-      </a:effectStyleLst>
-      <a:bgFillStyleLst>
-        <a:solidFill>
-          <a:schemeClr val="phClr"/>
-        </a:solidFill>
-        <a:gradFill rotWithShape="1">
-          <a:gsLst>
-            <a:gs pos="0">
-              <a:schemeClr val="phClr">
-                <a:tint val="40000"/>
-                <a:satMod val="350000"/>
-              </a:schemeClr>
-            </a:gs>
-            <a:gs pos="40000">
-              <a:schemeClr val="phClr">
-                <a:tint val="45000"/>
-                <a:shade val="99000"/>
-                <a:satMod val="350000"/>
-              </a:schemeClr>
-            </a:gs>
-            <a:gs pos="100000">
-              <a:schemeClr val="phClr">
-                <a:shade val="20000"/>
-                <a:satMod val="255000"/>
-              </a:schemeClr>
-            </a:gs>
-          </a:gsLst>
-          <a:path path="circle">
-            <a:fillToRect l="50000" t="-80000" r="50000" b="180000"/>
-          </a:path>
-        </a:gradFill>
-        <a:gradFill rotWithShape="1">
-          <a:gsLst>
-            <a:gs pos="0">
-              <a:schemeClr val="phClr">
-                <a:tint val="80000"/>
-                <a:satMod val="300000"/>
-              </a:schemeClr>
-            </a:gs>
-            <a:gs pos="100000">
-              <a:schemeClr val="phClr">
-                <a:shade val="30000"/>
-                <a:satMod val="200000"/>
-              </a:schemeClr>
-            </a:gs>
-          </a:gsLst>
-          <a:path path="circle">
-            <a:fillToRect l="50000" t="50000" r="50000" b="50000"/>
-          </a:path>
-        </a:gradFill>
-      </a:bgFillStyleLst>
-    </a:fmtScheme>
-  </a:themeElements>
-</a:theme>
 </file>